--- a/Experiencia de Aprendizaje 1 - Fundamentos de AI Generativa y Prompt Engineering/Clase 1.2/Clase 1.2.pptx
+++ b/Experiencia de Aprendizaje 1 - Fundamentos de AI Generativa y Prompt Engineering/Clase 1.2/Clase 1.2.pptx
@@ -7591,8 +7591,8 @@
         </p:nvSpPr>
         <p:spPr>
           <a:xfrm>
-            <a:off x="5350230" y="5452195"/>
-            <a:ext cx="7015480" cy="1077218"/>
+            <a:off x="5350230" y="5383896"/>
+            <a:ext cx="7015480" cy="1384995"/>
           </a:xfrm>
           <a:prstGeom prst="rect">
             <a:avLst/>
@@ -7610,64 +7610,63 @@
               <a:buChar char="•"/>
             </a:pPr>
             <a:r>
-              <a:rPr lang="es-CL" sz="1600" b="1" i="1" dirty="0" err="1"/>
+              <a:rPr lang="es-CL" sz="1400" b="1" dirty="0" err="1"/>
               <a:t>Wholesome</a:t>
             </a:r>
             <a:r>
-              <a:rPr lang="es-CL" sz="1600" i="1" dirty="0"/>
-              <a:t>: No usen AI. Disfrútenlas.  </a:t>
-            </a:r>
-          </a:p>
-          <a:p>
-            <a:pPr marL="285750" indent="-285750">
-              <a:buFont typeface="Arial" panose="020B0604020202020204" pitchFamily="34" charset="0"/>
-              <a:buChar char="•"/>
-            </a:pPr>
-            <a:r>
-              <a:rPr lang="es-CL" sz="1600" b="1" i="1" dirty="0" err="1"/>
+              <a:rPr lang="es-CL" sz="1400" b="1" dirty="0"/>
+              <a:t> (actividades sanas):</a:t>
+            </a:r>
+            <a:r>
+              <a:rPr lang="es-CL" sz="1400" dirty="0"/>
+              <a:t> No uses IA. Disfrútalas.</a:t>
+            </a:r>
+            <a:br>
+              <a:rPr lang="es-CL" sz="1400" dirty="0"/>
+            </a:br>
+            <a:r>
+              <a:rPr lang="es-CL" sz="1400" b="1" dirty="0" err="1"/>
               <a:t>Toxic</a:t>
             </a:r>
             <a:r>
-              <a:rPr lang="es-CL" sz="1600" b="1" i="1" dirty="0"/>
-              <a:t>: </a:t>
-            </a:r>
-            <a:r>
-              <a:rPr lang="es-CL" sz="1600" i="1" dirty="0"/>
-              <a:t>Usa AI para automatizarlo o eliminarlo. No queremos lidiar con ellas.</a:t>
-            </a:r>
-          </a:p>
-          <a:p>
-            <a:pPr marL="285750" indent="-285750">
-              <a:buFont typeface="Arial" panose="020B0604020202020204" pitchFamily="34" charset="0"/>
-              <a:buChar char="•"/>
-            </a:pPr>
-            <a:r>
-              <a:rPr lang="es-CL" sz="1600" b="1" i="1" dirty="0"/>
-              <a:t>Chores</a:t>
-            </a:r>
-            <a:r>
-              <a:rPr lang="es-CL" sz="1600" i="1" dirty="0"/>
-              <a:t>: Usen AI para ayudarlos a hacerlo más placentero. (Sigan pensando) </a:t>
-            </a:r>
-          </a:p>
-          <a:p>
-            <a:pPr marL="285750" indent="-285750">
-              <a:buFont typeface="Arial" panose="020B0604020202020204" pitchFamily="34" charset="0"/>
-              <a:buChar char="•"/>
-            </a:pPr>
-            <a:r>
-              <a:rPr lang="es-CL" sz="1600" b="1" i="1" dirty="0" err="1"/>
+              <a:rPr lang="es-CL" sz="1400" b="1" dirty="0"/>
+              <a:t> (actividades tóxicas):</a:t>
+            </a:r>
+            <a:r>
+              <a:rPr lang="es-CL" sz="1400" dirty="0"/>
+              <a:t> Usa IA para automatizarlas o eliminarlas. No queremos lidiar con ellas.</a:t>
+            </a:r>
+            <a:br>
+              <a:rPr lang="es-CL" sz="1400" dirty="0"/>
+            </a:br>
+            <a:r>
+              <a:rPr lang="es-CL" sz="1400" b="1" dirty="0"/>
+              <a:t>Chores (tareas domésticas o rutinarias):</a:t>
+            </a:r>
+            <a:r>
+              <a:rPr lang="es-CL" sz="1400" dirty="0"/>
+              <a:t> Usa IA para hacerlas más placenteras. </a:t>
+            </a:r>
+            <a:r>
+              <a:rPr lang="es-CL" sz="1400" i="1" dirty="0"/>
+              <a:t>(Sigan pensando.)</a:t>
+            </a:r>
+            <a:br>
+              <a:rPr lang="es-CL" sz="1400" dirty="0"/>
+            </a:br>
+            <a:r>
+              <a:rPr lang="es-CL" sz="1400" b="1" dirty="0" err="1"/>
               <a:t>Vices</a:t>
             </a:r>
             <a:r>
-              <a:rPr lang="es-CL" sz="1600" b="1" i="1" dirty="0"/>
-              <a:t>: </a:t>
-            </a:r>
-            <a:r>
-              <a:rPr lang="es-CL" sz="1600" i="1" dirty="0"/>
-              <a:t>Usen AI para evitar de hacerlo, o que la AI lo haga por ustedes.</a:t>
-            </a:r>
-            <a:endParaRPr lang="es-CL" i="1" dirty="0"/>
+              <a:rPr lang="es-CL" sz="1400" b="1" dirty="0"/>
+              <a:t> (vicios):</a:t>
+            </a:r>
+            <a:r>
+              <a:rPr lang="es-CL" sz="1400" dirty="0"/>
+              <a:t> Usa IA para evitar hacerlas.</a:t>
+            </a:r>
+            <a:endParaRPr lang="es-CL" sz="1600" i="1" dirty="0"/>
           </a:p>
         </p:txBody>
       </p:sp>

--- a/Experiencia de Aprendizaje 1 - Fundamentos de AI Generativa y Prompt Engineering/Clase 1.2/Clase 1.2.pptx
+++ b/Experiencia de Aprendizaje 1 - Fundamentos de AI Generativa y Prompt Engineering/Clase 1.2/Clase 1.2.pptx
@@ -5,7 +5,7 @@
     <p:sldMasterId id="2147483648" r:id="rId1"/>
   </p:sldMasterIdLst>
   <p:notesMasterIdLst>
-    <p:notesMasterId r:id="rId19"/>
+    <p:notesMasterId r:id="rId21"/>
   </p:notesMasterIdLst>
   <p:sldIdLst>
     <p:sldId id="256" r:id="rId2"/>
@@ -15,16 +15,18 @@
     <p:sldId id="284" r:id="rId6"/>
     <p:sldId id="270" r:id="rId7"/>
     <p:sldId id="275" r:id="rId8"/>
-    <p:sldId id="276" r:id="rId9"/>
-    <p:sldId id="277" r:id="rId10"/>
-    <p:sldId id="278" r:id="rId11"/>
-    <p:sldId id="280" r:id="rId12"/>
-    <p:sldId id="268" r:id="rId13"/>
-    <p:sldId id="269" r:id="rId14"/>
-    <p:sldId id="271" r:id="rId15"/>
-    <p:sldId id="272" r:id="rId16"/>
-    <p:sldId id="273" r:id="rId17"/>
-    <p:sldId id="274" r:id="rId18"/>
+    <p:sldId id="285" r:id="rId9"/>
+    <p:sldId id="276" r:id="rId10"/>
+    <p:sldId id="277" r:id="rId11"/>
+    <p:sldId id="278" r:id="rId12"/>
+    <p:sldId id="286" r:id="rId13"/>
+    <p:sldId id="280" r:id="rId14"/>
+    <p:sldId id="268" r:id="rId15"/>
+    <p:sldId id="269" r:id="rId16"/>
+    <p:sldId id="271" r:id="rId17"/>
+    <p:sldId id="272" r:id="rId18"/>
+    <p:sldId id="273" r:id="rId19"/>
+    <p:sldId id="274" r:id="rId20"/>
   </p:sldIdLst>
   <p:sldSz cx="12192000" cy="6858000"/>
   <p:notesSz cx="6858000" cy="9144000"/>
@@ -225,7 +227,7 @@
           <a:p>
             <a:fld id="{87BDCB0C-69E9-4911-980B-989A824EA717}" type="datetimeFigureOut">
               <a:rPr lang="es-CL" smtClean="0"/>
-              <a:t>16-03-2026</a:t>
+              <a:t>17-03-2026</a:t>
             </a:fld>
             <a:endParaRPr lang="es-CL"/>
           </a:p>
@@ -565,7 +567,7 @@
           <a:p>
             <a:fld id="{2107F482-7FF7-4DD4-AE91-ACA70D5B43D5}" type="slidenum">
               <a:rPr lang="es-CL" smtClean="0"/>
-              <a:t>8</a:t>
+              <a:t>9</a:t>
             </a:fld>
             <a:endParaRPr lang="es-CL"/>
           </a:p>
@@ -680,7 +682,7 @@
           <a:p>
             <a:fld id="{2107F482-7FF7-4DD4-AE91-ACA70D5B43D5}" type="slidenum">
               <a:rPr lang="es-CL" smtClean="0"/>
-              <a:t>9</a:t>
+              <a:t>10</a:t>
             </a:fld>
             <a:endParaRPr lang="es-CL"/>
           </a:p>
@@ -795,7 +797,7 @@
           <a:p>
             <a:fld id="{2107F482-7FF7-4DD4-AE91-ACA70D5B43D5}" type="slidenum">
               <a:rPr lang="es-CL" smtClean="0"/>
-              <a:t>10</a:t>
+              <a:t>11</a:t>
             </a:fld>
             <a:endParaRPr lang="es-CL"/>
           </a:p>
@@ -819,6 +821,121 @@
   <p:cSld>
     <p:spTree>
       <p:nvGrpSpPr>
+        <p:cNvPr id="1" name="">
+          <a:extLst>
+            <a:ext uri="{FF2B5EF4-FFF2-40B4-BE49-F238E27FC236}">
+              <a16:creationId xmlns:a16="http://schemas.microsoft.com/office/drawing/2014/main" id="{9AB555FB-9B8D-E6C3-416A-F714DBC3A4E0}"/>
+            </a:ext>
+          </a:extLst>
+        </p:cNvPr>
+        <p:cNvGrpSpPr/>
+        <p:nvPr/>
+      </p:nvGrpSpPr>
+      <p:grpSpPr>
+        <a:xfrm>
+          <a:off x="0" y="0"/>
+          <a:ext cx="0" cy="0"/>
+          <a:chOff x="0" y="0"/>
+          <a:chExt cx="0" cy="0"/>
+        </a:xfrm>
+      </p:grpSpPr>
+      <p:sp>
+        <p:nvSpPr>
+          <p:cNvPr id="2" name="Marcador de imagen de diapositiva 1">
+            <a:extLst>
+              <a:ext uri="{FF2B5EF4-FFF2-40B4-BE49-F238E27FC236}">
+                <a16:creationId xmlns:a16="http://schemas.microsoft.com/office/drawing/2014/main" id="{2C50C1E2-958A-3046-34D2-25C6822B3E59}"/>
+              </a:ext>
+            </a:extLst>
+          </p:cNvPr>
+          <p:cNvSpPr>
+            <a:spLocks noGrp="1" noRot="1" noChangeAspect="1"/>
+          </p:cNvSpPr>
+          <p:nvPr>
+            <p:ph type="sldImg"/>
+          </p:nvPr>
+        </p:nvSpPr>
+        <p:spPr/>
+        <p:txBody>
+          <a:bodyPr/>
+          <a:lstStyle/>
+          <a:p>
+            <a:endParaRPr lang="es-CL"/>
+          </a:p>
+        </p:txBody>
+      </p:sp>
+      <p:sp>
+        <p:nvSpPr>
+          <p:cNvPr id="3" name="Marcador de notas 2">
+            <a:extLst>
+              <a:ext uri="{FF2B5EF4-FFF2-40B4-BE49-F238E27FC236}">
+                <a16:creationId xmlns:a16="http://schemas.microsoft.com/office/drawing/2014/main" id="{C9C06334-4EDD-C461-183A-88902DA50586}"/>
+              </a:ext>
+            </a:extLst>
+          </p:cNvPr>
+          <p:cNvSpPr>
+            <a:spLocks noGrp="1"/>
+          </p:cNvSpPr>
+          <p:nvPr>
+            <p:ph type="body" idx="1"/>
+          </p:nvPr>
+        </p:nvSpPr>
+        <p:spPr/>
+        <p:txBody>
+          <a:bodyPr/>
+          <a:lstStyle/>
+          <a:p>
+            <a:endParaRPr lang="es-CL" dirty="0"/>
+          </a:p>
+        </p:txBody>
+      </p:sp>
+      <p:sp>
+        <p:nvSpPr>
+          <p:cNvPr id="4" name="Marcador de número de diapositiva 3">
+            <a:extLst>
+              <a:ext uri="{FF2B5EF4-FFF2-40B4-BE49-F238E27FC236}">
+                <a16:creationId xmlns:a16="http://schemas.microsoft.com/office/drawing/2014/main" id="{7AE24F31-F167-700F-3512-DB54C6ACCCF8}"/>
+              </a:ext>
+            </a:extLst>
+          </p:cNvPr>
+          <p:cNvSpPr>
+            <a:spLocks noGrp="1"/>
+          </p:cNvSpPr>
+          <p:nvPr>
+            <p:ph type="sldNum" sz="quarter" idx="5"/>
+          </p:nvPr>
+        </p:nvSpPr>
+        <p:spPr/>
+        <p:txBody>
+          <a:bodyPr/>
+          <a:lstStyle/>
+          <a:p>
+            <a:fld id="{2107F482-7FF7-4DD4-AE91-ACA70D5B43D5}" type="slidenum">
+              <a:rPr lang="es-CL" smtClean="0"/>
+              <a:t>12</a:t>
+            </a:fld>
+            <a:endParaRPr lang="es-CL"/>
+          </a:p>
+        </p:txBody>
+      </p:sp>
+    </p:spTree>
+    <p:extLst>
+      <p:ext uri="{BB962C8B-B14F-4D97-AF65-F5344CB8AC3E}">
+        <p14:creationId xmlns:p14="http://schemas.microsoft.com/office/powerpoint/2010/main" val="1850958811"/>
+      </p:ext>
+    </p:extLst>
+  </p:cSld>
+  <p:clrMapOvr>
+    <a:masterClrMapping/>
+  </p:clrMapOvr>
+</p:notes>
+</file>
+
+<file path=ppt/notesSlides/notesSlide5.xml><?xml version="1.0" encoding="utf-8"?>
+<p:notes xmlns:a="http://schemas.openxmlformats.org/drawingml/2006/main" xmlns:r="http://schemas.openxmlformats.org/officeDocument/2006/relationships" xmlns:p="http://schemas.openxmlformats.org/presentationml/2006/main">
+  <p:cSld>
+    <p:spTree>
+      <p:nvGrpSpPr>
         <p:cNvPr id="1" name=""/>
         <p:cNvGrpSpPr/>
         <p:nvPr/>
@@ -886,7 +1003,7 @@
           <a:p>
             <a:fld id="{2107F482-7FF7-4DD4-AE91-ACA70D5B43D5}" type="slidenum">
               <a:rPr lang="es-CL" smtClean="0"/>
-              <a:t>13</a:t>
+              <a:t>15</a:t>
             </a:fld>
             <a:endParaRPr lang="es-CL"/>
           </a:p>
@@ -905,7 +1022,7 @@
 </p:notes>
 </file>
 
-<file path=ppt/notesSlides/notesSlide5.xml><?xml version="1.0" encoding="utf-8"?>
+<file path=ppt/notesSlides/notesSlide6.xml><?xml version="1.0" encoding="utf-8"?>
 <p:notes xmlns:a="http://schemas.openxmlformats.org/drawingml/2006/main" xmlns:r="http://schemas.openxmlformats.org/officeDocument/2006/relationships" xmlns:p="http://schemas.openxmlformats.org/presentationml/2006/main">
   <p:cSld>
     <p:spTree>
@@ -1001,7 +1118,7 @@
           <a:p>
             <a:fld id="{2107F482-7FF7-4DD4-AE91-ACA70D5B43D5}" type="slidenum">
               <a:rPr lang="es-CL" smtClean="0"/>
-              <a:t>14</a:t>
+              <a:t>16</a:t>
             </a:fld>
             <a:endParaRPr lang="es-CL"/>
           </a:p>
@@ -1020,7 +1137,7 @@
 </p:notes>
 </file>
 
-<file path=ppt/notesSlides/notesSlide6.xml><?xml version="1.0" encoding="utf-8"?>
+<file path=ppt/notesSlides/notesSlide7.xml><?xml version="1.0" encoding="utf-8"?>
 <p:notes xmlns:a="http://schemas.openxmlformats.org/drawingml/2006/main" xmlns:r="http://schemas.openxmlformats.org/officeDocument/2006/relationships" xmlns:p="http://schemas.openxmlformats.org/presentationml/2006/main">
   <p:cSld>
     <p:spTree>
@@ -1116,7 +1233,7 @@
           <a:p>
             <a:fld id="{2107F482-7FF7-4DD4-AE91-ACA70D5B43D5}" type="slidenum">
               <a:rPr lang="es-CL" smtClean="0"/>
-              <a:t>15</a:t>
+              <a:t>17</a:t>
             </a:fld>
             <a:endParaRPr lang="es-CL"/>
           </a:p>
@@ -1135,7 +1252,7 @@
 </p:notes>
 </file>
 
-<file path=ppt/notesSlides/notesSlide7.xml><?xml version="1.0" encoding="utf-8"?>
+<file path=ppt/notesSlides/notesSlide8.xml><?xml version="1.0" encoding="utf-8"?>
 <p:notes xmlns:a="http://schemas.openxmlformats.org/drawingml/2006/main" xmlns:r="http://schemas.openxmlformats.org/officeDocument/2006/relationships" xmlns:p="http://schemas.openxmlformats.org/presentationml/2006/main">
   <p:cSld>
     <p:spTree>
@@ -1231,7 +1348,7 @@
           <a:p>
             <a:fld id="{2107F482-7FF7-4DD4-AE91-ACA70D5B43D5}" type="slidenum">
               <a:rPr lang="es-CL" smtClean="0"/>
-              <a:t>16</a:t>
+              <a:t>18</a:t>
             </a:fld>
             <a:endParaRPr lang="es-CL"/>
           </a:p>
@@ -1250,7 +1367,7 @@
 </p:notes>
 </file>
 
-<file path=ppt/notesSlides/notesSlide8.xml><?xml version="1.0" encoding="utf-8"?>
+<file path=ppt/notesSlides/notesSlide9.xml><?xml version="1.0" encoding="utf-8"?>
 <p:notes xmlns:a="http://schemas.openxmlformats.org/drawingml/2006/main" xmlns:r="http://schemas.openxmlformats.org/officeDocument/2006/relationships" xmlns:p="http://schemas.openxmlformats.org/presentationml/2006/main">
   <p:cSld>
     <p:spTree>
@@ -1346,7 +1463,7 @@
           <a:p>
             <a:fld id="{2107F482-7FF7-4DD4-AE91-ACA70D5B43D5}" type="slidenum">
               <a:rPr lang="es-CL" smtClean="0"/>
-              <a:t>17</a:t>
+              <a:t>19</a:t>
             </a:fld>
             <a:endParaRPr lang="es-CL"/>
           </a:p>
@@ -1514,7 +1631,7 @@
           <a:p>
             <a:fld id="{E8BDA46D-A1A7-4D05-A86A-5A57D57622A5}" type="datetimeFigureOut">
               <a:rPr lang="es-CL" smtClean="0"/>
-              <a:t>16-03-2026</a:t>
+              <a:t>17-03-2026</a:t>
             </a:fld>
             <a:endParaRPr lang="es-CL"/>
           </a:p>
@@ -1714,7 +1831,7 @@
           <a:p>
             <a:fld id="{E8BDA46D-A1A7-4D05-A86A-5A57D57622A5}" type="datetimeFigureOut">
               <a:rPr lang="es-CL" smtClean="0"/>
-              <a:t>16-03-2026</a:t>
+              <a:t>17-03-2026</a:t>
             </a:fld>
             <a:endParaRPr lang="es-CL"/>
           </a:p>
@@ -1924,7 +2041,7 @@
           <a:p>
             <a:fld id="{E8BDA46D-A1A7-4D05-A86A-5A57D57622A5}" type="datetimeFigureOut">
               <a:rPr lang="es-CL" smtClean="0"/>
-              <a:t>16-03-2026</a:t>
+              <a:t>17-03-2026</a:t>
             </a:fld>
             <a:endParaRPr lang="es-CL"/>
           </a:p>
@@ -2124,7 +2241,7 @@
           <a:p>
             <a:fld id="{E8BDA46D-A1A7-4D05-A86A-5A57D57622A5}" type="datetimeFigureOut">
               <a:rPr lang="es-CL" smtClean="0"/>
-              <a:t>16-03-2026</a:t>
+              <a:t>17-03-2026</a:t>
             </a:fld>
             <a:endParaRPr lang="es-CL"/>
           </a:p>
@@ -2400,7 +2517,7 @@
           <a:p>
             <a:fld id="{E8BDA46D-A1A7-4D05-A86A-5A57D57622A5}" type="datetimeFigureOut">
               <a:rPr lang="es-CL" smtClean="0"/>
-              <a:t>16-03-2026</a:t>
+              <a:t>17-03-2026</a:t>
             </a:fld>
             <a:endParaRPr lang="es-CL"/>
           </a:p>
@@ -2668,7 +2785,7 @@
           <a:p>
             <a:fld id="{E8BDA46D-A1A7-4D05-A86A-5A57D57622A5}" type="datetimeFigureOut">
               <a:rPr lang="es-CL" smtClean="0"/>
-              <a:t>16-03-2026</a:t>
+              <a:t>17-03-2026</a:t>
             </a:fld>
             <a:endParaRPr lang="es-CL"/>
           </a:p>
@@ -3083,7 +3200,7 @@
           <a:p>
             <a:fld id="{E8BDA46D-A1A7-4D05-A86A-5A57D57622A5}" type="datetimeFigureOut">
               <a:rPr lang="es-CL" smtClean="0"/>
-              <a:t>16-03-2026</a:t>
+              <a:t>17-03-2026</a:t>
             </a:fld>
             <a:endParaRPr lang="es-CL"/>
           </a:p>
@@ -3225,7 +3342,7 @@
           <a:p>
             <a:fld id="{E8BDA46D-A1A7-4D05-A86A-5A57D57622A5}" type="datetimeFigureOut">
               <a:rPr lang="es-CL" smtClean="0"/>
-              <a:t>16-03-2026</a:t>
+              <a:t>17-03-2026</a:t>
             </a:fld>
             <a:endParaRPr lang="es-CL"/>
           </a:p>
@@ -3338,7 +3455,7 @@
           <a:p>
             <a:fld id="{E8BDA46D-A1A7-4D05-A86A-5A57D57622A5}" type="datetimeFigureOut">
               <a:rPr lang="es-CL" smtClean="0"/>
-              <a:t>16-03-2026</a:t>
+              <a:t>17-03-2026</a:t>
             </a:fld>
             <a:endParaRPr lang="es-CL"/>
           </a:p>
@@ -3651,7 +3768,7 @@
           <a:p>
             <a:fld id="{E8BDA46D-A1A7-4D05-A86A-5A57D57622A5}" type="datetimeFigureOut">
               <a:rPr lang="es-CL" smtClean="0"/>
-              <a:t>16-03-2026</a:t>
+              <a:t>17-03-2026</a:t>
             </a:fld>
             <a:endParaRPr lang="es-CL"/>
           </a:p>
@@ -3940,7 +4057,7 @@
           <a:p>
             <a:fld id="{E8BDA46D-A1A7-4D05-A86A-5A57D57622A5}" type="datetimeFigureOut">
               <a:rPr lang="es-CL" smtClean="0"/>
-              <a:t>16-03-2026</a:t>
+              <a:t>17-03-2026</a:t>
             </a:fld>
             <a:endParaRPr lang="es-CL"/>
           </a:p>
@@ -4183,7 +4300,7 @@
           <a:p>
             <a:fld id="{E8BDA46D-A1A7-4D05-A86A-5A57D57622A5}" type="datetimeFigureOut">
               <a:rPr lang="es-CL" smtClean="0"/>
-              <a:t>16-03-2026</a:t>
+              <a:t>17-03-2026</a:t>
             </a:fld>
             <a:endParaRPr lang="es-CL"/>
           </a:p>
@@ -4947,7 +5064,7 @@
         <p:cNvPr id="1" name="">
           <a:extLst>
             <a:ext uri="{FF2B5EF4-FFF2-40B4-BE49-F238E27FC236}">
-              <a16:creationId xmlns:a16="http://schemas.microsoft.com/office/drawing/2014/main" id="{9869FDF3-09BE-1AB8-3EC0-9C42158B4BF5}"/>
+              <a16:creationId xmlns:a16="http://schemas.microsoft.com/office/drawing/2014/main" id="{FF78F6F4-5476-9149-08BA-FB2D7CC1113F}"/>
             </a:ext>
           </a:extLst>
         </p:cNvPr>
@@ -4967,7 +5084,7 @@
           <p:cNvPr id="4" name="Picture 2" descr="Duoc UC - Learn Chile">
             <a:extLst>
               <a:ext uri="{FF2B5EF4-FFF2-40B4-BE49-F238E27FC236}">
-                <a16:creationId xmlns:a16="http://schemas.microsoft.com/office/drawing/2014/main" id="{72A8930F-1822-7455-B419-932B3D79124C}"/>
+                <a16:creationId xmlns:a16="http://schemas.microsoft.com/office/drawing/2014/main" id="{88D10D67-7E7E-C414-C0CB-715BE675B057}"/>
               </a:ext>
             </a:extLst>
           </p:cNvPr>
@@ -5014,7 +5131,7 @@
           <p:cNvPr id="5" name="Conector recto de flecha 4">
             <a:extLst>
               <a:ext uri="{FF2B5EF4-FFF2-40B4-BE49-F238E27FC236}">
-                <a16:creationId xmlns:a16="http://schemas.microsoft.com/office/drawing/2014/main" id="{F00FB54E-34D5-66B4-CA62-2D6A3F706930}"/>
+                <a16:creationId xmlns:a16="http://schemas.microsoft.com/office/drawing/2014/main" id="{650C4F39-F3C2-B27A-0FE5-F58F5C3ABC75}"/>
               </a:ext>
             </a:extLst>
           </p:cNvPr>
@@ -5056,7 +5173,7 @@
           <p:cNvPr id="6" name="Título 1">
             <a:extLst>
               <a:ext uri="{FF2B5EF4-FFF2-40B4-BE49-F238E27FC236}">
-                <a16:creationId xmlns:a16="http://schemas.microsoft.com/office/drawing/2014/main" id="{8089AB0F-C3E5-E4BD-55D8-E8A91BBA79F0}"/>
+                <a16:creationId xmlns:a16="http://schemas.microsoft.com/office/drawing/2014/main" id="{33F31236-89EE-7DE6-FCC1-2E845015F422}"/>
               </a:ext>
             </a:extLst>
           </p:cNvPr>
@@ -5067,7 +5184,7 @@
         </p:nvSpPr>
         <p:spPr>
           <a:xfrm>
-            <a:off x="6852920" y="4081938"/>
+            <a:off x="6852920" y="3981619"/>
             <a:ext cx="10515600" cy="1325563"/>
           </a:xfrm>
           <a:prstGeom prst="rect">
@@ -5107,10 +5224,35 @@
       </p:sp>
       <p:sp>
         <p:nvSpPr>
-          <p:cNvPr id="3" name="Título 1">
-            <a:extLst>
-              <a:ext uri="{FF2B5EF4-FFF2-40B4-BE49-F238E27FC236}">
-                <a16:creationId xmlns:a16="http://schemas.microsoft.com/office/drawing/2014/main" id="{B221EEEA-9C05-EEE1-C27E-326A96503126}"/>
+          <p:cNvPr id="8" name="Título 7">
+            <a:extLst>
+              <a:ext uri="{FF2B5EF4-FFF2-40B4-BE49-F238E27FC236}">
+                <a16:creationId xmlns:a16="http://schemas.microsoft.com/office/drawing/2014/main" id="{6FE87BB0-667A-CFD8-2698-11DF0259668A}"/>
+              </a:ext>
+            </a:extLst>
+          </p:cNvPr>
+          <p:cNvSpPr>
+            <a:spLocks noGrp="1"/>
+          </p:cNvSpPr>
+          <p:nvPr>
+            <p:ph type="title"/>
+          </p:nvPr>
+        </p:nvSpPr>
+        <p:spPr/>
+        <p:txBody>
+          <a:bodyPr/>
+          <a:lstStyle/>
+          <a:p>
+            <a:endParaRPr lang="es-CL"/>
+          </a:p>
+        </p:txBody>
+      </p:sp>
+      <p:sp>
+        <p:nvSpPr>
+          <p:cNvPr id="10" name="Título 1">
+            <a:extLst>
+              <a:ext uri="{FF2B5EF4-FFF2-40B4-BE49-F238E27FC236}">
+                <a16:creationId xmlns:a16="http://schemas.microsoft.com/office/drawing/2014/main" id="{D5E4E6BD-601A-AEE7-6BDC-3DF9315AF672}"/>
               </a:ext>
             </a:extLst>
           </p:cNvPr>
@@ -5121,7 +5263,7 @@
         </p:nvSpPr>
         <p:spPr>
           <a:xfrm>
-            <a:off x="7490874" y="4744719"/>
+            <a:off x="691433" y="1912016"/>
             <a:ext cx="10515600" cy="1325563"/>
           </a:xfrm>
           <a:prstGeom prst="rect">
@@ -5153,18 +5295,148 @@
           </a:lstStyle>
           <a:p>
             <a:r>
-              <a:rPr lang="es-CL" sz="3600" i="1" dirty="0"/>
-              <a:t>No, pero ayuda.</a:t>
-            </a:r>
-          </a:p>
-        </p:txBody>
-      </p:sp>
-      <p:sp>
-        <p:nvSpPr>
-          <p:cNvPr id="10" name="Título 1">
-            <a:extLst>
-              <a:ext uri="{FF2B5EF4-FFF2-40B4-BE49-F238E27FC236}">
-                <a16:creationId xmlns:a16="http://schemas.microsoft.com/office/drawing/2014/main" id="{5EA02DBA-441B-1A94-F9CC-A494815C2334}"/>
+              <a:rPr lang="es-CL" sz="4000" b="1" i="1"/>
+              <a:t>Prompt Engineering </a:t>
+            </a:r>
+            <a:r>
+              <a:rPr lang="es-CL" sz="3600" i="1"/>
+              <a:t>es una técnica para mejorar las respuestas de los modelos, buscando consistencia, reducción de alucinaciones y personalización de los LLMs.</a:t>
+            </a:r>
+            <a:endParaRPr lang="es-CL" sz="3600" i="1" dirty="0"/>
+          </a:p>
+        </p:txBody>
+      </p:sp>
+    </p:spTree>
+    <p:extLst>
+      <p:ext uri="{BB962C8B-B14F-4D97-AF65-F5344CB8AC3E}">
+        <p14:creationId xmlns:p14="http://schemas.microsoft.com/office/powerpoint/2010/main" val="1304857153"/>
+      </p:ext>
+    </p:extLst>
+  </p:cSld>
+  <p:clrMapOvr>
+    <a:masterClrMapping/>
+  </p:clrMapOvr>
+</p:sld>
+</file>
+
+<file path=ppt/slides/slide11.xml><?xml version="1.0" encoding="utf-8"?>
+<p:sld xmlns:a="http://schemas.openxmlformats.org/drawingml/2006/main" xmlns:r="http://schemas.openxmlformats.org/officeDocument/2006/relationships" xmlns:p="http://schemas.openxmlformats.org/presentationml/2006/main">
+  <p:cSld>
+    <p:spTree>
+      <p:nvGrpSpPr>
+        <p:cNvPr id="1" name="">
+          <a:extLst>
+            <a:ext uri="{FF2B5EF4-FFF2-40B4-BE49-F238E27FC236}">
+              <a16:creationId xmlns:a16="http://schemas.microsoft.com/office/drawing/2014/main" id="{9869FDF3-09BE-1AB8-3EC0-9C42158B4BF5}"/>
+            </a:ext>
+          </a:extLst>
+        </p:cNvPr>
+        <p:cNvGrpSpPr/>
+        <p:nvPr/>
+      </p:nvGrpSpPr>
+      <p:grpSpPr>
+        <a:xfrm>
+          <a:off x="0" y="0"/>
+          <a:ext cx="0" cy="0"/>
+          <a:chOff x="0" y="0"/>
+          <a:chExt cx="0" cy="0"/>
+        </a:xfrm>
+      </p:grpSpPr>
+      <p:pic>
+        <p:nvPicPr>
+          <p:cNvPr id="4" name="Picture 2" descr="Duoc UC - Learn Chile">
+            <a:extLst>
+              <a:ext uri="{FF2B5EF4-FFF2-40B4-BE49-F238E27FC236}">
+                <a16:creationId xmlns:a16="http://schemas.microsoft.com/office/drawing/2014/main" id="{72A8930F-1822-7455-B419-932B3D79124C}"/>
+              </a:ext>
+            </a:extLst>
+          </p:cNvPr>
+          <p:cNvPicPr>
+            <a:picLocks noChangeAspect="1" noChangeArrowheads="1"/>
+          </p:cNvPicPr>
+          <p:nvPr/>
+        </p:nvPicPr>
+        <p:blipFill>
+          <a:blip r:embed="rId3">
+            <a:extLst>
+              <a:ext uri="{28A0092B-C50C-407E-A947-70E740481C1C}">
+                <a14:useLocalDpi xmlns:a14="http://schemas.microsoft.com/office/drawing/2010/main" val="0"/>
+              </a:ext>
+            </a:extLst>
+          </a:blip>
+          <a:srcRect/>
+          <a:stretch>
+            <a:fillRect/>
+          </a:stretch>
+        </p:blipFill>
+        <p:spPr bwMode="auto">
+          <a:xfrm>
+            <a:off x="11135913" y="30480"/>
+            <a:ext cx="974807" cy="825402"/>
+          </a:xfrm>
+          <a:prstGeom prst="rect">
+            <a:avLst/>
+          </a:prstGeom>
+          <a:noFill/>
+          <a:extLst>
+            <a:ext uri="{909E8E84-426E-40DD-AFC4-6F175D3DCCD1}">
+              <a14:hiddenFill xmlns:a14="http://schemas.microsoft.com/office/drawing/2010/main">
+                <a:solidFill>
+                  <a:srgbClr val="FFFFFF"/>
+                </a:solidFill>
+              </a14:hiddenFill>
+            </a:ext>
+          </a:extLst>
+        </p:spPr>
+      </p:pic>
+      <p:cxnSp>
+        <p:nvCxnSpPr>
+          <p:cNvPr id="5" name="Conector recto de flecha 4">
+            <a:extLst>
+              <a:ext uri="{FF2B5EF4-FFF2-40B4-BE49-F238E27FC236}">
+                <a16:creationId xmlns:a16="http://schemas.microsoft.com/office/drawing/2014/main" id="{F00FB54E-34D5-66B4-CA62-2D6A3F706930}"/>
+              </a:ext>
+            </a:extLst>
+          </p:cNvPr>
+          <p:cNvCxnSpPr/>
+          <p:nvPr/>
+        </p:nvCxnSpPr>
+        <p:spPr>
+          <a:xfrm>
+            <a:off x="4033520" y="3545840"/>
+            <a:ext cx="2611120" cy="1198880"/>
+          </a:xfrm>
+          <a:prstGeom prst="straightConnector1">
+            <a:avLst/>
+          </a:prstGeom>
+          <a:ln w="38100">
+            <a:solidFill>
+              <a:schemeClr val="tx1"/>
+            </a:solidFill>
+            <a:tailEnd type="triangle"/>
+          </a:ln>
+        </p:spPr>
+        <p:style>
+          <a:lnRef idx="1">
+            <a:schemeClr val="accent1"/>
+          </a:lnRef>
+          <a:fillRef idx="0">
+            <a:schemeClr val="accent1"/>
+          </a:fillRef>
+          <a:effectRef idx="0">
+            <a:schemeClr val="accent1"/>
+          </a:effectRef>
+          <a:fontRef idx="minor">
+            <a:schemeClr val="tx1"/>
+          </a:fontRef>
+        </p:style>
+      </p:cxnSp>
+      <p:sp>
+        <p:nvSpPr>
+          <p:cNvPr id="6" name="Título 1">
+            <a:extLst>
+              <a:ext uri="{FF2B5EF4-FFF2-40B4-BE49-F238E27FC236}">
+                <a16:creationId xmlns:a16="http://schemas.microsoft.com/office/drawing/2014/main" id="{8089AB0F-C3E5-E4BD-55D8-E8A91BBA79F0}"/>
               </a:ext>
             </a:extLst>
           </p:cNvPr>
@@ -5175,7 +5447,7 @@
         </p:nvSpPr>
         <p:spPr>
           <a:xfrm>
-            <a:off x="691433" y="1912016"/>
+            <a:off x="6852920" y="4081938"/>
             <a:ext cx="10515600" cy="1325563"/>
           </a:xfrm>
           <a:prstGeom prst="rect">
@@ -5207,14 +5479,141 @@
           </a:lstStyle>
           <a:p>
             <a:r>
-              <a:rPr lang="es-CL" sz="4000" b="1" i="1"/>
-              <a:t>Prompt Engineering </a:t>
-            </a:r>
-            <a:r>
-              <a:rPr lang="es-CL" sz="3600" i="1"/>
-              <a:t>es una técnica para mejorar las respuestas de los modelos, buscando consistencia, reducción de alucinaciones y personalización de los LLMs.</a:t>
-            </a:r>
-            <a:endParaRPr lang="es-CL" sz="3600" i="1" dirty="0"/>
+              <a:rPr lang="es-CL" sz="3600" i="1" dirty="0"/>
+              <a:t>¿Es la solución perfecta?</a:t>
+            </a:r>
+          </a:p>
+        </p:txBody>
+      </p:sp>
+      <p:sp>
+        <p:nvSpPr>
+          <p:cNvPr id="3" name="Título 1">
+            <a:extLst>
+              <a:ext uri="{FF2B5EF4-FFF2-40B4-BE49-F238E27FC236}">
+                <a16:creationId xmlns:a16="http://schemas.microsoft.com/office/drawing/2014/main" id="{B221EEEA-9C05-EEE1-C27E-326A96503126}"/>
+              </a:ext>
+            </a:extLst>
+          </p:cNvPr>
+          <p:cNvSpPr txBox="1">
+            <a:spLocks/>
+          </p:cNvSpPr>
+          <p:nvPr/>
+        </p:nvSpPr>
+        <p:spPr>
+          <a:xfrm>
+            <a:off x="7490874" y="4744719"/>
+            <a:ext cx="10515600" cy="1325563"/>
+          </a:xfrm>
+          <a:prstGeom prst="rect">
+            <a:avLst/>
+          </a:prstGeom>
+        </p:spPr>
+        <p:txBody>
+          <a:bodyPr vert="horz" lIns="91440" tIns="45720" rIns="91440" bIns="45720" rtlCol="0" anchor="ctr">
+            <a:noAutofit/>
+          </a:bodyPr>
+          <a:lstStyle>
+            <a:lvl1pPr algn="l" defTabSz="914400" rtl="0" eaLnBrk="1" latinLnBrk="0" hangingPunct="1">
+              <a:lnSpc>
+                <a:spcPct val="90000"/>
+              </a:lnSpc>
+              <a:spcBef>
+                <a:spcPct val="0"/>
+              </a:spcBef>
+              <a:buNone/>
+              <a:defRPr sz="4400" kern="1200">
+                <a:solidFill>
+                  <a:schemeClr val="tx1"/>
+                </a:solidFill>
+                <a:latin typeface="+mj-lt"/>
+                <a:ea typeface="+mj-ea"/>
+                <a:cs typeface="+mj-cs"/>
+              </a:defRPr>
+            </a:lvl1pPr>
+          </a:lstStyle>
+          <a:p>
+            <a:r>
+              <a:rPr lang="es-CL" sz="3600" i="1" dirty="0"/>
+              <a:t>No, pero ayuda.</a:t>
+            </a:r>
+          </a:p>
+        </p:txBody>
+      </p:sp>
+      <p:sp>
+        <p:nvSpPr>
+          <p:cNvPr id="10" name="Título 1">
+            <a:extLst>
+              <a:ext uri="{FF2B5EF4-FFF2-40B4-BE49-F238E27FC236}">
+                <a16:creationId xmlns:a16="http://schemas.microsoft.com/office/drawing/2014/main" id="{5EA02DBA-441B-1A94-F9CC-A494815C2334}"/>
+              </a:ext>
+            </a:extLst>
+          </p:cNvPr>
+          <p:cNvSpPr txBox="1">
+            <a:spLocks/>
+          </p:cNvSpPr>
+          <p:nvPr/>
+        </p:nvSpPr>
+        <p:spPr>
+          <a:xfrm>
+            <a:off x="691433" y="1912016"/>
+            <a:ext cx="10515600" cy="1325563"/>
+          </a:xfrm>
+          <a:prstGeom prst="rect">
+            <a:avLst/>
+          </a:prstGeom>
+        </p:spPr>
+        <p:txBody>
+          <a:bodyPr vert="horz" lIns="91440" tIns="45720" rIns="91440" bIns="45720" rtlCol="0" anchor="ctr">
+            <a:noAutofit/>
+          </a:bodyPr>
+          <a:lstStyle>
+            <a:lvl1pPr algn="l" defTabSz="914400" rtl="0" eaLnBrk="1" latinLnBrk="0" hangingPunct="1">
+              <a:lnSpc>
+                <a:spcPct val="90000"/>
+              </a:lnSpc>
+              <a:spcBef>
+                <a:spcPct val="0"/>
+              </a:spcBef>
+              <a:buNone/>
+              <a:defRPr sz="4400" kern="1200">
+                <a:solidFill>
+                  <a:schemeClr val="tx1"/>
+                </a:solidFill>
+                <a:latin typeface="+mj-lt"/>
+                <a:ea typeface="+mj-ea"/>
+                <a:cs typeface="+mj-cs"/>
+              </a:defRPr>
+            </a:lvl1pPr>
+          </a:lstStyle>
+          <a:p>
+            <a:r>
+              <a:rPr lang="es-CL" sz="4000" b="1" i="1" dirty="0" err="1"/>
+              <a:t>Prompt</a:t>
+            </a:r>
+            <a:r>
+              <a:rPr lang="es-CL" sz="4000" b="1" i="1" dirty="0"/>
+              <a:t> </a:t>
+            </a:r>
+            <a:r>
+              <a:rPr lang="es-CL" sz="4000" b="1" i="1" dirty="0" err="1"/>
+              <a:t>Engineering</a:t>
+            </a:r>
+            <a:r>
+              <a:rPr lang="es-CL" sz="4000" b="1" i="1" dirty="0"/>
+              <a:t> </a:t>
+            </a:r>
+            <a:r>
+              <a:rPr lang="es-CL" sz="3600" i="1" dirty="0"/>
+              <a:t>es una técnica para mejorar las respuestas de los modelos, buscando consistencia, reducción de alucinaciones y personalización de los </a:t>
+            </a:r>
+            <a:r>
+              <a:rPr lang="es-CL" sz="3600" i="1" dirty="0" err="1"/>
+              <a:t>LLMs</a:t>
+            </a:r>
+            <a:r>
+              <a:rPr lang="es-CL" sz="3600" i="1" dirty="0"/>
+              <a:t>.</a:t>
+            </a:r>
           </a:p>
         </p:txBody>
       </p:sp>
@@ -5231,7 +5630,694 @@
 </p:sld>
 </file>
 
-<file path=ppt/slides/slide11.xml><?xml version="1.0" encoding="utf-8"?>
+<file path=ppt/slides/slide12.xml><?xml version="1.0" encoding="utf-8"?>
+<p:sld xmlns:a="http://schemas.openxmlformats.org/drawingml/2006/main" xmlns:r="http://schemas.openxmlformats.org/officeDocument/2006/relationships" xmlns:p="http://schemas.openxmlformats.org/presentationml/2006/main">
+  <p:cSld>
+    <p:spTree>
+      <p:nvGrpSpPr>
+        <p:cNvPr id="1" name="">
+          <a:extLst>
+            <a:ext uri="{FF2B5EF4-FFF2-40B4-BE49-F238E27FC236}">
+              <a16:creationId xmlns:a16="http://schemas.microsoft.com/office/drawing/2014/main" id="{9C02DE34-2372-FB11-3DC7-DBAEF29D8053}"/>
+            </a:ext>
+          </a:extLst>
+        </p:cNvPr>
+        <p:cNvGrpSpPr/>
+        <p:nvPr/>
+      </p:nvGrpSpPr>
+      <p:grpSpPr>
+        <a:xfrm>
+          <a:off x="0" y="0"/>
+          <a:ext cx="0" cy="0"/>
+          <a:chOff x="0" y="0"/>
+          <a:chExt cx="0" cy="0"/>
+        </a:xfrm>
+      </p:grpSpPr>
+      <p:pic>
+        <p:nvPicPr>
+          <p:cNvPr id="4" name="Picture 2" descr="Duoc UC - Learn Chile">
+            <a:extLst>
+              <a:ext uri="{FF2B5EF4-FFF2-40B4-BE49-F238E27FC236}">
+                <a16:creationId xmlns:a16="http://schemas.microsoft.com/office/drawing/2014/main" id="{B537F878-D383-D971-2FC2-3F0EDA7CD8DE}"/>
+              </a:ext>
+            </a:extLst>
+          </p:cNvPr>
+          <p:cNvPicPr>
+            <a:picLocks noChangeAspect="1" noChangeArrowheads="1"/>
+          </p:cNvPicPr>
+          <p:nvPr/>
+        </p:nvPicPr>
+        <p:blipFill>
+          <a:blip r:embed="rId3">
+            <a:extLst>
+              <a:ext uri="{28A0092B-C50C-407E-A947-70E740481C1C}">
+                <a14:useLocalDpi xmlns:a14="http://schemas.microsoft.com/office/drawing/2010/main" val="0"/>
+              </a:ext>
+            </a:extLst>
+          </a:blip>
+          <a:srcRect/>
+          <a:stretch>
+            <a:fillRect/>
+          </a:stretch>
+        </p:blipFill>
+        <p:spPr bwMode="auto">
+          <a:xfrm>
+            <a:off x="11135913" y="30480"/>
+            <a:ext cx="974807" cy="825402"/>
+          </a:xfrm>
+          <a:prstGeom prst="rect">
+            <a:avLst/>
+          </a:prstGeom>
+          <a:noFill/>
+          <a:extLst>
+            <a:ext uri="{909E8E84-426E-40DD-AFC4-6F175D3DCCD1}">
+              <a14:hiddenFill xmlns:a14="http://schemas.microsoft.com/office/drawing/2010/main">
+                <a:solidFill>
+                  <a:srgbClr val="FFFFFF"/>
+                </a:solidFill>
+              </a14:hiddenFill>
+            </a:ext>
+          </a:extLst>
+        </p:spPr>
+      </p:pic>
+      <p:sp>
+        <p:nvSpPr>
+          <p:cNvPr id="10" name="Título 1">
+            <a:extLst>
+              <a:ext uri="{FF2B5EF4-FFF2-40B4-BE49-F238E27FC236}">
+                <a16:creationId xmlns:a16="http://schemas.microsoft.com/office/drawing/2014/main" id="{F1D0E72B-8799-6810-1576-1D2F4D86A7AB}"/>
+              </a:ext>
+            </a:extLst>
+          </p:cNvPr>
+          <p:cNvSpPr txBox="1">
+            <a:spLocks/>
+          </p:cNvSpPr>
+          <p:nvPr/>
+        </p:nvSpPr>
+        <p:spPr>
+          <a:xfrm>
+            <a:off x="501560" y="276927"/>
+            <a:ext cx="10515600" cy="1325563"/>
+          </a:xfrm>
+          <a:prstGeom prst="rect">
+            <a:avLst/>
+          </a:prstGeom>
+        </p:spPr>
+        <p:txBody>
+          <a:bodyPr vert="horz" lIns="91440" tIns="45720" rIns="91440" bIns="45720" rtlCol="0" anchor="ctr">
+            <a:noAutofit/>
+          </a:bodyPr>
+          <a:lstStyle>
+            <a:lvl1pPr algn="l" defTabSz="914400" rtl="0" eaLnBrk="1" latinLnBrk="0" hangingPunct="1">
+              <a:lnSpc>
+                <a:spcPct val="90000"/>
+              </a:lnSpc>
+              <a:spcBef>
+                <a:spcPct val="0"/>
+              </a:spcBef>
+              <a:buNone/>
+              <a:defRPr sz="4400" kern="1200">
+                <a:solidFill>
+                  <a:schemeClr val="tx1"/>
+                </a:solidFill>
+                <a:latin typeface="+mj-lt"/>
+                <a:ea typeface="+mj-ea"/>
+                <a:cs typeface="+mj-cs"/>
+              </a:defRPr>
+            </a:lvl1pPr>
+          </a:lstStyle>
+          <a:p>
+            <a:r>
+              <a:rPr lang="es-MX" sz="3600" b="1" i="1" dirty="0"/>
+              <a:t>Tipos de comunicaciones:  </a:t>
+            </a:r>
+            <a:r>
+              <a:rPr lang="es-MX" sz="3600" i="1" dirty="0"/>
+              <a:t>Sistema, humano y asistente</a:t>
+            </a:r>
+            <a:r>
+              <a:rPr lang="es-MX" sz="3600" b="1" i="1" dirty="0"/>
+              <a:t>.</a:t>
+            </a:r>
+            <a:endParaRPr lang="es-CL" sz="3600" b="1" i="1" dirty="0"/>
+          </a:p>
+        </p:txBody>
+      </p:sp>
+      <p:pic>
+        <p:nvPicPr>
+          <p:cNvPr id="1026" name="Picture 2" descr="Maximizing the Impact of Language Models: The Role of Effective Prompt  Engineering | by Kushal V | TechHappily | Medium">
+            <a:extLst>
+              <a:ext uri="{FF2B5EF4-FFF2-40B4-BE49-F238E27FC236}">
+                <a16:creationId xmlns:a16="http://schemas.microsoft.com/office/drawing/2014/main" id="{CD4D4D25-6E18-D41E-C485-CBC796F4CBA0}"/>
+              </a:ext>
+            </a:extLst>
+          </p:cNvPr>
+          <p:cNvPicPr>
+            <a:picLocks noChangeAspect="1" noChangeArrowheads="1"/>
+          </p:cNvPicPr>
+          <p:nvPr/>
+        </p:nvPicPr>
+        <p:blipFill>
+          <a:blip r:embed="rId4">
+            <a:extLst>
+              <a:ext uri="{28A0092B-C50C-407E-A947-70E740481C1C}">
+                <a14:useLocalDpi xmlns:a14="http://schemas.microsoft.com/office/drawing/2010/main" val="0"/>
+              </a:ext>
+            </a:extLst>
+          </a:blip>
+          <a:srcRect/>
+          <a:stretch>
+            <a:fillRect/>
+          </a:stretch>
+        </p:blipFill>
+        <p:spPr bwMode="auto">
+          <a:xfrm>
+            <a:off x="1079531" y="1656654"/>
+            <a:ext cx="5309395" cy="4658994"/>
+          </a:xfrm>
+          <a:prstGeom prst="rect">
+            <a:avLst/>
+          </a:prstGeom>
+          <a:noFill/>
+          <a:extLst>
+            <a:ext uri="{909E8E84-426E-40DD-AFC4-6F175D3DCCD1}">
+              <a14:hiddenFill xmlns:a14="http://schemas.microsoft.com/office/drawing/2010/main">
+                <a:solidFill>
+                  <a:srgbClr val="FFFFFF"/>
+                </a:solidFill>
+              </a14:hiddenFill>
+            </a:ext>
+          </a:extLst>
+        </p:spPr>
+      </p:pic>
+      <p:cxnSp>
+        <p:nvCxnSpPr>
+          <p:cNvPr id="7" name="Conector recto de flecha 6">
+            <a:extLst>
+              <a:ext uri="{FF2B5EF4-FFF2-40B4-BE49-F238E27FC236}">
+                <a16:creationId xmlns:a16="http://schemas.microsoft.com/office/drawing/2014/main" id="{2F36F16B-8A11-3A3D-000F-1A0429937FA0}"/>
+              </a:ext>
+            </a:extLst>
+          </p:cNvPr>
+          <p:cNvCxnSpPr/>
+          <p:nvPr/>
+        </p:nvCxnSpPr>
+        <p:spPr>
+          <a:xfrm>
+            <a:off x="5058889" y="2386940"/>
+            <a:ext cx="1662546" cy="0"/>
+          </a:xfrm>
+          <a:prstGeom prst="straightConnector1">
+            <a:avLst/>
+          </a:prstGeom>
+          <a:ln w="28575">
+            <a:solidFill>
+              <a:schemeClr val="tx1"/>
+            </a:solidFill>
+            <a:tailEnd type="triangle"/>
+          </a:ln>
+        </p:spPr>
+        <p:style>
+          <a:lnRef idx="1">
+            <a:schemeClr val="accent1"/>
+          </a:lnRef>
+          <a:fillRef idx="0">
+            <a:schemeClr val="accent1"/>
+          </a:fillRef>
+          <a:effectRef idx="0">
+            <a:schemeClr val="accent1"/>
+          </a:effectRef>
+          <a:fontRef idx="minor">
+            <a:schemeClr val="tx1"/>
+          </a:fontRef>
+        </p:style>
+      </p:cxnSp>
+      <p:cxnSp>
+        <p:nvCxnSpPr>
+          <p:cNvPr id="8" name="Conector recto de flecha 7">
+            <a:extLst>
+              <a:ext uri="{FF2B5EF4-FFF2-40B4-BE49-F238E27FC236}">
+                <a16:creationId xmlns:a16="http://schemas.microsoft.com/office/drawing/2014/main" id="{DE894D39-1BEF-1C2D-054B-04FF0A0613BF}"/>
+              </a:ext>
+            </a:extLst>
+          </p:cNvPr>
+          <p:cNvCxnSpPr/>
+          <p:nvPr/>
+        </p:nvCxnSpPr>
+        <p:spPr>
+          <a:xfrm>
+            <a:off x="5058889" y="2871849"/>
+            <a:ext cx="1662546" cy="0"/>
+          </a:xfrm>
+          <a:prstGeom prst="straightConnector1">
+            <a:avLst/>
+          </a:prstGeom>
+          <a:ln w="28575">
+            <a:solidFill>
+              <a:schemeClr val="tx1"/>
+            </a:solidFill>
+            <a:tailEnd type="triangle"/>
+          </a:ln>
+        </p:spPr>
+        <p:style>
+          <a:lnRef idx="1">
+            <a:schemeClr val="accent1"/>
+          </a:lnRef>
+          <a:fillRef idx="0">
+            <a:schemeClr val="accent1"/>
+          </a:fillRef>
+          <a:effectRef idx="0">
+            <a:schemeClr val="accent1"/>
+          </a:effectRef>
+          <a:fontRef idx="minor">
+            <a:schemeClr val="tx1"/>
+          </a:fontRef>
+        </p:style>
+      </p:cxnSp>
+      <p:cxnSp>
+        <p:nvCxnSpPr>
+          <p:cNvPr id="9" name="Conector recto de flecha 8">
+            <a:extLst>
+              <a:ext uri="{FF2B5EF4-FFF2-40B4-BE49-F238E27FC236}">
+                <a16:creationId xmlns:a16="http://schemas.microsoft.com/office/drawing/2014/main" id="{FD6CEADA-2965-48B0-BD70-A3FF43BCC65C}"/>
+              </a:ext>
+            </a:extLst>
+          </p:cNvPr>
+          <p:cNvCxnSpPr/>
+          <p:nvPr/>
+        </p:nvCxnSpPr>
+        <p:spPr>
+          <a:xfrm>
+            <a:off x="5058889" y="3429000"/>
+            <a:ext cx="1662546" cy="0"/>
+          </a:xfrm>
+          <a:prstGeom prst="straightConnector1">
+            <a:avLst/>
+          </a:prstGeom>
+          <a:ln w="28575">
+            <a:solidFill>
+              <a:schemeClr val="tx1"/>
+            </a:solidFill>
+            <a:tailEnd type="triangle"/>
+          </a:ln>
+        </p:spPr>
+        <p:style>
+          <a:lnRef idx="1">
+            <a:schemeClr val="accent1"/>
+          </a:lnRef>
+          <a:fillRef idx="0">
+            <a:schemeClr val="accent1"/>
+          </a:fillRef>
+          <a:effectRef idx="0">
+            <a:schemeClr val="accent1"/>
+          </a:effectRef>
+          <a:fontRef idx="minor">
+            <a:schemeClr val="tx1"/>
+          </a:fontRef>
+        </p:style>
+      </p:cxnSp>
+      <p:sp>
+        <p:nvSpPr>
+          <p:cNvPr id="11" name="Título 1">
+            <a:extLst>
+              <a:ext uri="{FF2B5EF4-FFF2-40B4-BE49-F238E27FC236}">
+                <a16:creationId xmlns:a16="http://schemas.microsoft.com/office/drawing/2014/main" id="{151DFCC1-2ECE-2021-6E03-AAF34097F3A4}"/>
+              </a:ext>
+            </a:extLst>
+          </p:cNvPr>
+          <p:cNvSpPr txBox="1">
+            <a:spLocks/>
+          </p:cNvSpPr>
+          <p:nvPr/>
+        </p:nvSpPr>
+        <p:spPr>
+          <a:xfrm>
+            <a:off x="6817295" y="1665737"/>
+            <a:ext cx="10515600" cy="1325563"/>
+          </a:xfrm>
+          <a:prstGeom prst="rect">
+            <a:avLst/>
+          </a:prstGeom>
+        </p:spPr>
+        <p:txBody>
+          <a:bodyPr vert="horz" lIns="91440" tIns="45720" rIns="91440" bIns="45720" rtlCol="0" anchor="ctr">
+            <a:noAutofit/>
+          </a:bodyPr>
+          <a:lstStyle>
+            <a:lvl1pPr algn="l" defTabSz="914400" rtl="0" eaLnBrk="1" latinLnBrk="0" hangingPunct="1">
+              <a:lnSpc>
+                <a:spcPct val="90000"/>
+              </a:lnSpc>
+              <a:spcBef>
+                <a:spcPct val="0"/>
+              </a:spcBef>
+              <a:buNone/>
+              <a:defRPr sz="4400" kern="1200">
+                <a:solidFill>
+                  <a:schemeClr val="tx1"/>
+                </a:solidFill>
+                <a:latin typeface="+mj-lt"/>
+                <a:ea typeface="+mj-ea"/>
+                <a:cs typeface="+mj-cs"/>
+              </a:defRPr>
+            </a:lvl1pPr>
+          </a:lstStyle>
+          <a:p>
+            <a:r>
+              <a:rPr lang="es-MX" sz="1800" b="1" i="1" dirty="0" err="1"/>
+              <a:t>Prompt</a:t>
+            </a:r>
+            <a:r>
+              <a:rPr lang="es-MX" sz="1800" b="1" i="1" dirty="0"/>
+              <a:t> </a:t>
+            </a:r>
+            <a:r>
+              <a:rPr lang="es-MX" sz="1800" b="1" i="1" dirty="0" err="1"/>
+              <a:t>System</a:t>
+            </a:r>
+            <a:r>
+              <a:rPr lang="es-MX" sz="1800" i="1" dirty="0"/>
+              <a:t>: d</a:t>
+            </a:r>
+            <a:r>
+              <a:rPr lang="es-MX" sz="1800" dirty="0"/>
+              <a:t>efine el comportamiento del modelo</a:t>
+            </a:r>
+            <a:r>
+              <a:rPr lang="es-MX" sz="1800" i="1" dirty="0"/>
+              <a:t>.</a:t>
+            </a:r>
+            <a:endParaRPr lang="es-CL" sz="3600" i="1" dirty="0"/>
+          </a:p>
+        </p:txBody>
+      </p:sp>
+      <p:sp>
+        <p:nvSpPr>
+          <p:cNvPr id="12" name="Título 1">
+            <a:extLst>
+              <a:ext uri="{FF2B5EF4-FFF2-40B4-BE49-F238E27FC236}">
+                <a16:creationId xmlns:a16="http://schemas.microsoft.com/office/drawing/2014/main" id="{0DD76678-F3AE-B1EE-4FC3-BD5F4B6964FF}"/>
+              </a:ext>
+            </a:extLst>
+          </p:cNvPr>
+          <p:cNvSpPr txBox="1">
+            <a:spLocks/>
+          </p:cNvSpPr>
+          <p:nvPr/>
+        </p:nvSpPr>
+        <p:spPr>
+          <a:xfrm>
+            <a:off x="6829170" y="2197192"/>
+            <a:ext cx="10515600" cy="1325563"/>
+          </a:xfrm>
+          <a:prstGeom prst="rect">
+            <a:avLst/>
+          </a:prstGeom>
+        </p:spPr>
+        <p:txBody>
+          <a:bodyPr vert="horz" lIns="91440" tIns="45720" rIns="91440" bIns="45720" rtlCol="0" anchor="ctr">
+            <a:noAutofit/>
+          </a:bodyPr>
+          <a:lstStyle>
+            <a:lvl1pPr algn="l" defTabSz="914400" rtl="0" eaLnBrk="1" latinLnBrk="0" hangingPunct="1">
+              <a:lnSpc>
+                <a:spcPct val="90000"/>
+              </a:lnSpc>
+              <a:spcBef>
+                <a:spcPct val="0"/>
+              </a:spcBef>
+              <a:buNone/>
+              <a:defRPr sz="4400" kern="1200">
+                <a:solidFill>
+                  <a:schemeClr val="tx1"/>
+                </a:solidFill>
+                <a:latin typeface="+mj-lt"/>
+                <a:ea typeface="+mj-ea"/>
+                <a:cs typeface="+mj-cs"/>
+              </a:defRPr>
+            </a:lvl1pPr>
+          </a:lstStyle>
+          <a:p>
+            <a:r>
+              <a:rPr lang="es-MX" sz="1800" b="1" i="1" dirty="0" err="1"/>
+              <a:t>User</a:t>
+            </a:r>
+            <a:r>
+              <a:rPr lang="es-MX" sz="1800" b="1" i="1" dirty="0"/>
+              <a:t> </a:t>
+            </a:r>
+            <a:r>
+              <a:rPr lang="es-MX" sz="1800" b="1" i="1" dirty="0" err="1"/>
+              <a:t>Message</a:t>
+            </a:r>
+            <a:r>
+              <a:rPr lang="es-MX" sz="1800" i="1" dirty="0"/>
+              <a:t>: </a:t>
+            </a:r>
+            <a:r>
+              <a:rPr lang="es-MX" sz="1800" dirty="0"/>
+              <a:t>mensaje del usuario</a:t>
+            </a:r>
+            <a:r>
+              <a:rPr lang="es-MX" sz="1800" i="1" dirty="0"/>
+              <a:t>.</a:t>
+            </a:r>
+            <a:endParaRPr lang="es-CL" sz="3600" i="1" dirty="0"/>
+          </a:p>
+        </p:txBody>
+      </p:sp>
+      <p:sp>
+        <p:nvSpPr>
+          <p:cNvPr id="13" name="Título 1">
+            <a:extLst>
+              <a:ext uri="{FF2B5EF4-FFF2-40B4-BE49-F238E27FC236}">
+                <a16:creationId xmlns:a16="http://schemas.microsoft.com/office/drawing/2014/main" id="{FA5B5817-0046-3D6C-31F2-6B4E88BAD4C0}"/>
+              </a:ext>
+            </a:extLst>
+          </p:cNvPr>
+          <p:cNvSpPr txBox="1">
+            <a:spLocks/>
+          </p:cNvSpPr>
+          <p:nvPr/>
+        </p:nvSpPr>
+        <p:spPr>
+          <a:xfrm>
+            <a:off x="6747890" y="2991300"/>
+            <a:ext cx="5362830" cy="1325563"/>
+          </a:xfrm>
+          <a:prstGeom prst="rect">
+            <a:avLst/>
+          </a:prstGeom>
+        </p:spPr>
+        <p:txBody>
+          <a:bodyPr vert="horz" lIns="91440" tIns="45720" rIns="91440" bIns="45720" rtlCol="0" anchor="ctr">
+            <a:noAutofit/>
+          </a:bodyPr>
+          <a:lstStyle>
+            <a:lvl1pPr algn="l" defTabSz="914400" rtl="0" eaLnBrk="1" latinLnBrk="0" hangingPunct="1">
+              <a:lnSpc>
+                <a:spcPct val="90000"/>
+              </a:lnSpc>
+              <a:spcBef>
+                <a:spcPct val="0"/>
+              </a:spcBef>
+              <a:buNone/>
+              <a:defRPr sz="4400" kern="1200">
+                <a:solidFill>
+                  <a:schemeClr val="tx1"/>
+                </a:solidFill>
+                <a:latin typeface="+mj-lt"/>
+                <a:ea typeface="+mj-ea"/>
+                <a:cs typeface="+mj-cs"/>
+              </a:defRPr>
+            </a:lvl1pPr>
+          </a:lstStyle>
+          <a:p>
+            <a:r>
+              <a:rPr lang="es-MX" sz="1800" b="1" i="1" dirty="0" err="1"/>
+              <a:t>Assistant</a:t>
+            </a:r>
+            <a:r>
+              <a:rPr lang="es-MX" sz="1800" b="1" i="1" dirty="0"/>
+              <a:t> </a:t>
+            </a:r>
+            <a:r>
+              <a:rPr lang="es-MX" sz="1800" b="1" i="1" dirty="0" err="1"/>
+              <a:t>Message</a:t>
+            </a:r>
+            <a:r>
+              <a:rPr lang="es-MX" sz="1800" i="1" dirty="0"/>
+              <a:t>: </a:t>
+            </a:r>
+            <a:r>
+              <a:rPr lang="es-MX" sz="1800" dirty="0"/>
+              <a:t>respuesta del modelo de lenguaje. </a:t>
+            </a:r>
+          </a:p>
+          <a:p>
+            <a:r>
+              <a:rPr lang="es-MX" sz="1800" dirty="0"/>
+              <a:t>Si existe una conversación, cada interacción se debe almacenar para entregarla como parámetro al </a:t>
+            </a:r>
+            <a:r>
+              <a:rPr lang="es-MX" sz="1800" dirty="0" err="1"/>
+              <a:t>request</a:t>
+            </a:r>
+            <a:r>
+              <a:rPr lang="es-MX" sz="1800" i="1" dirty="0"/>
+              <a:t>.</a:t>
+            </a:r>
+            <a:endParaRPr lang="es-CL" sz="3600" i="1" dirty="0"/>
+          </a:p>
+        </p:txBody>
+      </p:sp>
+      <p:sp>
+        <p:nvSpPr>
+          <p:cNvPr id="14" name="Título 1">
+            <a:extLst>
+              <a:ext uri="{FF2B5EF4-FFF2-40B4-BE49-F238E27FC236}">
+                <a16:creationId xmlns:a16="http://schemas.microsoft.com/office/drawing/2014/main" id="{AF5C9C93-30BD-D06D-FB8D-F6D04D347FBE}"/>
+              </a:ext>
+            </a:extLst>
+          </p:cNvPr>
+          <p:cNvSpPr txBox="1">
+            <a:spLocks/>
+          </p:cNvSpPr>
+          <p:nvPr/>
+        </p:nvSpPr>
+        <p:spPr>
+          <a:xfrm>
+            <a:off x="5308996" y="4316863"/>
+            <a:ext cx="5362830" cy="1325563"/>
+          </a:xfrm>
+          <a:prstGeom prst="rect">
+            <a:avLst/>
+          </a:prstGeom>
+        </p:spPr>
+        <p:txBody>
+          <a:bodyPr vert="horz" lIns="91440" tIns="45720" rIns="91440" bIns="45720" rtlCol="0" anchor="ctr">
+            <a:noAutofit/>
+          </a:bodyPr>
+          <a:lstStyle>
+            <a:lvl1pPr algn="l" defTabSz="914400" rtl="0" eaLnBrk="1" latinLnBrk="0" hangingPunct="1">
+              <a:lnSpc>
+                <a:spcPct val="90000"/>
+              </a:lnSpc>
+              <a:spcBef>
+                <a:spcPct val="0"/>
+              </a:spcBef>
+              <a:buNone/>
+              <a:defRPr sz="4400" kern="1200">
+                <a:solidFill>
+                  <a:schemeClr val="tx1"/>
+                </a:solidFill>
+                <a:latin typeface="+mj-lt"/>
+                <a:ea typeface="+mj-ea"/>
+                <a:cs typeface="+mj-cs"/>
+              </a:defRPr>
+            </a:lvl1pPr>
+          </a:lstStyle>
+          <a:p>
+            <a:endParaRPr lang="es-CL" sz="3600" i="1" dirty="0"/>
+          </a:p>
+        </p:txBody>
+      </p:sp>
+      <p:sp>
+        <p:nvSpPr>
+          <p:cNvPr id="16" name="CuadroTexto 15">
+            <a:extLst>
+              <a:ext uri="{FF2B5EF4-FFF2-40B4-BE49-F238E27FC236}">
+                <a16:creationId xmlns:a16="http://schemas.microsoft.com/office/drawing/2014/main" id="{689C4CDD-09EB-4DB0-60D2-503F37EC89B4}"/>
+              </a:ext>
+            </a:extLst>
+          </p:cNvPr>
+          <p:cNvSpPr txBox="1"/>
+          <p:nvPr/>
+        </p:nvSpPr>
+        <p:spPr>
+          <a:xfrm>
+            <a:off x="5091843" y="4478606"/>
+            <a:ext cx="8674924" cy="646331"/>
+          </a:xfrm>
+          <a:prstGeom prst="rect">
+            <a:avLst/>
+          </a:prstGeom>
+          <a:noFill/>
+        </p:spPr>
+        <p:txBody>
+          <a:bodyPr wrap="square">
+            <a:spAutoFit/>
+          </a:bodyPr>
+          <a:lstStyle/>
+          <a:p>
+            <a:r>
+              <a:rPr lang="es-CL" sz="1800" dirty="0"/>
+              <a:t>Las técnicas de </a:t>
+            </a:r>
+            <a:r>
+              <a:rPr lang="es-CL" sz="1800" b="1" i="1" dirty="0" err="1"/>
+              <a:t>Prompt</a:t>
+            </a:r>
+            <a:r>
+              <a:rPr lang="es-CL" sz="1800" b="1" i="1" dirty="0"/>
+              <a:t> </a:t>
+            </a:r>
+            <a:r>
+              <a:rPr lang="es-CL" sz="1800" b="1" i="1" dirty="0" err="1"/>
+              <a:t>Engineering</a:t>
+            </a:r>
+            <a:r>
+              <a:rPr lang="es-CL" sz="1800" b="1" i="1" dirty="0"/>
+              <a:t> </a:t>
+            </a:r>
+            <a:r>
+              <a:rPr lang="es-CL" sz="1800" dirty="0"/>
+              <a:t>buscan personalizar y ajustar el </a:t>
+            </a:r>
+          </a:p>
+          <a:p>
+            <a:r>
+              <a:rPr lang="es-CL" dirty="0" err="1"/>
+              <a:t>Prompt</a:t>
+            </a:r>
+            <a:r>
+              <a:rPr lang="es-CL" dirty="0"/>
+              <a:t> </a:t>
+            </a:r>
+            <a:r>
+              <a:rPr lang="es-CL" dirty="0" err="1"/>
+              <a:t>System</a:t>
+            </a:r>
+            <a:r>
+              <a:rPr lang="es-CL" dirty="0"/>
+              <a:t>, no los demás mensajes</a:t>
+            </a:r>
+            <a:r>
+              <a:rPr lang="es-CL" b="1" i="1" dirty="0"/>
+              <a:t>.</a:t>
+            </a:r>
+            <a:r>
+              <a:rPr lang="es-CL" sz="1800" b="1" i="1" dirty="0"/>
+              <a:t> </a:t>
+            </a:r>
+            <a:endParaRPr lang="es-CL" dirty="0"/>
+          </a:p>
+        </p:txBody>
+      </p:sp>
+    </p:spTree>
+    <p:extLst>
+      <p:ext uri="{BB962C8B-B14F-4D97-AF65-F5344CB8AC3E}">
+        <p14:creationId xmlns:p14="http://schemas.microsoft.com/office/powerpoint/2010/main" val="2781298040"/>
+      </p:ext>
+    </p:extLst>
+  </p:cSld>
+  <p:clrMapOvr>
+    <a:masterClrMapping/>
+  </p:clrMapOvr>
+</p:sld>
+</file>
+
+<file path=ppt/slides/slide13.xml><?xml version="1.0" encoding="utf-8"?>
 <p:sld xmlns:a="http://schemas.openxmlformats.org/drawingml/2006/main" xmlns:r="http://schemas.openxmlformats.org/officeDocument/2006/relationships" xmlns:p="http://schemas.openxmlformats.org/presentationml/2006/main">
   <p:cSld>
     <p:spTree>
@@ -5366,7 +6452,7 @@
 </p:sld>
 </file>
 
-<file path=ppt/slides/slide12.xml><?xml version="1.0" encoding="utf-8"?>
+<file path=ppt/slides/slide14.xml><?xml version="1.0" encoding="utf-8"?>
 <p:sld xmlns:a="http://schemas.openxmlformats.org/drawingml/2006/main" xmlns:r="http://schemas.openxmlformats.org/officeDocument/2006/relationships" xmlns:p="http://schemas.openxmlformats.org/presentationml/2006/main">
   <p:cSld>
     <p:spTree>
@@ -5669,7 +6755,7 @@
 </p:sld>
 </file>
 
-<file path=ppt/slides/slide13.xml><?xml version="1.0" encoding="utf-8"?>
+<file path=ppt/slides/slide15.xml><?xml version="1.0" encoding="utf-8"?>
 <p:sld xmlns:a="http://schemas.openxmlformats.org/drawingml/2006/main" xmlns:r="http://schemas.openxmlformats.org/officeDocument/2006/relationships" xmlns:p="http://schemas.openxmlformats.org/presentationml/2006/main">
   <p:cSld>
     <p:spTree>
@@ -5951,7 +7037,7 @@
 </p:sld>
 </file>
 
-<file path=ppt/slides/slide14.xml><?xml version="1.0" encoding="utf-8"?>
+<file path=ppt/slides/slide16.xml><?xml version="1.0" encoding="utf-8"?>
 <p:sld xmlns:a="http://schemas.openxmlformats.org/drawingml/2006/main" xmlns:r="http://schemas.openxmlformats.org/officeDocument/2006/relationships" xmlns:p="http://schemas.openxmlformats.org/presentationml/2006/main">
   <p:cSld>
     <p:spTree>
@@ -6255,7 +7341,7 @@
 </p:sld>
 </file>
 
-<file path=ppt/slides/slide15.xml><?xml version="1.0" encoding="utf-8"?>
+<file path=ppt/slides/slide17.xml><?xml version="1.0" encoding="utf-8"?>
 <p:sld xmlns:a="http://schemas.openxmlformats.org/drawingml/2006/main" xmlns:r="http://schemas.openxmlformats.org/officeDocument/2006/relationships" xmlns:p="http://schemas.openxmlformats.org/presentationml/2006/main">
   <p:cSld>
     <p:spTree>
@@ -7084,7 +8170,7 @@
 </p:sld>
 </file>
 
-<file path=ppt/slides/slide16.xml><?xml version="1.0" encoding="utf-8"?>
+<file path=ppt/slides/slide18.xml><?xml version="1.0" encoding="utf-8"?>
 <p:sld xmlns:a="http://schemas.openxmlformats.org/drawingml/2006/main" xmlns:r="http://schemas.openxmlformats.org/officeDocument/2006/relationships" xmlns:p="http://schemas.openxmlformats.org/presentationml/2006/main">
   <p:cSld>
     <p:spTree>
@@ -7296,7 +8382,7 @@
 </p:sld>
 </file>
 
-<file path=ppt/slides/slide17.xml><?xml version="1.0" encoding="utf-8"?>
+<file path=ppt/slides/slide19.xml><?xml version="1.0" encoding="utf-8"?>
 <p:sld xmlns:a="http://schemas.openxmlformats.org/drawingml/2006/main" xmlns:r="http://schemas.openxmlformats.org/officeDocument/2006/relationships" xmlns:p="http://schemas.openxmlformats.org/presentationml/2006/main">
   <p:cSld>
     <p:spTree>
@@ -10626,7 +11712,7 @@
         <p:cNvPr id="1" name="">
           <a:extLst>
             <a:ext uri="{FF2B5EF4-FFF2-40B4-BE49-F238E27FC236}">
-              <a16:creationId xmlns:a16="http://schemas.microsoft.com/office/drawing/2014/main" id="{C6B257B2-31A0-85D8-4B12-CD0BE347BA6B}"/>
+              <a16:creationId xmlns:a16="http://schemas.microsoft.com/office/drawing/2014/main" id="{EFA6E331-2129-3033-4809-19C077828FE1}"/>
             </a:ext>
           </a:extLst>
         </p:cNvPr>
@@ -10646,7 +11732,7 @@
           <p:cNvPr id="2" name="Título 1">
             <a:extLst>
               <a:ext uri="{FF2B5EF4-FFF2-40B4-BE49-F238E27FC236}">
-                <a16:creationId xmlns:a16="http://schemas.microsoft.com/office/drawing/2014/main" id="{0969BC08-3932-D5B2-1A43-AF96CCAE675B}"/>
+                <a16:creationId xmlns:a16="http://schemas.microsoft.com/office/drawing/2014/main" id="{BFEF6433-4A5C-19A2-13DC-0115A5AFF347}"/>
               </a:ext>
             </a:extLst>
           </p:cNvPr>
@@ -10659,7 +11745,7 @@
         </p:nvSpPr>
         <p:spPr>
           <a:xfrm>
-            <a:off x="691433" y="1912016"/>
+            <a:off x="267879" y="-20891"/>
             <a:ext cx="10515600" cy="1325563"/>
           </a:xfrm>
         </p:spPr>
@@ -10670,33 +11756,18 @@
           <a:lstStyle/>
           <a:p>
             <a:r>
-              <a:rPr lang="es-CL" sz="4000" b="1" i="1" dirty="0" err="1"/>
-              <a:t>Prompt</a:t>
-            </a:r>
-            <a:r>
-              <a:rPr lang="es-CL" sz="4000" b="1" i="1" dirty="0"/>
-              <a:t> </a:t>
-            </a:r>
-            <a:r>
-              <a:rPr lang="es-CL" sz="4000" b="1" i="1" dirty="0" err="1"/>
+              <a:rPr lang="es-CL" sz="3600" b="1" i="1" dirty="0"/>
+              <a:t>0’REILLY</a:t>
+            </a:r>
+            <a:r>
+              <a:rPr lang="es-CL" sz="3600" i="1" dirty="0"/>
+              <a:t>: AI </a:t>
+            </a:r>
+            <a:r>
+              <a:rPr lang="es-CL" sz="3600" i="1" dirty="0" err="1"/>
               <a:t>Engineering</a:t>
             </a:r>
-            <a:r>
-              <a:rPr lang="es-CL" sz="4000" b="1" i="1" dirty="0"/>
-              <a:t> </a:t>
-            </a:r>
-            <a:r>
-              <a:rPr lang="es-CL" sz="3600" i="1" dirty="0"/>
-              <a:t>es una técnica para mejorar las respuestas de los modelos, buscando consistencia, reducción de alucinaciones y personalización de los </a:t>
-            </a:r>
-            <a:r>
-              <a:rPr lang="es-CL" sz="3600" i="1" dirty="0" err="1"/>
-              <a:t>LLMs</a:t>
-            </a:r>
-            <a:r>
-              <a:rPr lang="es-CL" sz="3600" i="1" dirty="0"/>
-              <a:t>.</a:t>
-            </a:r>
+            <a:endParaRPr lang="es-CL" sz="3600" i="1" dirty="0"/>
           </a:p>
         </p:txBody>
       </p:sp>
@@ -10705,7 +11776,7 @@
           <p:cNvPr id="4" name="Picture 2" descr="Duoc UC - Learn Chile">
             <a:extLst>
               <a:ext uri="{FF2B5EF4-FFF2-40B4-BE49-F238E27FC236}">
-                <a16:creationId xmlns:a16="http://schemas.microsoft.com/office/drawing/2014/main" id="{B2A28363-6D93-DE8C-F932-8DCEC843DDF7}"/>
+                <a16:creationId xmlns:a16="http://schemas.microsoft.com/office/drawing/2014/main" id="{FF21B870-861B-6C99-D69A-DBBFDF2E8719}"/>
               </a:ext>
             </a:extLst>
           </p:cNvPr>
@@ -10715,7 +11786,7 @@
           <p:nvPr/>
         </p:nvPicPr>
         <p:blipFill>
-          <a:blip r:embed="rId3">
+          <a:blip r:embed="rId2">
             <a:extLst>
               <a:ext uri="{28A0092B-C50C-407E-A947-70E740481C1C}">
                 <a14:useLocalDpi xmlns:a14="http://schemas.microsoft.com/office/drawing/2010/main" val="0"/>
@@ -10747,10 +11818,84 @@
           </a:extLst>
         </p:spPr>
       </p:pic>
+      <p:pic>
+        <p:nvPicPr>
+          <p:cNvPr id="13" name="Imagen 12">
+            <a:extLst>
+              <a:ext uri="{FF2B5EF4-FFF2-40B4-BE49-F238E27FC236}">
+                <a16:creationId xmlns:a16="http://schemas.microsoft.com/office/drawing/2014/main" id="{C7DC5221-9EB1-43DE-6A27-44C2C30319D1}"/>
+              </a:ext>
+            </a:extLst>
+          </p:cNvPr>
+          <p:cNvPicPr>
+            <a:picLocks noChangeAspect="1"/>
+          </p:cNvPicPr>
+          <p:nvPr/>
+        </p:nvPicPr>
+        <p:blipFill>
+          <a:blip r:embed="rId3"/>
+          <a:stretch>
+            <a:fillRect/>
+          </a:stretch>
+        </p:blipFill>
+        <p:spPr>
+          <a:xfrm>
+            <a:off x="3928639" y="855882"/>
+            <a:ext cx="4334721" cy="5304773"/>
+          </a:xfrm>
+          <a:prstGeom prst="rect">
+            <a:avLst/>
+          </a:prstGeom>
+        </p:spPr>
+      </p:pic>
+      <p:sp>
+        <p:nvSpPr>
+          <p:cNvPr id="15" name="CuadroTexto 14">
+            <a:extLst>
+              <a:ext uri="{FF2B5EF4-FFF2-40B4-BE49-F238E27FC236}">
+                <a16:creationId xmlns:a16="http://schemas.microsoft.com/office/drawing/2014/main" id="{908D9413-0AB0-5D14-6E8B-7F130DC2AC00}"/>
+              </a:ext>
+            </a:extLst>
+          </p:cNvPr>
+          <p:cNvSpPr txBox="1"/>
+          <p:nvPr/>
+        </p:nvSpPr>
+        <p:spPr>
+          <a:xfrm>
+            <a:off x="2409266" y="6250820"/>
+            <a:ext cx="7801283" cy="369332"/>
+          </a:xfrm>
+          <a:prstGeom prst="rect">
+            <a:avLst/>
+          </a:prstGeom>
+          <a:noFill/>
+        </p:spPr>
+        <p:txBody>
+          <a:bodyPr wrap="square">
+            <a:spAutoFit/>
+          </a:bodyPr>
+          <a:lstStyle/>
+          <a:p>
+            <a:r>
+              <a:rPr lang="en-US" dirty="0"/>
+              <a:t>“</a:t>
+            </a:r>
+            <a:r>
+              <a:rPr lang="en-US" i="1" dirty="0"/>
+              <a:t>Anyone can communicate, but not everyone can communicate effectively</a:t>
+            </a:r>
+            <a:r>
+              <a:rPr lang="en-US" dirty="0"/>
+              <a:t>”.</a:t>
+            </a:r>
+            <a:endParaRPr lang="es-CL" sz="1800" b="1" i="1" dirty="0"/>
+          </a:p>
+        </p:txBody>
+      </p:sp>
     </p:spTree>
     <p:extLst>
       <p:ext uri="{BB962C8B-B14F-4D97-AF65-F5344CB8AC3E}">
-        <p14:creationId xmlns:p14="http://schemas.microsoft.com/office/powerpoint/2010/main" val="1195678763"/>
+        <p14:creationId xmlns:p14="http://schemas.microsoft.com/office/powerpoint/2010/main" val="2803331793"/>
       </p:ext>
     </p:extLst>
   </p:cSld>
@@ -10768,7 +11913,7 @@
         <p:cNvPr id="1" name="">
           <a:extLst>
             <a:ext uri="{FF2B5EF4-FFF2-40B4-BE49-F238E27FC236}">
-              <a16:creationId xmlns:a16="http://schemas.microsoft.com/office/drawing/2014/main" id="{FF78F6F4-5476-9149-08BA-FB2D7CC1113F}"/>
+              <a16:creationId xmlns:a16="http://schemas.microsoft.com/office/drawing/2014/main" id="{C6B257B2-31A0-85D8-4B12-CD0BE347BA6B}"/>
             </a:ext>
           </a:extLst>
         </p:cNvPr>
@@ -10783,12 +11928,71 @@
           <a:chExt cx="0" cy="0"/>
         </a:xfrm>
       </p:grpSpPr>
+      <p:sp>
+        <p:nvSpPr>
+          <p:cNvPr id="2" name="Título 1">
+            <a:extLst>
+              <a:ext uri="{FF2B5EF4-FFF2-40B4-BE49-F238E27FC236}">
+                <a16:creationId xmlns:a16="http://schemas.microsoft.com/office/drawing/2014/main" id="{0969BC08-3932-D5B2-1A43-AF96CCAE675B}"/>
+              </a:ext>
+            </a:extLst>
+          </p:cNvPr>
+          <p:cNvSpPr>
+            <a:spLocks noGrp="1"/>
+          </p:cNvSpPr>
+          <p:nvPr>
+            <p:ph type="title"/>
+          </p:nvPr>
+        </p:nvSpPr>
+        <p:spPr>
+          <a:xfrm>
+            <a:off x="691433" y="1912016"/>
+            <a:ext cx="10515600" cy="1325563"/>
+          </a:xfrm>
+        </p:spPr>
+        <p:txBody>
+          <a:bodyPr>
+            <a:noAutofit/>
+          </a:bodyPr>
+          <a:lstStyle/>
+          <a:p>
+            <a:r>
+              <a:rPr lang="es-CL" sz="4000" b="1" i="1" dirty="0" err="1"/>
+              <a:t>Prompt</a:t>
+            </a:r>
+            <a:r>
+              <a:rPr lang="es-CL" sz="4000" b="1" i="1" dirty="0"/>
+              <a:t> </a:t>
+            </a:r>
+            <a:r>
+              <a:rPr lang="es-CL" sz="4000" b="1" i="1" dirty="0" err="1"/>
+              <a:t>Engineering</a:t>
+            </a:r>
+            <a:r>
+              <a:rPr lang="es-CL" sz="4000" b="1" i="1" dirty="0"/>
+              <a:t> </a:t>
+            </a:r>
+            <a:r>
+              <a:rPr lang="es-CL" sz="3600" i="1" dirty="0"/>
+              <a:t>es una técnica para mejorar las respuestas de los modelos, buscando consistencia, reducción de alucinaciones y personalización de los </a:t>
+            </a:r>
+            <a:r>
+              <a:rPr lang="es-CL" sz="3600" i="1" dirty="0" err="1"/>
+              <a:t>LLMs</a:t>
+            </a:r>
+            <a:r>
+              <a:rPr lang="es-CL" sz="3600" i="1" dirty="0"/>
+              <a:t>.</a:t>
+            </a:r>
+          </a:p>
+        </p:txBody>
+      </p:sp>
       <p:pic>
         <p:nvPicPr>
           <p:cNvPr id="4" name="Picture 2" descr="Duoc UC - Learn Chile">
             <a:extLst>
               <a:ext uri="{FF2B5EF4-FFF2-40B4-BE49-F238E27FC236}">
-                <a16:creationId xmlns:a16="http://schemas.microsoft.com/office/drawing/2014/main" id="{88D10D67-7E7E-C414-C0CB-715BE675B057}"/>
+                <a16:creationId xmlns:a16="http://schemas.microsoft.com/office/drawing/2014/main" id="{B2A28363-6D93-DE8C-F932-8DCEC843DDF7}"/>
               </a:ext>
             </a:extLst>
           </p:cNvPr>
@@ -10830,190 +12034,10 @@
           </a:extLst>
         </p:spPr>
       </p:pic>
-      <p:cxnSp>
-        <p:nvCxnSpPr>
-          <p:cNvPr id="5" name="Conector recto de flecha 4">
-            <a:extLst>
-              <a:ext uri="{FF2B5EF4-FFF2-40B4-BE49-F238E27FC236}">
-                <a16:creationId xmlns:a16="http://schemas.microsoft.com/office/drawing/2014/main" id="{650C4F39-F3C2-B27A-0FE5-F58F5C3ABC75}"/>
-              </a:ext>
-            </a:extLst>
-          </p:cNvPr>
-          <p:cNvCxnSpPr/>
-          <p:nvPr/>
-        </p:nvCxnSpPr>
-        <p:spPr>
-          <a:xfrm>
-            <a:off x="4033520" y="3545840"/>
-            <a:ext cx="2611120" cy="1198880"/>
-          </a:xfrm>
-          <a:prstGeom prst="straightConnector1">
-            <a:avLst/>
-          </a:prstGeom>
-          <a:ln w="38100">
-            <a:solidFill>
-              <a:schemeClr val="tx1"/>
-            </a:solidFill>
-            <a:tailEnd type="triangle"/>
-          </a:ln>
-        </p:spPr>
-        <p:style>
-          <a:lnRef idx="1">
-            <a:schemeClr val="accent1"/>
-          </a:lnRef>
-          <a:fillRef idx="0">
-            <a:schemeClr val="accent1"/>
-          </a:fillRef>
-          <a:effectRef idx="0">
-            <a:schemeClr val="accent1"/>
-          </a:effectRef>
-          <a:fontRef idx="minor">
-            <a:schemeClr val="tx1"/>
-          </a:fontRef>
-        </p:style>
-      </p:cxnSp>
-      <p:sp>
-        <p:nvSpPr>
-          <p:cNvPr id="6" name="Título 1">
-            <a:extLst>
-              <a:ext uri="{FF2B5EF4-FFF2-40B4-BE49-F238E27FC236}">
-                <a16:creationId xmlns:a16="http://schemas.microsoft.com/office/drawing/2014/main" id="{33F31236-89EE-7DE6-FCC1-2E845015F422}"/>
-              </a:ext>
-            </a:extLst>
-          </p:cNvPr>
-          <p:cNvSpPr txBox="1">
-            <a:spLocks/>
-          </p:cNvSpPr>
-          <p:nvPr/>
-        </p:nvSpPr>
-        <p:spPr>
-          <a:xfrm>
-            <a:off x="6852920" y="3981619"/>
-            <a:ext cx="10515600" cy="1325563"/>
-          </a:xfrm>
-          <a:prstGeom prst="rect">
-            <a:avLst/>
-          </a:prstGeom>
-        </p:spPr>
-        <p:txBody>
-          <a:bodyPr vert="horz" lIns="91440" tIns="45720" rIns="91440" bIns="45720" rtlCol="0" anchor="ctr">
-            <a:noAutofit/>
-          </a:bodyPr>
-          <a:lstStyle>
-            <a:lvl1pPr algn="l" defTabSz="914400" rtl="0" eaLnBrk="1" latinLnBrk="0" hangingPunct="1">
-              <a:lnSpc>
-                <a:spcPct val="90000"/>
-              </a:lnSpc>
-              <a:spcBef>
-                <a:spcPct val="0"/>
-              </a:spcBef>
-              <a:buNone/>
-              <a:defRPr sz="4400" kern="1200">
-                <a:solidFill>
-                  <a:schemeClr val="tx1"/>
-                </a:solidFill>
-                <a:latin typeface="+mj-lt"/>
-                <a:ea typeface="+mj-ea"/>
-                <a:cs typeface="+mj-cs"/>
-              </a:defRPr>
-            </a:lvl1pPr>
-          </a:lstStyle>
-          <a:p>
-            <a:r>
-              <a:rPr lang="es-CL" sz="3600" i="1" dirty="0"/>
-              <a:t>¿Es la solución perfecta?</a:t>
-            </a:r>
-          </a:p>
-        </p:txBody>
-      </p:sp>
-      <p:sp>
-        <p:nvSpPr>
-          <p:cNvPr id="8" name="Título 7">
-            <a:extLst>
-              <a:ext uri="{FF2B5EF4-FFF2-40B4-BE49-F238E27FC236}">
-                <a16:creationId xmlns:a16="http://schemas.microsoft.com/office/drawing/2014/main" id="{6FE87BB0-667A-CFD8-2698-11DF0259668A}"/>
-              </a:ext>
-            </a:extLst>
-          </p:cNvPr>
-          <p:cNvSpPr>
-            <a:spLocks noGrp="1"/>
-          </p:cNvSpPr>
-          <p:nvPr>
-            <p:ph type="title"/>
-          </p:nvPr>
-        </p:nvSpPr>
-        <p:spPr/>
-        <p:txBody>
-          <a:bodyPr/>
-          <a:lstStyle/>
-          <a:p>
-            <a:endParaRPr lang="es-CL"/>
-          </a:p>
-        </p:txBody>
-      </p:sp>
-      <p:sp>
-        <p:nvSpPr>
-          <p:cNvPr id="10" name="Título 1">
-            <a:extLst>
-              <a:ext uri="{FF2B5EF4-FFF2-40B4-BE49-F238E27FC236}">
-                <a16:creationId xmlns:a16="http://schemas.microsoft.com/office/drawing/2014/main" id="{D5E4E6BD-601A-AEE7-6BDC-3DF9315AF672}"/>
-              </a:ext>
-            </a:extLst>
-          </p:cNvPr>
-          <p:cNvSpPr txBox="1">
-            <a:spLocks/>
-          </p:cNvSpPr>
-          <p:nvPr/>
-        </p:nvSpPr>
-        <p:spPr>
-          <a:xfrm>
-            <a:off x="691433" y="1912016"/>
-            <a:ext cx="10515600" cy="1325563"/>
-          </a:xfrm>
-          <a:prstGeom prst="rect">
-            <a:avLst/>
-          </a:prstGeom>
-        </p:spPr>
-        <p:txBody>
-          <a:bodyPr vert="horz" lIns="91440" tIns="45720" rIns="91440" bIns="45720" rtlCol="0" anchor="ctr">
-            <a:noAutofit/>
-          </a:bodyPr>
-          <a:lstStyle>
-            <a:lvl1pPr algn="l" defTabSz="914400" rtl="0" eaLnBrk="1" latinLnBrk="0" hangingPunct="1">
-              <a:lnSpc>
-                <a:spcPct val="90000"/>
-              </a:lnSpc>
-              <a:spcBef>
-                <a:spcPct val="0"/>
-              </a:spcBef>
-              <a:buNone/>
-              <a:defRPr sz="4400" kern="1200">
-                <a:solidFill>
-                  <a:schemeClr val="tx1"/>
-                </a:solidFill>
-                <a:latin typeface="+mj-lt"/>
-                <a:ea typeface="+mj-ea"/>
-                <a:cs typeface="+mj-cs"/>
-              </a:defRPr>
-            </a:lvl1pPr>
-          </a:lstStyle>
-          <a:p>
-            <a:r>
-              <a:rPr lang="es-CL" sz="4000" b="1" i="1"/>
-              <a:t>Prompt Engineering </a:t>
-            </a:r>
-            <a:r>
-              <a:rPr lang="es-CL" sz="3600" i="1"/>
-              <a:t>es una técnica para mejorar las respuestas de los modelos, buscando consistencia, reducción de alucinaciones y personalización de los LLMs.</a:t>
-            </a:r>
-            <a:endParaRPr lang="es-CL" sz="3600" i="1" dirty="0"/>
-          </a:p>
-        </p:txBody>
-      </p:sp>
     </p:spTree>
     <p:extLst>
       <p:ext uri="{BB962C8B-B14F-4D97-AF65-F5344CB8AC3E}">
-        <p14:creationId xmlns:p14="http://schemas.microsoft.com/office/powerpoint/2010/main" val="1304857153"/>
+        <p14:creationId xmlns:p14="http://schemas.microsoft.com/office/powerpoint/2010/main" val="1195678763"/>
       </p:ext>
     </p:extLst>
   </p:cSld>

--- a/Experiencia de Aprendizaje 1 - Fundamentos de AI Generativa y Prompt Engineering/Clase 1.2/Clase 1.2.pptx
+++ b/Experiencia de Aprendizaje 1 - Fundamentos de AI Generativa y Prompt Engineering/Clase 1.2/Clase 1.2.pptx
@@ -5,28 +5,30 @@
     <p:sldMasterId id="2147483648" r:id="rId1"/>
   </p:sldMasterIdLst>
   <p:notesMasterIdLst>
-    <p:notesMasterId r:id="rId21"/>
+    <p:notesMasterId r:id="rId23"/>
   </p:notesMasterIdLst>
   <p:sldIdLst>
     <p:sldId id="256" r:id="rId2"/>
     <p:sldId id="266" r:id="rId3"/>
-    <p:sldId id="267" r:id="rId4"/>
-    <p:sldId id="283" r:id="rId5"/>
-    <p:sldId id="284" r:id="rId6"/>
-    <p:sldId id="270" r:id="rId7"/>
-    <p:sldId id="275" r:id="rId8"/>
-    <p:sldId id="285" r:id="rId9"/>
-    <p:sldId id="276" r:id="rId10"/>
-    <p:sldId id="277" r:id="rId11"/>
-    <p:sldId id="278" r:id="rId12"/>
-    <p:sldId id="286" r:id="rId13"/>
-    <p:sldId id="280" r:id="rId14"/>
-    <p:sldId id="268" r:id="rId15"/>
-    <p:sldId id="269" r:id="rId16"/>
-    <p:sldId id="271" r:id="rId17"/>
-    <p:sldId id="272" r:id="rId18"/>
-    <p:sldId id="273" r:id="rId19"/>
-    <p:sldId id="274" r:id="rId20"/>
+    <p:sldId id="287" r:id="rId4"/>
+    <p:sldId id="288" r:id="rId5"/>
+    <p:sldId id="267" r:id="rId6"/>
+    <p:sldId id="283" r:id="rId7"/>
+    <p:sldId id="284" r:id="rId8"/>
+    <p:sldId id="270" r:id="rId9"/>
+    <p:sldId id="275" r:id="rId10"/>
+    <p:sldId id="285" r:id="rId11"/>
+    <p:sldId id="289" r:id="rId12"/>
+    <p:sldId id="290" r:id="rId13"/>
+    <p:sldId id="286" r:id="rId14"/>
+    <p:sldId id="280" r:id="rId15"/>
+    <p:sldId id="268" r:id="rId16"/>
+    <p:sldId id="269" r:id="rId17"/>
+    <p:sldId id="271" r:id="rId18"/>
+    <p:sldId id="272" r:id="rId19"/>
+    <p:sldId id="273" r:id="rId20"/>
+    <p:sldId id="292" r:id="rId21"/>
+    <p:sldId id="274" r:id="rId22"/>
   </p:sldIdLst>
   <p:sldSz cx="12192000" cy="6858000"/>
   <p:notesSz cx="6858000" cy="9144000"/>
@@ -227,7 +229,7 @@
           <a:p>
             <a:fld id="{87BDCB0C-69E9-4911-980B-989A824EA717}" type="datetimeFigureOut">
               <a:rPr lang="es-CL" smtClean="0"/>
-              <a:t>17-03-2026</a:t>
+              <a:t>18-08-2026</a:t>
             </a:fld>
             <a:endParaRPr lang="es-CL"/>
           </a:p>
@@ -500,327 +502,6 @@
   <p:cSld>
     <p:spTree>
       <p:nvGrpSpPr>
-        <p:cNvPr id="1" name=""/>
-        <p:cNvGrpSpPr/>
-        <p:nvPr/>
-      </p:nvGrpSpPr>
-      <p:grpSpPr>
-        <a:xfrm>
-          <a:off x="0" y="0"/>
-          <a:ext cx="0" cy="0"/>
-          <a:chOff x="0" y="0"/>
-          <a:chExt cx="0" cy="0"/>
-        </a:xfrm>
-      </p:grpSpPr>
-      <p:sp>
-        <p:nvSpPr>
-          <p:cNvPr id="2" name="Marcador de imagen de diapositiva 1"/>
-          <p:cNvSpPr>
-            <a:spLocks noGrp="1" noRot="1" noChangeAspect="1"/>
-          </p:cNvSpPr>
-          <p:nvPr>
-            <p:ph type="sldImg"/>
-          </p:nvPr>
-        </p:nvSpPr>
-        <p:spPr/>
-        <p:txBody>
-          <a:bodyPr/>
-          <a:lstStyle/>
-          <a:p>
-            <a:endParaRPr lang="es-CL"/>
-          </a:p>
-        </p:txBody>
-      </p:sp>
-      <p:sp>
-        <p:nvSpPr>
-          <p:cNvPr id="3" name="Marcador de notas 2"/>
-          <p:cNvSpPr>
-            <a:spLocks noGrp="1"/>
-          </p:cNvSpPr>
-          <p:nvPr>
-            <p:ph type="body" idx="1"/>
-          </p:nvPr>
-        </p:nvSpPr>
-        <p:spPr/>
-        <p:txBody>
-          <a:bodyPr/>
-          <a:lstStyle/>
-          <a:p>
-            <a:endParaRPr lang="es-CL" dirty="0"/>
-          </a:p>
-        </p:txBody>
-      </p:sp>
-      <p:sp>
-        <p:nvSpPr>
-          <p:cNvPr id="4" name="Marcador de número de diapositiva 3"/>
-          <p:cNvSpPr>
-            <a:spLocks noGrp="1"/>
-          </p:cNvSpPr>
-          <p:nvPr>
-            <p:ph type="sldNum" sz="quarter" idx="5"/>
-          </p:nvPr>
-        </p:nvSpPr>
-        <p:spPr/>
-        <p:txBody>
-          <a:bodyPr/>
-          <a:lstStyle/>
-          <a:p>
-            <a:fld id="{2107F482-7FF7-4DD4-AE91-ACA70D5B43D5}" type="slidenum">
-              <a:rPr lang="es-CL" smtClean="0"/>
-              <a:t>9</a:t>
-            </a:fld>
-            <a:endParaRPr lang="es-CL"/>
-          </a:p>
-        </p:txBody>
-      </p:sp>
-    </p:spTree>
-    <p:extLst>
-      <p:ext uri="{BB962C8B-B14F-4D97-AF65-F5344CB8AC3E}">
-        <p14:creationId xmlns:p14="http://schemas.microsoft.com/office/powerpoint/2010/main" val="749651056"/>
-      </p:ext>
-    </p:extLst>
-  </p:cSld>
-  <p:clrMapOvr>
-    <a:masterClrMapping/>
-  </p:clrMapOvr>
-</p:notes>
-</file>
-
-<file path=ppt/notesSlides/notesSlide2.xml><?xml version="1.0" encoding="utf-8"?>
-<p:notes xmlns:a="http://schemas.openxmlformats.org/drawingml/2006/main" xmlns:r="http://schemas.openxmlformats.org/officeDocument/2006/relationships" xmlns:p="http://schemas.openxmlformats.org/presentationml/2006/main">
-  <p:cSld>
-    <p:spTree>
-      <p:nvGrpSpPr>
-        <p:cNvPr id="1" name="">
-          <a:extLst>
-            <a:ext uri="{FF2B5EF4-FFF2-40B4-BE49-F238E27FC236}">
-              <a16:creationId xmlns:a16="http://schemas.microsoft.com/office/drawing/2014/main" id="{50226413-4022-C3C4-7911-E30E71E3C702}"/>
-            </a:ext>
-          </a:extLst>
-        </p:cNvPr>
-        <p:cNvGrpSpPr/>
-        <p:nvPr/>
-      </p:nvGrpSpPr>
-      <p:grpSpPr>
-        <a:xfrm>
-          <a:off x="0" y="0"/>
-          <a:ext cx="0" cy="0"/>
-          <a:chOff x="0" y="0"/>
-          <a:chExt cx="0" cy="0"/>
-        </a:xfrm>
-      </p:grpSpPr>
-      <p:sp>
-        <p:nvSpPr>
-          <p:cNvPr id="2" name="Marcador de imagen de diapositiva 1">
-            <a:extLst>
-              <a:ext uri="{FF2B5EF4-FFF2-40B4-BE49-F238E27FC236}">
-                <a16:creationId xmlns:a16="http://schemas.microsoft.com/office/drawing/2014/main" id="{AF5E8F25-6392-6924-C9B6-8034B0EA6093}"/>
-              </a:ext>
-            </a:extLst>
-          </p:cNvPr>
-          <p:cNvSpPr>
-            <a:spLocks noGrp="1" noRot="1" noChangeAspect="1"/>
-          </p:cNvSpPr>
-          <p:nvPr>
-            <p:ph type="sldImg"/>
-          </p:nvPr>
-        </p:nvSpPr>
-        <p:spPr/>
-        <p:txBody>
-          <a:bodyPr/>
-          <a:lstStyle/>
-          <a:p>
-            <a:endParaRPr lang="es-CL"/>
-          </a:p>
-        </p:txBody>
-      </p:sp>
-      <p:sp>
-        <p:nvSpPr>
-          <p:cNvPr id="3" name="Marcador de notas 2">
-            <a:extLst>
-              <a:ext uri="{FF2B5EF4-FFF2-40B4-BE49-F238E27FC236}">
-                <a16:creationId xmlns:a16="http://schemas.microsoft.com/office/drawing/2014/main" id="{4C55F415-FEB3-1C09-5D6E-3A7F0B608992}"/>
-              </a:ext>
-            </a:extLst>
-          </p:cNvPr>
-          <p:cNvSpPr>
-            <a:spLocks noGrp="1"/>
-          </p:cNvSpPr>
-          <p:nvPr>
-            <p:ph type="body" idx="1"/>
-          </p:nvPr>
-        </p:nvSpPr>
-        <p:spPr/>
-        <p:txBody>
-          <a:bodyPr/>
-          <a:lstStyle/>
-          <a:p>
-            <a:endParaRPr lang="es-CL" dirty="0"/>
-          </a:p>
-        </p:txBody>
-      </p:sp>
-      <p:sp>
-        <p:nvSpPr>
-          <p:cNvPr id="4" name="Marcador de número de diapositiva 3">
-            <a:extLst>
-              <a:ext uri="{FF2B5EF4-FFF2-40B4-BE49-F238E27FC236}">
-                <a16:creationId xmlns:a16="http://schemas.microsoft.com/office/drawing/2014/main" id="{8E43B22C-98FF-D369-70ED-34DA4D8B3672}"/>
-              </a:ext>
-            </a:extLst>
-          </p:cNvPr>
-          <p:cNvSpPr>
-            <a:spLocks noGrp="1"/>
-          </p:cNvSpPr>
-          <p:nvPr>
-            <p:ph type="sldNum" sz="quarter" idx="5"/>
-          </p:nvPr>
-        </p:nvSpPr>
-        <p:spPr/>
-        <p:txBody>
-          <a:bodyPr/>
-          <a:lstStyle/>
-          <a:p>
-            <a:fld id="{2107F482-7FF7-4DD4-AE91-ACA70D5B43D5}" type="slidenum">
-              <a:rPr lang="es-CL" smtClean="0"/>
-              <a:t>10</a:t>
-            </a:fld>
-            <a:endParaRPr lang="es-CL"/>
-          </a:p>
-        </p:txBody>
-      </p:sp>
-    </p:spTree>
-    <p:extLst>
-      <p:ext uri="{BB962C8B-B14F-4D97-AF65-F5344CB8AC3E}">
-        <p14:creationId xmlns:p14="http://schemas.microsoft.com/office/powerpoint/2010/main" val="1209433327"/>
-      </p:ext>
-    </p:extLst>
-  </p:cSld>
-  <p:clrMapOvr>
-    <a:masterClrMapping/>
-  </p:clrMapOvr>
-</p:notes>
-</file>
-
-<file path=ppt/notesSlides/notesSlide3.xml><?xml version="1.0" encoding="utf-8"?>
-<p:notes xmlns:a="http://schemas.openxmlformats.org/drawingml/2006/main" xmlns:r="http://schemas.openxmlformats.org/officeDocument/2006/relationships" xmlns:p="http://schemas.openxmlformats.org/presentationml/2006/main">
-  <p:cSld>
-    <p:spTree>
-      <p:nvGrpSpPr>
-        <p:cNvPr id="1" name="">
-          <a:extLst>
-            <a:ext uri="{FF2B5EF4-FFF2-40B4-BE49-F238E27FC236}">
-              <a16:creationId xmlns:a16="http://schemas.microsoft.com/office/drawing/2014/main" id="{1A72EF18-6F18-3996-8AFC-26DACB949A02}"/>
-            </a:ext>
-          </a:extLst>
-        </p:cNvPr>
-        <p:cNvGrpSpPr/>
-        <p:nvPr/>
-      </p:nvGrpSpPr>
-      <p:grpSpPr>
-        <a:xfrm>
-          <a:off x="0" y="0"/>
-          <a:ext cx="0" cy="0"/>
-          <a:chOff x="0" y="0"/>
-          <a:chExt cx="0" cy="0"/>
-        </a:xfrm>
-      </p:grpSpPr>
-      <p:sp>
-        <p:nvSpPr>
-          <p:cNvPr id="2" name="Marcador de imagen de diapositiva 1">
-            <a:extLst>
-              <a:ext uri="{FF2B5EF4-FFF2-40B4-BE49-F238E27FC236}">
-                <a16:creationId xmlns:a16="http://schemas.microsoft.com/office/drawing/2014/main" id="{EF8C87DF-0610-004B-3F1C-4FD8A7A4E19F}"/>
-              </a:ext>
-            </a:extLst>
-          </p:cNvPr>
-          <p:cNvSpPr>
-            <a:spLocks noGrp="1" noRot="1" noChangeAspect="1"/>
-          </p:cNvSpPr>
-          <p:nvPr>
-            <p:ph type="sldImg"/>
-          </p:nvPr>
-        </p:nvSpPr>
-        <p:spPr/>
-        <p:txBody>
-          <a:bodyPr/>
-          <a:lstStyle/>
-          <a:p>
-            <a:endParaRPr lang="es-CL"/>
-          </a:p>
-        </p:txBody>
-      </p:sp>
-      <p:sp>
-        <p:nvSpPr>
-          <p:cNvPr id="3" name="Marcador de notas 2">
-            <a:extLst>
-              <a:ext uri="{FF2B5EF4-FFF2-40B4-BE49-F238E27FC236}">
-                <a16:creationId xmlns:a16="http://schemas.microsoft.com/office/drawing/2014/main" id="{C2011944-3FD5-D4CF-DE6B-63F675C2F5ED}"/>
-              </a:ext>
-            </a:extLst>
-          </p:cNvPr>
-          <p:cNvSpPr>
-            <a:spLocks noGrp="1"/>
-          </p:cNvSpPr>
-          <p:nvPr>
-            <p:ph type="body" idx="1"/>
-          </p:nvPr>
-        </p:nvSpPr>
-        <p:spPr/>
-        <p:txBody>
-          <a:bodyPr/>
-          <a:lstStyle/>
-          <a:p>
-            <a:endParaRPr lang="es-CL" dirty="0"/>
-          </a:p>
-        </p:txBody>
-      </p:sp>
-      <p:sp>
-        <p:nvSpPr>
-          <p:cNvPr id="4" name="Marcador de número de diapositiva 3">
-            <a:extLst>
-              <a:ext uri="{FF2B5EF4-FFF2-40B4-BE49-F238E27FC236}">
-                <a16:creationId xmlns:a16="http://schemas.microsoft.com/office/drawing/2014/main" id="{CB518EB7-3B3B-4FB1-6E66-DD56ADEC3C5F}"/>
-              </a:ext>
-            </a:extLst>
-          </p:cNvPr>
-          <p:cNvSpPr>
-            <a:spLocks noGrp="1"/>
-          </p:cNvSpPr>
-          <p:nvPr>
-            <p:ph type="sldNum" sz="quarter" idx="5"/>
-          </p:nvPr>
-        </p:nvSpPr>
-        <p:spPr/>
-        <p:txBody>
-          <a:bodyPr/>
-          <a:lstStyle/>
-          <a:p>
-            <a:fld id="{2107F482-7FF7-4DD4-AE91-ACA70D5B43D5}" type="slidenum">
-              <a:rPr lang="es-CL" smtClean="0"/>
-              <a:t>11</a:t>
-            </a:fld>
-            <a:endParaRPr lang="es-CL"/>
-          </a:p>
-        </p:txBody>
-      </p:sp>
-    </p:spTree>
-    <p:extLst>
-      <p:ext uri="{BB962C8B-B14F-4D97-AF65-F5344CB8AC3E}">
-        <p14:creationId xmlns:p14="http://schemas.microsoft.com/office/powerpoint/2010/main" val="4018664096"/>
-      </p:ext>
-    </p:extLst>
-  </p:cSld>
-  <p:clrMapOvr>
-    <a:masterClrMapping/>
-  </p:clrMapOvr>
-</p:notes>
-</file>
-
-<file path=ppt/notesSlides/notesSlide4.xml><?xml version="1.0" encoding="utf-8"?>
-<p:notes xmlns:a="http://schemas.openxmlformats.org/drawingml/2006/main" xmlns:r="http://schemas.openxmlformats.org/officeDocument/2006/relationships" xmlns:p="http://schemas.openxmlformats.org/presentationml/2006/main">
-  <p:cSld>
-    <p:spTree>
-      <p:nvGrpSpPr>
         <p:cNvPr id="1" name="">
           <a:extLst>
             <a:ext uri="{FF2B5EF4-FFF2-40B4-BE49-F238E27FC236}">
@@ -912,7 +593,7 @@
           <a:p>
             <a:fld id="{2107F482-7FF7-4DD4-AE91-ACA70D5B43D5}" type="slidenum">
               <a:rPr lang="es-CL" smtClean="0"/>
-              <a:t>12</a:t>
+              <a:t>13</a:t>
             </a:fld>
             <a:endParaRPr lang="es-CL"/>
           </a:p>
@@ -931,7 +612,7 @@
 </p:notes>
 </file>
 
-<file path=ppt/notesSlides/notesSlide5.xml><?xml version="1.0" encoding="utf-8"?>
+<file path=ppt/notesSlides/notesSlide2.xml><?xml version="1.0" encoding="utf-8"?>
 <p:notes xmlns:a="http://schemas.openxmlformats.org/drawingml/2006/main" xmlns:r="http://schemas.openxmlformats.org/officeDocument/2006/relationships" xmlns:p="http://schemas.openxmlformats.org/presentationml/2006/main">
   <p:cSld>
     <p:spTree>
@@ -1003,7 +684,7 @@
           <a:p>
             <a:fld id="{2107F482-7FF7-4DD4-AE91-ACA70D5B43D5}" type="slidenum">
               <a:rPr lang="es-CL" smtClean="0"/>
-              <a:t>15</a:t>
+              <a:t>16</a:t>
             </a:fld>
             <a:endParaRPr lang="es-CL"/>
           </a:p>
@@ -1022,7 +703,7 @@
 </p:notes>
 </file>
 
-<file path=ppt/notesSlides/notesSlide6.xml><?xml version="1.0" encoding="utf-8"?>
+<file path=ppt/notesSlides/notesSlide3.xml><?xml version="1.0" encoding="utf-8"?>
 <p:notes xmlns:a="http://schemas.openxmlformats.org/drawingml/2006/main" xmlns:r="http://schemas.openxmlformats.org/officeDocument/2006/relationships" xmlns:p="http://schemas.openxmlformats.org/presentationml/2006/main">
   <p:cSld>
     <p:spTree>
@@ -1118,7 +799,7 @@
           <a:p>
             <a:fld id="{2107F482-7FF7-4DD4-AE91-ACA70D5B43D5}" type="slidenum">
               <a:rPr lang="es-CL" smtClean="0"/>
-              <a:t>16</a:t>
+              <a:t>17</a:t>
             </a:fld>
             <a:endParaRPr lang="es-CL"/>
           </a:p>
@@ -1137,7 +818,7 @@
 </p:notes>
 </file>
 
-<file path=ppt/notesSlides/notesSlide7.xml><?xml version="1.0" encoding="utf-8"?>
+<file path=ppt/notesSlides/notesSlide4.xml><?xml version="1.0" encoding="utf-8"?>
 <p:notes xmlns:a="http://schemas.openxmlformats.org/drawingml/2006/main" xmlns:r="http://schemas.openxmlformats.org/officeDocument/2006/relationships" xmlns:p="http://schemas.openxmlformats.org/presentationml/2006/main">
   <p:cSld>
     <p:spTree>
@@ -1233,7 +914,7 @@
           <a:p>
             <a:fld id="{2107F482-7FF7-4DD4-AE91-ACA70D5B43D5}" type="slidenum">
               <a:rPr lang="es-CL" smtClean="0"/>
-              <a:t>17</a:t>
+              <a:t>18</a:t>
             </a:fld>
             <a:endParaRPr lang="es-CL"/>
           </a:p>
@@ -1252,7 +933,7 @@
 </p:notes>
 </file>
 
-<file path=ppt/notesSlides/notesSlide8.xml><?xml version="1.0" encoding="utf-8"?>
+<file path=ppt/notesSlides/notesSlide5.xml><?xml version="1.0" encoding="utf-8"?>
 <p:notes xmlns:a="http://schemas.openxmlformats.org/drawingml/2006/main" xmlns:r="http://schemas.openxmlformats.org/officeDocument/2006/relationships" xmlns:p="http://schemas.openxmlformats.org/presentationml/2006/main">
   <p:cSld>
     <p:spTree>
@@ -1348,7 +1029,7 @@
           <a:p>
             <a:fld id="{2107F482-7FF7-4DD4-AE91-ACA70D5B43D5}" type="slidenum">
               <a:rPr lang="es-CL" smtClean="0"/>
-              <a:t>18</a:t>
+              <a:t>19</a:t>
             </a:fld>
             <a:endParaRPr lang="es-CL"/>
           </a:p>
@@ -1367,7 +1048,122 @@
 </p:notes>
 </file>
 
-<file path=ppt/notesSlides/notesSlide9.xml><?xml version="1.0" encoding="utf-8"?>
+<file path=ppt/notesSlides/notesSlide6.xml><?xml version="1.0" encoding="utf-8"?>
+<p:notes xmlns:a="http://schemas.openxmlformats.org/drawingml/2006/main" xmlns:r="http://schemas.openxmlformats.org/officeDocument/2006/relationships" xmlns:p="http://schemas.openxmlformats.org/presentationml/2006/main">
+  <p:cSld>
+    <p:spTree>
+      <p:nvGrpSpPr>
+        <p:cNvPr id="1" name="">
+          <a:extLst>
+            <a:ext uri="{FF2B5EF4-FFF2-40B4-BE49-F238E27FC236}">
+              <a16:creationId xmlns:a16="http://schemas.microsoft.com/office/drawing/2014/main" id="{B631C7A1-1699-BDE6-CE96-0EA09BE7BCBD}"/>
+            </a:ext>
+          </a:extLst>
+        </p:cNvPr>
+        <p:cNvGrpSpPr/>
+        <p:nvPr/>
+      </p:nvGrpSpPr>
+      <p:grpSpPr>
+        <a:xfrm>
+          <a:off x="0" y="0"/>
+          <a:ext cx="0" cy="0"/>
+          <a:chOff x="0" y="0"/>
+          <a:chExt cx="0" cy="0"/>
+        </a:xfrm>
+      </p:grpSpPr>
+      <p:sp>
+        <p:nvSpPr>
+          <p:cNvPr id="2" name="Marcador de imagen de diapositiva 1">
+            <a:extLst>
+              <a:ext uri="{FF2B5EF4-FFF2-40B4-BE49-F238E27FC236}">
+                <a16:creationId xmlns:a16="http://schemas.microsoft.com/office/drawing/2014/main" id="{F4710426-0613-EF47-7497-CA050C371DBF}"/>
+              </a:ext>
+            </a:extLst>
+          </p:cNvPr>
+          <p:cNvSpPr>
+            <a:spLocks noGrp="1" noRot="1" noChangeAspect="1"/>
+          </p:cNvSpPr>
+          <p:nvPr>
+            <p:ph type="sldImg"/>
+          </p:nvPr>
+        </p:nvSpPr>
+        <p:spPr/>
+        <p:txBody>
+          <a:bodyPr/>
+          <a:lstStyle/>
+          <a:p>
+            <a:endParaRPr lang="es-CL"/>
+          </a:p>
+        </p:txBody>
+      </p:sp>
+      <p:sp>
+        <p:nvSpPr>
+          <p:cNvPr id="3" name="Marcador de notas 2">
+            <a:extLst>
+              <a:ext uri="{FF2B5EF4-FFF2-40B4-BE49-F238E27FC236}">
+                <a16:creationId xmlns:a16="http://schemas.microsoft.com/office/drawing/2014/main" id="{1F0F0864-9C28-04DA-20B1-1386F866C030}"/>
+              </a:ext>
+            </a:extLst>
+          </p:cNvPr>
+          <p:cNvSpPr>
+            <a:spLocks noGrp="1"/>
+          </p:cNvSpPr>
+          <p:nvPr>
+            <p:ph type="body" idx="1"/>
+          </p:nvPr>
+        </p:nvSpPr>
+        <p:spPr/>
+        <p:txBody>
+          <a:bodyPr/>
+          <a:lstStyle/>
+          <a:p>
+            <a:endParaRPr lang="es-CL" dirty="0"/>
+          </a:p>
+        </p:txBody>
+      </p:sp>
+      <p:sp>
+        <p:nvSpPr>
+          <p:cNvPr id="4" name="Marcador de número de diapositiva 3">
+            <a:extLst>
+              <a:ext uri="{FF2B5EF4-FFF2-40B4-BE49-F238E27FC236}">
+                <a16:creationId xmlns:a16="http://schemas.microsoft.com/office/drawing/2014/main" id="{ABE0EDD7-BA89-02B9-3227-DC599208803F}"/>
+              </a:ext>
+            </a:extLst>
+          </p:cNvPr>
+          <p:cNvSpPr>
+            <a:spLocks noGrp="1"/>
+          </p:cNvSpPr>
+          <p:nvPr>
+            <p:ph type="sldNum" sz="quarter" idx="5"/>
+          </p:nvPr>
+        </p:nvSpPr>
+        <p:spPr/>
+        <p:txBody>
+          <a:bodyPr/>
+          <a:lstStyle/>
+          <a:p>
+            <a:fld id="{2107F482-7FF7-4DD4-AE91-ACA70D5B43D5}" type="slidenum">
+              <a:rPr lang="es-CL" smtClean="0"/>
+              <a:t>20</a:t>
+            </a:fld>
+            <a:endParaRPr lang="es-CL"/>
+          </a:p>
+        </p:txBody>
+      </p:sp>
+    </p:spTree>
+    <p:extLst>
+      <p:ext uri="{BB962C8B-B14F-4D97-AF65-F5344CB8AC3E}">
+        <p14:creationId xmlns:p14="http://schemas.microsoft.com/office/powerpoint/2010/main" val="349263240"/>
+      </p:ext>
+    </p:extLst>
+  </p:cSld>
+  <p:clrMapOvr>
+    <a:masterClrMapping/>
+  </p:clrMapOvr>
+</p:notes>
+</file>
+
+<file path=ppt/notesSlides/notesSlide7.xml><?xml version="1.0" encoding="utf-8"?>
 <p:notes xmlns:a="http://schemas.openxmlformats.org/drawingml/2006/main" xmlns:r="http://schemas.openxmlformats.org/officeDocument/2006/relationships" xmlns:p="http://schemas.openxmlformats.org/presentationml/2006/main">
   <p:cSld>
     <p:spTree>
@@ -1463,7 +1259,7 @@
           <a:p>
             <a:fld id="{2107F482-7FF7-4DD4-AE91-ACA70D5B43D5}" type="slidenum">
               <a:rPr lang="es-CL" smtClean="0"/>
-              <a:t>19</a:t>
+              <a:t>21</a:t>
             </a:fld>
             <a:endParaRPr lang="es-CL"/>
           </a:p>
@@ -1631,7 +1427,7 @@
           <a:p>
             <a:fld id="{E8BDA46D-A1A7-4D05-A86A-5A57D57622A5}" type="datetimeFigureOut">
               <a:rPr lang="es-CL" smtClean="0"/>
-              <a:t>17-03-2026</a:t>
+              <a:t>18-08-2026</a:t>
             </a:fld>
             <a:endParaRPr lang="es-CL"/>
           </a:p>
@@ -1831,7 +1627,7 @@
           <a:p>
             <a:fld id="{E8BDA46D-A1A7-4D05-A86A-5A57D57622A5}" type="datetimeFigureOut">
               <a:rPr lang="es-CL" smtClean="0"/>
-              <a:t>17-03-2026</a:t>
+              <a:t>18-08-2026</a:t>
             </a:fld>
             <a:endParaRPr lang="es-CL"/>
           </a:p>
@@ -2041,7 +1837,7 @@
           <a:p>
             <a:fld id="{E8BDA46D-A1A7-4D05-A86A-5A57D57622A5}" type="datetimeFigureOut">
               <a:rPr lang="es-CL" smtClean="0"/>
-              <a:t>17-03-2026</a:t>
+              <a:t>18-08-2026</a:t>
             </a:fld>
             <a:endParaRPr lang="es-CL"/>
           </a:p>
@@ -2241,7 +2037,7 @@
           <a:p>
             <a:fld id="{E8BDA46D-A1A7-4D05-A86A-5A57D57622A5}" type="datetimeFigureOut">
               <a:rPr lang="es-CL" smtClean="0"/>
-              <a:t>17-03-2026</a:t>
+              <a:t>18-08-2026</a:t>
             </a:fld>
             <a:endParaRPr lang="es-CL"/>
           </a:p>
@@ -2517,7 +2313,7 @@
           <a:p>
             <a:fld id="{E8BDA46D-A1A7-4D05-A86A-5A57D57622A5}" type="datetimeFigureOut">
               <a:rPr lang="es-CL" smtClean="0"/>
-              <a:t>17-03-2026</a:t>
+              <a:t>18-08-2026</a:t>
             </a:fld>
             <a:endParaRPr lang="es-CL"/>
           </a:p>
@@ -2785,7 +2581,7 @@
           <a:p>
             <a:fld id="{E8BDA46D-A1A7-4D05-A86A-5A57D57622A5}" type="datetimeFigureOut">
               <a:rPr lang="es-CL" smtClean="0"/>
-              <a:t>17-03-2026</a:t>
+              <a:t>18-08-2026</a:t>
             </a:fld>
             <a:endParaRPr lang="es-CL"/>
           </a:p>
@@ -3200,7 +2996,7 @@
           <a:p>
             <a:fld id="{E8BDA46D-A1A7-4D05-A86A-5A57D57622A5}" type="datetimeFigureOut">
               <a:rPr lang="es-CL" smtClean="0"/>
-              <a:t>17-03-2026</a:t>
+              <a:t>18-08-2026</a:t>
             </a:fld>
             <a:endParaRPr lang="es-CL"/>
           </a:p>
@@ -3342,7 +3138,7 @@
           <a:p>
             <a:fld id="{E8BDA46D-A1A7-4D05-A86A-5A57D57622A5}" type="datetimeFigureOut">
               <a:rPr lang="es-CL" smtClean="0"/>
-              <a:t>17-03-2026</a:t>
+              <a:t>18-08-2026</a:t>
             </a:fld>
             <a:endParaRPr lang="es-CL"/>
           </a:p>
@@ -3455,7 +3251,7 @@
           <a:p>
             <a:fld id="{E8BDA46D-A1A7-4D05-A86A-5A57D57622A5}" type="datetimeFigureOut">
               <a:rPr lang="es-CL" smtClean="0"/>
-              <a:t>17-03-2026</a:t>
+              <a:t>18-08-2026</a:t>
             </a:fld>
             <a:endParaRPr lang="es-CL"/>
           </a:p>
@@ -3768,7 +3564,7 @@
           <a:p>
             <a:fld id="{E8BDA46D-A1A7-4D05-A86A-5A57D57622A5}" type="datetimeFigureOut">
               <a:rPr lang="es-CL" smtClean="0"/>
-              <a:t>17-03-2026</a:t>
+              <a:t>18-08-2026</a:t>
             </a:fld>
             <a:endParaRPr lang="es-CL"/>
           </a:p>
@@ -4057,7 +3853,7 @@
           <a:p>
             <a:fld id="{E8BDA46D-A1A7-4D05-A86A-5A57D57622A5}" type="datetimeFigureOut">
               <a:rPr lang="es-CL" smtClean="0"/>
-              <a:t>17-03-2026</a:t>
+              <a:t>18-08-2026</a:t>
             </a:fld>
             <a:endParaRPr lang="es-CL"/>
           </a:p>
@@ -4300,7 +4096,7 @@
           <a:p>
             <a:fld id="{E8BDA46D-A1A7-4D05-A86A-5A57D57622A5}" type="datetimeFigureOut">
               <a:rPr lang="es-CL" smtClean="0"/>
-              <a:t>17-03-2026</a:t>
+              <a:t>18-08-2026</a:t>
             </a:fld>
             <a:endParaRPr lang="es-CL"/>
           </a:p>
@@ -5037,7 +4833,7 @@
             <a:pPr algn="l"/>
             <a:r>
               <a:rPr lang="es-MX" sz="1800" i="1" dirty="0"/>
-              <a:t>Semestre 2026-1</a:t>
+              <a:t>Semestre 2026-2</a:t>
             </a:r>
             <a:endParaRPr lang="es-CL" sz="1800" i="1" dirty="0"/>
           </a:p>
@@ -5064,7 +4860,7 @@
         <p:cNvPr id="1" name="">
           <a:extLst>
             <a:ext uri="{FF2B5EF4-FFF2-40B4-BE49-F238E27FC236}">
-              <a16:creationId xmlns:a16="http://schemas.microsoft.com/office/drawing/2014/main" id="{FF78F6F4-5476-9149-08BA-FB2D7CC1113F}"/>
+              <a16:creationId xmlns:a16="http://schemas.microsoft.com/office/drawing/2014/main" id="{EFA6E331-2129-3033-4809-19C077828FE1}"/>
             </a:ext>
           </a:extLst>
         </p:cNvPr>
@@ -5079,12 +4875,56 @@
           <a:chExt cx="0" cy="0"/>
         </a:xfrm>
       </p:grpSpPr>
+      <p:sp>
+        <p:nvSpPr>
+          <p:cNvPr id="2" name="Título 1">
+            <a:extLst>
+              <a:ext uri="{FF2B5EF4-FFF2-40B4-BE49-F238E27FC236}">
+                <a16:creationId xmlns:a16="http://schemas.microsoft.com/office/drawing/2014/main" id="{BFEF6433-4A5C-19A2-13DC-0115A5AFF347}"/>
+              </a:ext>
+            </a:extLst>
+          </p:cNvPr>
+          <p:cNvSpPr>
+            <a:spLocks noGrp="1"/>
+          </p:cNvSpPr>
+          <p:nvPr>
+            <p:ph type="title"/>
+          </p:nvPr>
+        </p:nvSpPr>
+        <p:spPr>
+          <a:xfrm>
+            <a:off x="267879" y="-20891"/>
+            <a:ext cx="10515600" cy="1325563"/>
+          </a:xfrm>
+        </p:spPr>
+        <p:txBody>
+          <a:bodyPr>
+            <a:noAutofit/>
+          </a:bodyPr>
+          <a:lstStyle/>
+          <a:p>
+            <a:r>
+              <a:rPr lang="es-CL" sz="3600" b="1" i="1" dirty="0"/>
+              <a:t>0’REILLY</a:t>
+            </a:r>
+            <a:r>
+              <a:rPr lang="es-CL" sz="3600" i="1" dirty="0"/>
+              <a:t>: AI </a:t>
+            </a:r>
+            <a:r>
+              <a:rPr lang="es-CL" sz="3600" i="1" dirty="0" err="1"/>
+              <a:t>Engineering</a:t>
+            </a:r>
+            <a:endParaRPr lang="es-CL" sz="3600" i="1" dirty="0"/>
+          </a:p>
+        </p:txBody>
+      </p:sp>
       <p:pic>
         <p:nvPicPr>
           <p:cNvPr id="4" name="Picture 2" descr="Duoc UC - Learn Chile">
             <a:extLst>
               <a:ext uri="{FF2B5EF4-FFF2-40B4-BE49-F238E27FC236}">
-                <a16:creationId xmlns:a16="http://schemas.microsoft.com/office/drawing/2014/main" id="{88D10D67-7E7E-C414-C0CB-715BE675B057}"/>
+                <a16:creationId xmlns:a16="http://schemas.microsoft.com/office/drawing/2014/main" id="{FF21B870-861B-6C99-D69A-DBBFDF2E8719}"/>
               </a:ext>
             </a:extLst>
           </p:cNvPr>
@@ -5094,7 +4934,7 @@
           <p:nvPr/>
         </p:nvPicPr>
         <p:blipFill>
-          <a:blip r:embed="rId3">
+          <a:blip r:embed="rId2">
             <a:extLst>
               <a:ext uri="{28A0092B-C50C-407E-A947-70E740481C1C}">
                 <a14:useLocalDpi xmlns:a14="http://schemas.microsoft.com/office/drawing/2010/main" val="0"/>
@@ -5126,190 +4966,84 @@
           </a:extLst>
         </p:spPr>
       </p:pic>
-      <p:cxnSp>
-        <p:nvCxnSpPr>
-          <p:cNvPr id="5" name="Conector recto de flecha 4">
-            <a:extLst>
-              <a:ext uri="{FF2B5EF4-FFF2-40B4-BE49-F238E27FC236}">
-                <a16:creationId xmlns:a16="http://schemas.microsoft.com/office/drawing/2014/main" id="{650C4F39-F3C2-B27A-0FE5-F58F5C3ABC75}"/>
-              </a:ext>
-            </a:extLst>
-          </p:cNvPr>
-          <p:cNvCxnSpPr/>
+      <p:pic>
+        <p:nvPicPr>
+          <p:cNvPr id="13" name="Imagen 12">
+            <a:extLst>
+              <a:ext uri="{FF2B5EF4-FFF2-40B4-BE49-F238E27FC236}">
+                <a16:creationId xmlns:a16="http://schemas.microsoft.com/office/drawing/2014/main" id="{C7DC5221-9EB1-43DE-6A27-44C2C30319D1}"/>
+              </a:ext>
+            </a:extLst>
+          </p:cNvPr>
+          <p:cNvPicPr>
+            <a:picLocks noChangeAspect="1"/>
+          </p:cNvPicPr>
           <p:nvPr/>
-        </p:nvCxnSpPr>
-        <p:spPr>
-          <a:xfrm>
-            <a:off x="4033520" y="3545840"/>
-            <a:ext cx="2611120" cy="1198880"/>
-          </a:xfrm>
-          <a:prstGeom prst="straightConnector1">
-            <a:avLst/>
-          </a:prstGeom>
-          <a:ln w="38100">
-            <a:solidFill>
-              <a:schemeClr val="tx1"/>
-            </a:solidFill>
-            <a:tailEnd type="triangle"/>
-          </a:ln>
-        </p:spPr>
-        <p:style>
-          <a:lnRef idx="1">
-            <a:schemeClr val="accent1"/>
-          </a:lnRef>
-          <a:fillRef idx="0">
-            <a:schemeClr val="accent1"/>
-          </a:fillRef>
-          <a:effectRef idx="0">
-            <a:schemeClr val="accent1"/>
-          </a:effectRef>
-          <a:fontRef idx="minor">
-            <a:schemeClr val="tx1"/>
-          </a:fontRef>
-        </p:style>
-      </p:cxnSp>
-      <p:sp>
-        <p:nvSpPr>
-          <p:cNvPr id="6" name="Título 1">
-            <a:extLst>
-              <a:ext uri="{FF2B5EF4-FFF2-40B4-BE49-F238E27FC236}">
-                <a16:creationId xmlns:a16="http://schemas.microsoft.com/office/drawing/2014/main" id="{33F31236-89EE-7DE6-FCC1-2E845015F422}"/>
-              </a:ext>
-            </a:extLst>
-          </p:cNvPr>
-          <p:cNvSpPr txBox="1">
-            <a:spLocks/>
-          </p:cNvSpPr>
-          <p:nvPr/>
-        </p:nvSpPr>
-        <p:spPr>
-          <a:xfrm>
-            <a:off x="6852920" y="3981619"/>
-            <a:ext cx="10515600" cy="1325563"/>
+        </p:nvPicPr>
+        <p:blipFill>
+          <a:blip r:embed="rId3"/>
+          <a:stretch>
+            <a:fillRect/>
+          </a:stretch>
+        </p:blipFill>
+        <p:spPr>
+          <a:xfrm>
+            <a:off x="3928639" y="855882"/>
+            <a:ext cx="4334721" cy="5304773"/>
           </a:xfrm>
           <a:prstGeom prst="rect">
             <a:avLst/>
           </a:prstGeom>
         </p:spPr>
-        <p:txBody>
-          <a:bodyPr vert="horz" lIns="91440" tIns="45720" rIns="91440" bIns="45720" rtlCol="0" anchor="ctr">
-            <a:noAutofit/>
-          </a:bodyPr>
-          <a:lstStyle>
-            <a:lvl1pPr algn="l" defTabSz="914400" rtl="0" eaLnBrk="1" latinLnBrk="0" hangingPunct="1">
-              <a:lnSpc>
-                <a:spcPct val="90000"/>
-              </a:lnSpc>
-              <a:spcBef>
-                <a:spcPct val="0"/>
-              </a:spcBef>
-              <a:buNone/>
-              <a:defRPr sz="4400" kern="1200">
-                <a:solidFill>
-                  <a:schemeClr val="tx1"/>
-                </a:solidFill>
-                <a:latin typeface="+mj-lt"/>
-                <a:ea typeface="+mj-ea"/>
-                <a:cs typeface="+mj-cs"/>
-              </a:defRPr>
-            </a:lvl1pPr>
-          </a:lstStyle>
-          <a:p>
-            <a:r>
-              <a:rPr lang="es-CL" sz="3600" i="1" dirty="0"/>
-              <a:t>¿Es la solución perfecta?</a:t>
-            </a:r>
-          </a:p>
-        </p:txBody>
-      </p:sp>
-      <p:sp>
-        <p:nvSpPr>
-          <p:cNvPr id="8" name="Título 7">
-            <a:extLst>
-              <a:ext uri="{FF2B5EF4-FFF2-40B4-BE49-F238E27FC236}">
-                <a16:creationId xmlns:a16="http://schemas.microsoft.com/office/drawing/2014/main" id="{6FE87BB0-667A-CFD8-2698-11DF0259668A}"/>
-              </a:ext>
-            </a:extLst>
-          </p:cNvPr>
-          <p:cNvSpPr>
-            <a:spLocks noGrp="1"/>
-          </p:cNvSpPr>
-          <p:nvPr>
-            <p:ph type="title"/>
-          </p:nvPr>
-        </p:nvSpPr>
-        <p:spPr/>
-        <p:txBody>
-          <a:bodyPr/>
-          <a:lstStyle/>
-          <a:p>
-            <a:endParaRPr lang="es-CL"/>
-          </a:p>
-        </p:txBody>
-      </p:sp>
-      <p:sp>
-        <p:nvSpPr>
-          <p:cNvPr id="10" name="Título 1">
-            <a:extLst>
-              <a:ext uri="{FF2B5EF4-FFF2-40B4-BE49-F238E27FC236}">
-                <a16:creationId xmlns:a16="http://schemas.microsoft.com/office/drawing/2014/main" id="{D5E4E6BD-601A-AEE7-6BDC-3DF9315AF672}"/>
-              </a:ext>
-            </a:extLst>
-          </p:cNvPr>
-          <p:cNvSpPr txBox="1">
-            <a:spLocks/>
-          </p:cNvSpPr>
+      </p:pic>
+      <p:sp>
+        <p:nvSpPr>
+          <p:cNvPr id="15" name="CuadroTexto 14">
+            <a:extLst>
+              <a:ext uri="{FF2B5EF4-FFF2-40B4-BE49-F238E27FC236}">
+                <a16:creationId xmlns:a16="http://schemas.microsoft.com/office/drawing/2014/main" id="{908D9413-0AB0-5D14-6E8B-7F130DC2AC00}"/>
+              </a:ext>
+            </a:extLst>
+          </p:cNvPr>
+          <p:cNvSpPr txBox="1"/>
           <p:nvPr/>
         </p:nvSpPr>
         <p:spPr>
           <a:xfrm>
-            <a:off x="691433" y="1912016"/>
-            <a:ext cx="10515600" cy="1325563"/>
+            <a:off x="2409266" y="6250820"/>
+            <a:ext cx="7801283" cy="369332"/>
           </a:xfrm>
           <a:prstGeom prst="rect">
             <a:avLst/>
           </a:prstGeom>
-        </p:spPr>
-        <p:txBody>
-          <a:bodyPr vert="horz" lIns="91440" tIns="45720" rIns="91440" bIns="45720" rtlCol="0" anchor="ctr">
-            <a:noAutofit/>
+          <a:noFill/>
+        </p:spPr>
+        <p:txBody>
+          <a:bodyPr wrap="square">
+            <a:spAutoFit/>
           </a:bodyPr>
-          <a:lstStyle>
-            <a:lvl1pPr algn="l" defTabSz="914400" rtl="0" eaLnBrk="1" latinLnBrk="0" hangingPunct="1">
-              <a:lnSpc>
-                <a:spcPct val="90000"/>
-              </a:lnSpc>
-              <a:spcBef>
-                <a:spcPct val="0"/>
-              </a:spcBef>
-              <a:buNone/>
-              <a:defRPr sz="4400" kern="1200">
-                <a:solidFill>
-                  <a:schemeClr val="tx1"/>
-                </a:solidFill>
-                <a:latin typeface="+mj-lt"/>
-                <a:ea typeface="+mj-ea"/>
-                <a:cs typeface="+mj-cs"/>
-              </a:defRPr>
-            </a:lvl1pPr>
-          </a:lstStyle>
-          <a:p>
-            <a:r>
-              <a:rPr lang="es-CL" sz="4000" b="1" i="1"/>
-              <a:t>Prompt Engineering </a:t>
-            </a:r>
-            <a:r>
-              <a:rPr lang="es-CL" sz="3600" i="1"/>
-              <a:t>es una técnica para mejorar las respuestas de los modelos, buscando consistencia, reducción de alucinaciones y personalización de los LLMs.</a:t>
-            </a:r>
-            <a:endParaRPr lang="es-CL" sz="3600" i="1" dirty="0"/>
+          <a:lstStyle/>
+          <a:p>
+            <a:r>
+              <a:rPr lang="en-US" dirty="0"/>
+              <a:t>“</a:t>
+            </a:r>
+            <a:r>
+              <a:rPr lang="en-US" i="1" dirty="0"/>
+              <a:t>Anyone can communicate, but not everyone can communicate effectively</a:t>
+            </a:r>
+            <a:r>
+              <a:rPr lang="en-US" dirty="0"/>
+              <a:t>”.</a:t>
+            </a:r>
+            <a:endParaRPr lang="es-CL" sz="1800" b="1" i="1" dirty="0"/>
           </a:p>
         </p:txBody>
       </p:sp>
     </p:spTree>
     <p:extLst>
       <p:ext uri="{BB962C8B-B14F-4D97-AF65-F5344CB8AC3E}">
-        <p14:creationId xmlns:p14="http://schemas.microsoft.com/office/powerpoint/2010/main" val="1304857153"/>
+        <p14:creationId xmlns:p14="http://schemas.microsoft.com/office/powerpoint/2010/main" val="2803331793"/>
       </p:ext>
     </p:extLst>
   </p:cSld>
@@ -5324,13 +5058,235 @@
   <p:cSld>
     <p:spTree>
       <p:nvGrpSpPr>
-        <p:cNvPr id="1" name="">
+        <p:cNvPr id="1" name=""/>
+        <p:cNvGrpSpPr/>
+        <p:nvPr/>
+      </p:nvGrpSpPr>
+      <p:grpSpPr>
+        <a:xfrm>
+          <a:off x="0" y="0"/>
+          <a:ext cx="0" cy="0"/>
+          <a:chOff x="0" y="0"/>
+          <a:chExt cx="0" cy="0"/>
+        </a:xfrm>
+      </p:grpSpPr>
+      <p:sp>
+        <p:nvSpPr>
+          <p:cNvPr id="5" name="CuadroTexto 4">
+            <a:extLst>
+              <a:ext uri="{FF2B5EF4-FFF2-40B4-BE49-F238E27FC236}">
+                <a16:creationId xmlns:a16="http://schemas.microsoft.com/office/drawing/2014/main" id="{36A7645E-C81F-C69C-0743-4B00355D8551}"/>
+              </a:ext>
+            </a:extLst>
+          </p:cNvPr>
+          <p:cNvSpPr txBox="1"/>
+          <p:nvPr/>
+        </p:nvSpPr>
+        <p:spPr>
+          <a:xfrm>
+            <a:off x="1045028" y="1076236"/>
+            <a:ext cx="7663543" cy="1569660"/>
+          </a:xfrm>
+          <a:prstGeom prst="rect">
+            <a:avLst/>
+          </a:prstGeom>
+          <a:noFill/>
+        </p:spPr>
+        <p:txBody>
+          <a:bodyPr wrap="square">
+            <a:spAutoFit/>
+          </a:bodyPr>
+          <a:lstStyle/>
+          <a:p>
+            <a:r>
+              <a:rPr lang="en-US" sz="3200" b="1" i="1" dirty="0">
+                <a:solidFill>
+                  <a:srgbClr val="141413"/>
+                </a:solidFill>
+                <a:effectLst/>
+                <a:latin typeface="anthropicSerif"/>
+              </a:rPr>
+              <a:t>Prompt engineering </a:t>
+            </a:r>
+            <a:r>
+              <a:rPr lang="en-US" sz="3200" b="0" i="1" dirty="0">
+                <a:solidFill>
+                  <a:srgbClr val="141413"/>
+                </a:solidFill>
+                <a:effectLst/>
+                <a:latin typeface="anthropicSerif"/>
+              </a:rPr>
+              <a:t>refers to methods for writing and organizing LLM instructions for optimal outcomes</a:t>
+            </a:r>
+            <a:endParaRPr lang="es-CL" sz="3200" i="1" dirty="0"/>
+          </a:p>
+        </p:txBody>
+      </p:sp>
+      <p:pic>
+        <p:nvPicPr>
+          <p:cNvPr id="6" name="Picture 2" descr="Duoc UC - Learn Chile">
+            <a:extLst>
+              <a:ext uri="{FF2B5EF4-FFF2-40B4-BE49-F238E27FC236}">
+                <a16:creationId xmlns:a16="http://schemas.microsoft.com/office/drawing/2014/main" id="{7F1083C9-9486-1191-DCA5-0ED67B402CFB}"/>
+              </a:ext>
+            </a:extLst>
+          </p:cNvPr>
+          <p:cNvPicPr>
+            <a:picLocks noChangeAspect="1" noChangeArrowheads="1"/>
+          </p:cNvPicPr>
+          <p:nvPr/>
+        </p:nvPicPr>
+        <p:blipFill>
+          <a:blip r:embed="rId2">
+            <a:extLst>
+              <a:ext uri="{28A0092B-C50C-407E-A947-70E740481C1C}">
+                <a14:useLocalDpi xmlns:a14="http://schemas.microsoft.com/office/drawing/2010/main" val="0"/>
+              </a:ext>
+            </a:extLst>
+          </a:blip>
+          <a:srcRect/>
+          <a:stretch>
+            <a:fillRect/>
+          </a:stretch>
+        </p:blipFill>
+        <p:spPr bwMode="auto">
+          <a:xfrm>
+            <a:off x="11135913" y="30480"/>
+            <a:ext cx="974807" cy="825402"/>
+          </a:xfrm>
+          <a:prstGeom prst="rect">
+            <a:avLst/>
+          </a:prstGeom>
+          <a:noFill/>
           <a:extLst>
-            <a:ext uri="{FF2B5EF4-FFF2-40B4-BE49-F238E27FC236}">
-              <a16:creationId xmlns:a16="http://schemas.microsoft.com/office/drawing/2014/main" id="{9869FDF3-09BE-1AB8-3EC0-9C42158B4BF5}"/>
+            <a:ext uri="{909E8E84-426E-40DD-AFC4-6F175D3DCCD1}">
+              <a14:hiddenFill xmlns:a14="http://schemas.microsoft.com/office/drawing/2010/main">
+                <a:solidFill>
+                  <a:srgbClr val="FFFFFF"/>
+                </a:solidFill>
+              </a14:hiddenFill>
             </a:ext>
           </a:extLst>
-        </p:cNvPr>
+        </p:spPr>
+      </p:pic>
+      <p:sp>
+        <p:nvSpPr>
+          <p:cNvPr id="8" name="CuadroTexto 7">
+            <a:extLst>
+              <a:ext uri="{FF2B5EF4-FFF2-40B4-BE49-F238E27FC236}">
+                <a16:creationId xmlns:a16="http://schemas.microsoft.com/office/drawing/2014/main" id="{33811279-DF3B-90AF-0196-79E72A484D5C}"/>
+              </a:ext>
+            </a:extLst>
+          </p:cNvPr>
+          <p:cNvSpPr txBox="1"/>
+          <p:nvPr/>
+        </p:nvSpPr>
+        <p:spPr>
+          <a:xfrm>
+            <a:off x="3524344" y="3102429"/>
+            <a:ext cx="8033657" cy="2554545"/>
+          </a:xfrm>
+          <a:prstGeom prst="rect">
+            <a:avLst/>
+          </a:prstGeom>
+          <a:noFill/>
+        </p:spPr>
+        <p:txBody>
+          <a:bodyPr wrap="square">
+            <a:spAutoFit/>
+          </a:bodyPr>
+          <a:lstStyle/>
+          <a:p>
+            <a:r>
+              <a:rPr lang="en-US" sz="3200" b="1" i="1" dirty="0">
+                <a:solidFill>
+                  <a:srgbClr val="141413"/>
+                </a:solidFill>
+                <a:latin typeface="anthropicSerif"/>
+              </a:rPr>
+              <a:t>Context engineering </a:t>
+            </a:r>
+            <a:r>
+              <a:rPr lang="en-US" sz="3200" i="1" dirty="0">
+                <a:solidFill>
+                  <a:srgbClr val="141413"/>
+                </a:solidFill>
+                <a:latin typeface="anthropicSerif"/>
+              </a:rPr>
+              <a:t>refers to the set of strategies for curating and maintaining the optimal set of tokens (information) during LLM inference, including all the other information that may land there outside of the prompts</a:t>
+            </a:r>
+            <a:r>
+              <a:rPr lang="en-US" b="0" i="0" dirty="0">
+                <a:solidFill>
+                  <a:srgbClr val="141413"/>
+                </a:solidFill>
+                <a:effectLst/>
+                <a:latin typeface="anthropicSerif"/>
+              </a:rPr>
+              <a:t>.</a:t>
+            </a:r>
+            <a:endParaRPr lang="es-CL" dirty="0"/>
+          </a:p>
+        </p:txBody>
+      </p:sp>
+      <p:sp>
+        <p:nvSpPr>
+          <p:cNvPr id="9" name="CuadroTexto 8">
+            <a:extLst>
+              <a:ext uri="{FF2B5EF4-FFF2-40B4-BE49-F238E27FC236}">
+                <a16:creationId xmlns:a16="http://schemas.microsoft.com/office/drawing/2014/main" id="{1D204F08-36FB-7F4A-2675-BB7ED0A9297B}"/>
+              </a:ext>
+            </a:extLst>
+          </p:cNvPr>
+          <p:cNvSpPr txBox="1"/>
+          <p:nvPr/>
+        </p:nvSpPr>
+        <p:spPr>
+          <a:xfrm>
+            <a:off x="467912" y="6262530"/>
+            <a:ext cx="6781973" cy="307777"/>
+          </a:xfrm>
+          <a:prstGeom prst="rect">
+            <a:avLst/>
+          </a:prstGeom>
+          <a:noFill/>
+        </p:spPr>
+        <p:txBody>
+          <a:bodyPr wrap="square">
+            <a:spAutoFit/>
+          </a:bodyPr>
+          <a:lstStyle/>
+          <a:p>
+            <a:r>
+              <a:rPr lang="es-CL" sz="1400" b="1" i="1" dirty="0"/>
+              <a:t>Nota</a:t>
+            </a:r>
+            <a:r>
+              <a:rPr lang="es-CL" sz="1400" dirty="0"/>
+              <a:t>: https://www.anthropic.com/engineering/effective-context-engineering-for-ai-agents</a:t>
+            </a:r>
+          </a:p>
+        </p:txBody>
+      </p:sp>
+    </p:spTree>
+    <p:extLst>
+      <p:ext uri="{BB962C8B-B14F-4D97-AF65-F5344CB8AC3E}">
+        <p14:creationId xmlns:p14="http://schemas.microsoft.com/office/powerpoint/2010/main" val="3704890049"/>
+      </p:ext>
+    </p:extLst>
+  </p:cSld>
+  <p:clrMapOvr>
+    <a:masterClrMapping/>
+  </p:clrMapOvr>
+</p:sld>
+</file>
+
+<file path=ppt/slides/slide12.xml><?xml version="1.0" encoding="utf-8"?>
+<p:sld xmlns:a="http://schemas.openxmlformats.org/drawingml/2006/main" xmlns:r="http://schemas.openxmlformats.org/officeDocument/2006/relationships" xmlns:p="http://schemas.openxmlformats.org/presentationml/2006/main">
+  <p:cSld>
+    <p:spTree>
+      <p:nvGrpSpPr>
+        <p:cNvPr id="1" name=""/>
         <p:cNvGrpSpPr/>
         <p:nvPr/>
       </p:nvGrpSpPr>
@@ -5344,10 +5300,40 @@
       </p:grpSpPr>
       <p:pic>
         <p:nvPicPr>
-          <p:cNvPr id="4" name="Picture 2" descr="Duoc UC - Learn Chile">
-            <a:extLst>
-              <a:ext uri="{FF2B5EF4-FFF2-40B4-BE49-F238E27FC236}">
-                <a16:creationId xmlns:a16="http://schemas.microsoft.com/office/drawing/2014/main" id="{72A8930F-1822-7455-B419-932B3D79124C}"/>
+          <p:cNvPr id="5" name="Imagen 4">
+            <a:extLst>
+              <a:ext uri="{FF2B5EF4-FFF2-40B4-BE49-F238E27FC236}">
+                <a16:creationId xmlns:a16="http://schemas.microsoft.com/office/drawing/2014/main" id="{FB52FFFA-FC24-A27B-6E7C-8B589D908567}"/>
+              </a:ext>
+            </a:extLst>
+          </p:cNvPr>
+          <p:cNvPicPr>
+            <a:picLocks noChangeAspect="1"/>
+          </p:cNvPicPr>
+          <p:nvPr/>
+        </p:nvPicPr>
+        <p:blipFill>
+          <a:blip r:embed="rId2"/>
+          <a:stretch>
+            <a:fillRect/>
+          </a:stretch>
+        </p:blipFill>
+        <p:spPr>
+          <a:xfrm>
+            <a:off x="650836" y="1439560"/>
+            <a:ext cx="6285992" cy="4474645"/>
+          </a:xfrm>
+          <a:prstGeom prst="rect">
+            <a:avLst/>
+          </a:prstGeom>
+        </p:spPr>
+      </p:pic>
+      <p:pic>
+        <p:nvPicPr>
+          <p:cNvPr id="6" name="Picture 2" descr="Duoc UC - Learn Chile">
+            <a:extLst>
+              <a:ext uri="{FF2B5EF4-FFF2-40B4-BE49-F238E27FC236}">
+                <a16:creationId xmlns:a16="http://schemas.microsoft.com/office/drawing/2014/main" id="{F0980B70-374D-CEE7-6C2D-7B57B6BF5BE2}"/>
               </a:ext>
             </a:extLst>
           </p:cNvPr>
@@ -5389,230 +5375,163 @@
           </a:extLst>
         </p:spPr>
       </p:pic>
-      <p:cxnSp>
-        <p:nvCxnSpPr>
-          <p:cNvPr id="5" name="Conector recto de flecha 4">
-            <a:extLst>
-              <a:ext uri="{FF2B5EF4-FFF2-40B4-BE49-F238E27FC236}">
-                <a16:creationId xmlns:a16="http://schemas.microsoft.com/office/drawing/2014/main" id="{F00FB54E-34D5-66B4-CA62-2D6A3F706930}"/>
-              </a:ext>
-            </a:extLst>
-          </p:cNvPr>
-          <p:cNvCxnSpPr/>
+      <p:sp>
+        <p:nvSpPr>
+          <p:cNvPr id="8" name="CuadroTexto 7">
+            <a:extLst>
+              <a:ext uri="{FF2B5EF4-FFF2-40B4-BE49-F238E27FC236}">
+                <a16:creationId xmlns:a16="http://schemas.microsoft.com/office/drawing/2014/main" id="{8ADFE299-88F0-E553-107F-053EC1D0EAB2}"/>
+              </a:ext>
+            </a:extLst>
+          </p:cNvPr>
+          <p:cNvSpPr txBox="1"/>
           <p:nvPr/>
-        </p:nvCxnSpPr>
-        <p:spPr>
-          <a:xfrm>
-            <a:off x="4033520" y="3545840"/>
-            <a:ext cx="2611120" cy="1198880"/>
-          </a:xfrm>
-          <a:prstGeom prst="straightConnector1">
-            <a:avLst/>
-          </a:prstGeom>
-          <a:ln w="38100">
-            <a:solidFill>
-              <a:schemeClr val="tx1"/>
-            </a:solidFill>
-            <a:tailEnd type="triangle"/>
-          </a:ln>
-        </p:spPr>
-        <p:style>
-          <a:lnRef idx="1">
-            <a:schemeClr val="accent1"/>
-          </a:lnRef>
-          <a:fillRef idx="0">
-            <a:schemeClr val="accent1"/>
-          </a:fillRef>
-          <a:effectRef idx="0">
-            <a:schemeClr val="accent1"/>
-          </a:effectRef>
-          <a:fontRef idx="minor">
-            <a:schemeClr val="tx1"/>
-          </a:fontRef>
-        </p:style>
-      </p:cxnSp>
-      <p:sp>
-        <p:nvSpPr>
-          <p:cNvPr id="6" name="Título 1">
-            <a:extLst>
-              <a:ext uri="{FF2B5EF4-FFF2-40B4-BE49-F238E27FC236}">
-                <a16:creationId xmlns:a16="http://schemas.microsoft.com/office/drawing/2014/main" id="{8089AB0F-C3E5-E4BD-55D8-E8A91BBA79F0}"/>
-              </a:ext>
-            </a:extLst>
-          </p:cNvPr>
-          <p:cNvSpPr txBox="1">
-            <a:spLocks/>
-          </p:cNvSpPr>
-          <p:nvPr/>
-        </p:nvSpPr>
-        <p:spPr>
-          <a:xfrm>
-            <a:off x="6852920" y="4081938"/>
-            <a:ext cx="10515600" cy="1325563"/>
+        </p:nvSpPr>
+        <p:spPr>
+          <a:xfrm>
+            <a:off x="2144486" y="568016"/>
+            <a:ext cx="8588828" cy="523220"/>
           </a:xfrm>
           <a:prstGeom prst="rect">
             <a:avLst/>
           </a:prstGeom>
-        </p:spPr>
-        <p:txBody>
-          <a:bodyPr vert="horz" lIns="91440" tIns="45720" rIns="91440" bIns="45720" rtlCol="0" anchor="ctr">
-            <a:noAutofit/>
+          <a:noFill/>
+        </p:spPr>
+        <p:txBody>
+          <a:bodyPr wrap="square">
+            <a:spAutoFit/>
           </a:bodyPr>
-          <a:lstStyle>
-            <a:lvl1pPr algn="l" defTabSz="914400" rtl="0" eaLnBrk="1" latinLnBrk="0" hangingPunct="1">
-              <a:lnSpc>
-                <a:spcPct val="90000"/>
-              </a:lnSpc>
-              <a:spcBef>
-                <a:spcPct val="0"/>
-              </a:spcBef>
-              <a:buNone/>
-              <a:defRPr sz="4400" kern="1200">
+          <a:lstStyle/>
+          <a:p>
+            <a:r>
+              <a:rPr lang="es-MX" sz="2800" i="1" dirty="0"/>
+              <a:t>Los </a:t>
+            </a:r>
+            <a:r>
+              <a:rPr lang="es-MX" sz="2800" b="1" i="1" dirty="0"/>
+              <a:t>conceptos</a:t>
+            </a:r>
+            <a:r>
+              <a:rPr lang="es-MX" sz="2800" i="1" dirty="0"/>
+              <a:t> se comprenden mejor en una imagen</a:t>
+            </a:r>
+            <a:r>
+              <a:rPr lang="en-US" sz="2800" b="1" i="1" dirty="0">
                 <a:solidFill>
-                  <a:schemeClr val="tx1"/>
+                  <a:srgbClr val="141413"/>
                 </a:solidFill>
-                <a:latin typeface="+mj-lt"/>
-                <a:ea typeface="+mj-ea"/>
-                <a:cs typeface="+mj-cs"/>
-              </a:defRPr>
-            </a:lvl1pPr>
-          </a:lstStyle>
-          <a:p>
-            <a:r>
-              <a:rPr lang="es-CL" sz="3600" i="1" dirty="0"/>
-              <a:t>¿Es la solución perfecta?</a:t>
-            </a:r>
-          </a:p>
-        </p:txBody>
-      </p:sp>
-      <p:sp>
-        <p:nvSpPr>
-          <p:cNvPr id="3" name="Título 1">
-            <a:extLst>
-              <a:ext uri="{FF2B5EF4-FFF2-40B4-BE49-F238E27FC236}">
-                <a16:creationId xmlns:a16="http://schemas.microsoft.com/office/drawing/2014/main" id="{B221EEEA-9C05-EEE1-C27E-326A96503126}"/>
-              </a:ext>
-            </a:extLst>
-          </p:cNvPr>
-          <p:cNvSpPr txBox="1">
-            <a:spLocks/>
-          </p:cNvSpPr>
+                <a:latin typeface="anthropicSerif"/>
+              </a:rPr>
+              <a:t>.</a:t>
+            </a:r>
+            <a:endParaRPr lang="es-CL" sz="2800" i="1" dirty="0"/>
+          </a:p>
+        </p:txBody>
+      </p:sp>
+      <p:sp>
+        <p:nvSpPr>
+          <p:cNvPr id="9" name="CuadroTexto 8">
+            <a:extLst>
+              <a:ext uri="{FF2B5EF4-FFF2-40B4-BE49-F238E27FC236}">
+                <a16:creationId xmlns:a16="http://schemas.microsoft.com/office/drawing/2014/main" id="{073AAA27-8F89-4794-E349-8ADFA3718966}"/>
+              </a:ext>
+            </a:extLst>
+          </p:cNvPr>
+          <p:cNvSpPr txBox="1"/>
           <p:nvPr/>
         </p:nvSpPr>
         <p:spPr>
           <a:xfrm>
-            <a:off x="7490874" y="4744719"/>
-            <a:ext cx="10515600" cy="1325563"/>
+            <a:off x="467912" y="6262530"/>
+            <a:ext cx="6781973" cy="307777"/>
           </a:xfrm>
           <a:prstGeom prst="rect">
             <a:avLst/>
           </a:prstGeom>
-        </p:spPr>
-        <p:txBody>
-          <a:bodyPr vert="horz" lIns="91440" tIns="45720" rIns="91440" bIns="45720" rtlCol="0" anchor="ctr">
-            <a:noAutofit/>
+          <a:noFill/>
+        </p:spPr>
+        <p:txBody>
+          <a:bodyPr wrap="square">
+            <a:spAutoFit/>
           </a:bodyPr>
-          <a:lstStyle>
-            <a:lvl1pPr algn="l" defTabSz="914400" rtl="0" eaLnBrk="1" latinLnBrk="0" hangingPunct="1">
-              <a:lnSpc>
-                <a:spcPct val="90000"/>
-              </a:lnSpc>
-              <a:spcBef>
-                <a:spcPct val="0"/>
-              </a:spcBef>
-              <a:buNone/>
-              <a:defRPr sz="4400" kern="1200">
-                <a:solidFill>
-                  <a:schemeClr val="tx1"/>
-                </a:solidFill>
-                <a:latin typeface="+mj-lt"/>
-                <a:ea typeface="+mj-ea"/>
-                <a:cs typeface="+mj-cs"/>
-              </a:defRPr>
-            </a:lvl1pPr>
-          </a:lstStyle>
-          <a:p>
-            <a:r>
-              <a:rPr lang="es-CL" sz="3600" i="1" dirty="0"/>
-              <a:t>No, pero ayuda.</a:t>
-            </a:r>
-          </a:p>
-        </p:txBody>
-      </p:sp>
-      <p:sp>
-        <p:nvSpPr>
-          <p:cNvPr id="10" name="Título 1">
-            <a:extLst>
-              <a:ext uri="{FF2B5EF4-FFF2-40B4-BE49-F238E27FC236}">
-                <a16:creationId xmlns:a16="http://schemas.microsoft.com/office/drawing/2014/main" id="{5EA02DBA-441B-1A94-F9CC-A494815C2334}"/>
-              </a:ext>
-            </a:extLst>
-          </p:cNvPr>
-          <p:cNvSpPr txBox="1">
-            <a:spLocks/>
-          </p:cNvSpPr>
+          <a:lstStyle/>
+          <a:p>
+            <a:r>
+              <a:rPr lang="es-CL" sz="1400" b="1" i="1" dirty="0"/>
+              <a:t>Nota</a:t>
+            </a:r>
+            <a:r>
+              <a:rPr lang="es-CL" sz="1400" dirty="0"/>
+              <a:t>: https://www.anthropic.com/engineering/effective-context-engineering-for-ai-agents</a:t>
+            </a:r>
+          </a:p>
+        </p:txBody>
+      </p:sp>
+      <p:sp>
+        <p:nvSpPr>
+          <p:cNvPr id="12" name="CuadroTexto 11">
+            <a:extLst>
+              <a:ext uri="{FF2B5EF4-FFF2-40B4-BE49-F238E27FC236}">
+                <a16:creationId xmlns:a16="http://schemas.microsoft.com/office/drawing/2014/main" id="{04D70CC7-429A-2478-A885-905B4EAA67EA}"/>
+              </a:ext>
+            </a:extLst>
+          </p:cNvPr>
+          <p:cNvSpPr txBox="1"/>
           <p:nvPr/>
         </p:nvSpPr>
         <p:spPr>
           <a:xfrm>
-            <a:off x="691433" y="1912016"/>
-            <a:ext cx="10515600" cy="1325563"/>
+            <a:off x="7249885" y="2173853"/>
+            <a:ext cx="4582886" cy="2862322"/>
           </a:xfrm>
           <a:prstGeom prst="rect">
             <a:avLst/>
           </a:prstGeom>
-        </p:spPr>
-        <p:txBody>
-          <a:bodyPr vert="horz" lIns="91440" tIns="45720" rIns="91440" bIns="45720" rtlCol="0" anchor="ctr">
-            <a:noAutofit/>
+          <a:noFill/>
+        </p:spPr>
+        <p:txBody>
+          <a:bodyPr wrap="square">
+            <a:spAutoFit/>
           </a:bodyPr>
-          <a:lstStyle>
-            <a:lvl1pPr algn="l" defTabSz="914400" rtl="0" eaLnBrk="1" latinLnBrk="0" hangingPunct="1">
-              <a:lnSpc>
-                <a:spcPct val="90000"/>
-              </a:lnSpc>
-              <a:spcBef>
-                <a:spcPct val="0"/>
-              </a:spcBef>
-              <a:buNone/>
-              <a:defRPr sz="4400" kern="1200">
-                <a:solidFill>
-                  <a:schemeClr val="tx1"/>
-                </a:solidFill>
-                <a:latin typeface="+mj-lt"/>
-                <a:ea typeface="+mj-ea"/>
-                <a:cs typeface="+mj-cs"/>
-              </a:defRPr>
-            </a:lvl1pPr>
-          </a:lstStyle>
-          <a:p>
-            <a:r>
-              <a:rPr lang="es-CL" sz="4000" b="1" i="1" dirty="0" err="1"/>
-              <a:t>Prompt</a:t>
-            </a:r>
-            <a:r>
-              <a:rPr lang="es-CL" sz="4000" b="1" i="1" dirty="0"/>
-              <a:t> </a:t>
-            </a:r>
-            <a:r>
-              <a:rPr lang="es-CL" sz="4000" b="1" i="1" dirty="0" err="1"/>
-              <a:t>Engineering</a:t>
-            </a:r>
-            <a:r>
-              <a:rPr lang="es-CL" sz="4000" b="1" i="1" dirty="0"/>
-              <a:t> </a:t>
-            </a:r>
-            <a:r>
-              <a:rPr lang="es-CL" sz="3600" i="1" dirty="0"/>
-              <a:t>es una técnica para mejorar las respuestas de los modelos, buscando consistencia, reducción de alucinaciones y personalización de los </a:t>
-            </a:r>
-            <a:r>
-              <a:rPr lang="es-CL" sz="3600" i="1" dirty="0" err="1"/>
-              <a:t>LLMs</a:t>
-            </a:r>
-            <a:r>
-              <a:rPr lang="es-CL" sz="3600" i="1" dirty="0"/>
-              <a:t>.</a:t>
+          <a:lstStyle/>
+          <a:p>
+            <a:r>
+              <a:rPr lang="es-MX" b="1" dirty="0"/>
+              <a:t>(1) La compactación</a:t>
+            </a:r>
+            <a:r>
+              <a:rPr lang="es-MX" dirty="0"/>
+              <a:t> mantiene el flujo de la conversación en tareas que requieren una interacción extensa de ida y vuelta. </a:t>
+            </a:r>
+          </a:p>
+          <a:p>
+            <a:endParaRPr lang="es-MX" b="1" dirty="0"/>
+          </a:p>
+          <a:p>
+            <a:r>
+              <a:rPr lang="es-MX" b="1" dirty="0"/>
+              <a:t>(2) La toma de notas</a:t>
+            </a:r>
+            <a:r>
+              <a:rPr lang="es-MX" dirty="0"/>
+              <a:t> destaca en el desarrollo iterativo con hitos claramente definidos. </a:t>
+            </a:r>
+          </a:p>
+          <a:p>
+            <a:endParaRPr lang="es-MX" b="1" dirty="0"/>
+          </a:p>
+          <a:p>
+            <a:r>
+              <a:rPr lang="es-MX" b="1" dirty="0"/>
+              <a:t>(3) Las arquitecturas </a:t>
+            </a:r>
+            <a:r>
+              <a:rPr lang="es-MX" b="1" dirty="0" err="1"/>
+              <a:t>multiagente</a:t>
+            </a:r>
+            <a:r>
+              <a:rPr lang="es-MX" dirty="0"/>
+              <a:t> gestionan investigaciones y análisis complejos en los que la exploración en paralelo aporta beneficios.</a:t>
             </a:r>
           </a:p>
         </p:txBody>
@@ -5620,7 +5539,7 @@
     </p:spTree>
     <p:extLst>
       <p:ext uri="{BB962C8B-B14F-4D97-AF65-F5344CB8AC3E}">
-        <p14:creationId xmlns:p14="http://schemas.microsoft.com/office/powerpoint/2010/main" val="4135010020"/>
+        <p14:creationId xmlns:p14="http://schemas.microsoft.com/office/powerpoint/2010/main" val="3262738740"/>
       </p:ext>
     </p:extLst>
   </p:cSld>
@@ -5630,7 +5549,7 @@
 </p:sld>
 </file>
 
-<file path=ppt/slides/slide12.xml><?xml version="1.0" encoding="utf-8"?>
+<file path=ppt/slides/slide13.xml><?xml version="1.0" encoding="utf-8"?>
 <p:sld xmlns:a="http://schemas.openxmlformats.org/drawingml/2006/main" xmlns:r="http://schemas.openxmlformats.org/officeDocument/2006/relationships" xmlns:p="http://schemas.openxmlformats.org/presentationml/2006/main">
   <p:cSld>
     <p:spTree>
@@ -6317,7 +6236,7 @@
 </p:sld>
 </file>
 
-<file path=ppt/slides/slide13.xml><?xml version="1.0" encoding="utf-8"?>
+<file path=ppt/slides/slide14.xml><?xml version="1.0" encoding="utf-8"?>
 <p:sld xmlns:a="http://schemas.openxmlformats.org/drawingml/2006/main" xmlns:r="http://schemas.openxmlformats.org/officeDocument/2006/relationships" xmlns:p="http://schemas.openxmlformats.org/presentationml/2006/main">
   <p:cSld>
     <p:spTree>
@@ -6452,7 +6371,7 @@
 </p:sld>
 </file>
 
-<file path=ppt/slides/slide14.xml><?xml version="1.0" encoding="utf-8"?>
+<file path=ppt/slides/slide15.xml><?xml version="1.0" encoding="utf-8"?>
 <p:sld xmlns:a="http://schemas.openxmlformats.org/drawingml/2006/main" xmlns:r="http://schemas.openxmlformats.org/officeDocument/2006/relationships" xmlns:p="http://schemas.openxmlformats.org/presentationml/2006/main">
   <p:cSld>
     <p:spTree>
@@ -6755,7 +6674,7 @@
 </p:sld>
 </file>
 
-<file path=ppt/slides/slide15.xml><?xml version="1.0" encoding="utf-8"?>
+<file path=ppt/slides/slide16.xml><?xml version="1.0" encoding="utf-8"?>
 <p:sld xmlns:a="http://schemas.openxmlformats.org/drawingml/2006/main" xmlns:r="http://schemas.openxmlformats.org/officeDocument/2006/relationships" xmlns:p="http://schemas.openxmlformats.org/presentationml/2006/main">
   <p:cSld>
     <p:spTree>
@@ -7037,7 +6956,7 @@
 </p:sld>
 </file>
 
-<file path=ppt/slides/slide16.xml><?xml version="1.0" encoding="utf-8"?>
+<file path=ppt/slides/slide17.xml><?xml version="1.0" encoding="utf-8"?>
 <p:sld xmlns:a="http://schemas.openxmlformats.org/drawingml/2006/main" xmlns:r="http://schemas.openxmlformats.org/officeDocument/2006/relationships" xmlns:p="http://schemas.openxmlformats.org/presentationml/2006/main">
   <p:cSld>
     <p:spTree>
@@ -7341,7 +7260,7 @@
 </p:sld>
 </file>
 
-<file path=ppt/slides/slide17.xml><?xml version="1.0" encoding="utf-8"?>
+<file path=ppt/slides/slide18.xml><?xml version="1.0" encoding="utf-8"?>
 <p:sld xmlns:a="http://schemas.openxmlformats.org/drawingml/2006/main" xmlns:r="http://schemas.openxmlformats.org/officeDocument/2006/relationships" xmlns:p="http://schemas.openxmlformats.org/presentationml/2006/main">
   <p:cSld>
     <p:spTree>
@@ -8170,7 +8089,7 @@
 </p:sld>
 </file>
 
-<file path=ppt/slides/slide18.xml><?xml version="1.0" encoding="utf-8"?>
+<file path=ppt/slides/slide19.xml><?xml version="1.0" encoding="utf-8"?>
 <p:sld xmlns:a="http://schemas.openxmlformats.org/drawingml/2006/main" xmlns:r="http://schemas.openxmlformats.org/officeDocument/2006/relationships" xmlns:p="http://schemas.openxmlformats.org/presentationml/2006/main">
   <p:cSld>
     <p:spTree>
@@ -8373,878 +8292,6 @@
     <p:extLst>
       <p:ext uri="{BB962C8B-B14F-4D97-AF65-F5344CB8AC3E}">
         <p14:creationId xmlns:p14="http://schemas.microsoft.com/office/powerpoint/2010/main" val="973217669"/>
-      </p:ext>
-    </p:extLst>
-  </p:cSld>
-  <p:clrMapOvr>
-    <a:masterClrMapping/>
-  </p:clrMapOvr>
-</p:sld>
-</file>
-
-<file path=ppt/slides/slide19.xml><?xml version="1.0" encoding="utf-8"?>
-<p:sld xmlns:a="http://schemas.openxmlformats.org/drawingml/2006/main" xmlns:r="http://schemas.openxmlformats.org/officeDocument/2006/relationships" xmlns:p="http://schemas.openxmlformats.org/presentationml/2006/main">
-  <p:cSld>
-    <p:spTree>
-      <p:nvGrpSpPr>
-        <p:cNvPr id="1" name="">
-          <a:extLst>
-            <a:ext uri="{FF2B5EF4-FFF2-40B4-BE49-F238E27FC236}">
-              <a16:creationId xmlns:a16="http://schemas.microsoft.com/office/drawing/2014/main" id="{C061A072-4FB4-1AEA-6405-AD28382B2A46}"/>
-            </a:ext>
-          </a:extLst>
-        </p:cNvPr>
-        <p:cNvGrpSpPr/>
-        <p:nvPr/>
-      </p:nvGrpSpPr>
-      <p:grpSpPr>
-        <a:xfrm>
-          <a:off x="0" y="0"/>
-          <a:ext cx="0" cy="0"/>
-          <a:chOff x="0" y="0"/>
-          <a:chExt cx="0" cy="0"/>
-        </a:xfrm>
-      </p:grpSpPr>
-      <p:sp>
-        <p:nvSpPr>
-          <p:cNvPr id="2" name="Título 1">
-            <a:extLst>
-              <a:ext uri="{FF2B5EF4-FFF2-40B4-BE49-F238E27FC236}">
-                <a16:creationId xmlns:a16="http://schemas.microsoft.com/office/drawing/2014/main" id="{B5EF6A2F-BEA6-1803-B104-1569CD39E8BF}"/>
-              </a:ext>
-            </a:extLst>
-          </p:cNvPr>
-          <p:cNvSpPr>
-            <a:spLocks noGrp="1"/>
-          </p:cNvSpPr>
-          <p:nvPr>
-            <p:ph type="title"/>
-          </p:nvPr>
-        </p:nvSpPr>
-        <p:spPr>
-          <a:xfrm>
-            <a:off x="-1799214" y="0"/>
-            <a:ext cx="10515600" cy="1325563"/>
-          </a:xfrm>
-        </p:spPr>
-        <p:txBody>
-          <a:bodyPr>
-            <a:noAutofit/>
-          </a:bodyPr>
-          <a:lstStyle/>
-          <a:p>
-            <a:pPr algn="ctr"/>
-            <a:r>
-              <a:rPr lang="es-CL" b="1" i="1" dirty="0"/>
-              <a:t>Idea: </a:t>
-            </a:r>
-            <a:r>
-              <a:rPr lang="es-CL" i="1" dirty="0"/>
-              <a:t>¿Qué construir?</a:t>
-            </a:r>
-          </a:p>
-        </p:txBody>
-      </p:sp>
-      <p:pic>
-        <p:nvPicPr>
-          <p:cNvPr id="4" name="Picture 2" descr="Duoc UC - Learn Chile">
-            <a:extLst>
-              <a:ext uri="{FF2B5EF4-FFF2-40B4-BE49-F238E27FC236}">
-                <a16:creationId xmlns:a16="http://schemas.microsoft.com/office/drawing/2014/main" id="{07FA739C-FD19-C7A3-92E5-12E2677E3E95}"/>
-              </a:ext>
-            </a:extLst>
-          </p:cNvPr>
-          <p:cNvPicPr>
-            <a:picLocks noChangeAspect="1" noChangeArrowheads="1"/>
-          </p:cNvPicPr>
-          <p:nvPr/>
-        </p:nvPicPr>
-        <p:blipFill>
-          <a:blip r:embed="rId3">
-            <a:extLst>
-              <a:ext uri="{28A0092B-C50C-407E-A947-70E740481C1C}">
-                <a14:useLocalDpi xmlns:a14="http://schemas.microsoft.com/office/drawing/2010/main" val="0"/>
-              </a:ext>
-            </a:extLst>
-          </a:blip>
-          <a:srcRect/>
-          <a:stretch>
-            <a:fillRect/>
-          </a:stretch>
-        </p:blipFill>
-        <p:spPr bwMode="auto">
-          <a:xfrm>
-            <a:off x="11135913" y="30480"/>
-            <a:ext cx="974807" cy="825402"/>
-          </a:xfrm>
-          <a:prstGeom prst="rect">
-            <a:avLst/>
-          </a:prstGeom>
-          <a:noFill/>
-          <a:extLst>
-            <a:ext uri="{909E8E84-426E-40DD-AFC4-6F175D3DCCD1}">
-              <a14:hiddenFill xmlns:a14="http://schemas.microsoft.com/office/drawing/2010/main">
-                <a:solidFill>
-                  <a:srgbClr val="FFFFFF"/>
-                </a:solidFill>
-              </a14:hiddenFill>
-            </a:ext>
-          </a:extLst>
-        </p:spPr>
-      </p:pic>
-      <p:pic>
-        <p:nvPicPr>
-          <p:cNvPr id="6" name="Imagen 5">
-            <a:extLst>
-              <a:ext uri="{FF2B5EF4-FFF2-40B4-BE49-F238E27FC236}">
-                <a16:creationId xmlns:a16="http://schemas.microsoft.com/office/drawing/2014/main" id="{A504857C-8158-13E6-E65D-FF5D0A702F46}"/>
-              </a:ext>
-            </a:extLst>
-          </p:cNvPr>
-          <p:cNvPicPr>
-            <a:picLocks noChangeAspect="1"/>
-          </p:cNvPicPr>
-          <p:nvPr/>
-        </p:nvPicPr>
-        <p:blipFill>
-          <a:blip r:embed="rId4"/>
-          <a:stretch>
-            <a:fillRect/>
-          </a:stretch>
-        </p:blipFill>
-        <p:spPr>
-          <a:xfrm>
-            <a:off x="1056087" y="1246386"/>
-            <a:ext cx="3486329" cy="4629388"/>
-          </a:xfrm>
-          <a:prstGeom prst="rect">
-            <a:avLst/>
-          </a:prstGeom>
-        </p:spPr>
-      </p:pic>
-      <p:cxnSp>
-        <p:nvCxnSpPr>
-          <p:cNvPr id="10" name="Conector recto de flecha 9">
-            <a:extLst>
-              <a:ext uri="{FF2B5EF4-FFF2-40B4-BE49-F238E27FC236}">
-                <a16:creationId xmlns:a16="http://schemas.microsoft.com/office/drawing/2014/main" id="{BF506C4D-D57F-2B42-AAAA-4288500E34C7}"/>
-              </a:ext>
-            </a:extLst>
-          </p:cNvPr>
-          <p:cNvCxnSpPr>
-            <a:cxnSpLocks/>
-          </p:cNvCxnSpPr>
-          <p:nvPr/>
-        </p:nvCxnSpPr>
-        <p:spPr>
-          <a:xfrm>
-            <a:off x="8329097" y="532825"/>
-            <a:ext cx="0" cy="4820707"/>
-          </a:xfrm>
-          <a:prstGeom prst="straightConnector1">
-            <a:avLst/>
-          </a:prstGeom>
-          <a:ln w="57150">
-            <a:solidFill>
-              <a:schemeClr val="tx1"/>
-            </a:solidFill>
-            <a:headEnd type="triangle"/>
-            <a:tailEnd type="triangle"/>
-          </a:ln>
-        </p:spPr>
-        <p:style>
-          <a:lnRef idx="1">
-            <a:schemeClr val="accent1"/>
-          </a:lnRef>
-          <a:fillRef idx="0">
-            <a:schemeClr val="accent1"/>
-          </a:fillRef>
-          <a:effectRef idx="0">
-            <a:schemeClr val="accent1"/>
-          </a:effectRef>
-          <a:fontRef idx="minor">
-            <a:schemeClr val="tx1"/>
-          </a:fontRef>
-        </p:style>
-      </p:cxnSp>
-      <p:cxnSp>
-        <p:nvCxnSpPr>
-          <p:cNvPr id="11" name="Conector recto de flecha 10">
-            <a:extLst>
-              <a:ext uri="{FF2B5EF4-FFF2-40B4-BE49-F238E27FC236}">
-                <a16:creationId xmlns:a16="http://schemas.microsoft.com/office/drawing/2014/main" id="{50CF6536-C762-6FF0-C45A-ECE5BD764B4C}"/>
-              </a:ext>
-            </a:extLst>
-          </p:cNvPr>
-          <p:cNvCxnSpPr>
-            <a:cxnSpLocks/>
-          </p:cNvCxnSpPr>
-          <p:nvPr/>
-        </p:nvCxnSpPr>
-        <p:spPr>
-          <a:xfrm>
-            <a:off x="5524937" y="3057585"/>
-            <a:ext cx="5608320" cy="0"/>
-          </a:xfrm>
-          <a:prstGeom prst="straightConnector1">
-            <a:avLst/>
-          </a:prstGeom>
-          <a:ln w="57150">
-            <a:solidFill>
-              <a:schemeClr val="tx1"/>
-            </a:solidFill>
-            <a:headEnd type="triangle"/>
-            <a:tailEnd type="triangle"/>
-          </a:ln>
-        </p:spPr>
-        <p:style>
-          <a:lnRef idx="1">
-            <a:schemeClr val="accent1"/>
-          </a:lnRef>
-          <a:fillRef idx="0">
-            <a:schemeClr val="accent1"/>
-          </a:fillRef>
-          <a:effectRef idx="0">
-            <a:schemeClr val="accent1"/>
-          </a:effectRef>
-          <a:fontRef idx="minor">
-            <a:schemeClr val="tx1"/>
-          </a:fontRef>
-        </p:style>
-      </p:cxnSp>
-      <p:sp>
-        <p:nvSpPr>
-          <p:cNvPr id="15" name="CuadroTexto 14">
-            <a:extLst>
-              <a:ext uri="{FF2B5EF4-FFF2-40B4-BE49-F238E27FC236}">
-                <a16:creationId xmlns:a16="http://schemas.microsoft.com/office/drawing/2014/main" id="{C855A544-5DD8-BE4C-D828-A49F7C67C2B2}"/>
-              </a:ext>
-            </a:extLst>
-          </p:cNvPr>
-          <p:cNvSpPr txBox="1"/>
-          <p:nvPr/>
-        </p:nvSpPr>
-        <p:spPr>
-          <a:xfrm>
-            <a:off x="602207" y="6062606"/>
-            <a:ext cx="7015480" cy="369332"/>
-          </a:xfrm>
-          <a:prstGeom prst="rect">
-            <a:avLst/>
-          </a:prstGeom>
-          <a:noFill/>
-        </p:spPr>
-        <p:txBody>
-          <a:bodyPr wrap="square">
-            <a:spAutoFit/>
-          </a:bodyPr>
-          <a:lstStyle/>
-          <a:p>
-            <a:r>
-              <a:rPr lang="es-CL" b="1" i="1" dirty="0"/>
-              <a:t>Cementerios de Startup: </a:t>
-            </a:r>
-            <a:r>
-              <a:rPr lang="es-CL" i="1" dirty="0"/>
-              <a:t>https://startups.rip/</a:t>
-            </a:r>
-          </a:p>
-        </p:txBody>
-      </p:sp>
-      <p:sp>
-        <p:nvSpPr>
-          <p:cNvPr id="16" name="CuadroTexto 15">
-            <a:extLst>
-              <a:ext uri="{FF2B5EF4-FFF2-40B4-BE49-F238E27FC236}">
-                <a16:creationId xmlns:a16="http://schemas.microsoft.com/office/drawing/2014/main" id="{D1349F77-222A-C1F1-5E97-659F1818C3FA}"/>
-              </a:ext>
-            </a:extLst>
-          </p:cNvPr>
-          <p:cNvSpPr txBox="1"/>
-          <p:nvPr/>
-        </p:nvSpPr>
-        <p:spPr>
-          <a:xfrm>
-            <a:off x="6257668" y="1089010"/>
-            <a:ext cx="1391918" cy="646331"/>
-          </a:xfrm>
-          <a:prstGeom prst="rect">
-            <a:avLst/>
-          </a:prstGeom>
-          <a:noFill/>
-        </p:spPr>
-        <p:txBody>
-          <a:bodyPr wrap="square" rtlCol="0">
-            <a:spAutoFit/>
-          </a:bodyPr>
-          <a:lstStyle/>
-          <a:p>
-            <a:r>
-              <a:rPr lang="es-CL" b="1" i="1" dirty="0" err="1">
-                <a:solidFill>
-                  <a:srgbClr val="C00000"/>
-                </a:solidFill>
-              </a:rPr>
-              <a:t>Vices</a:t>
-            </a:r>
-            <a:endParaRPr lang="es-CL" b="1" i="1" dirty="0">
-              <a:solidFill>
-                <a:srgbClr val="C00000"/>
-              </a:solidFill>
-            </a:endParaRPr>
-          </a:p>
-          <a:p>
-            <a:r>
-              <a:rPr lang="es-CL" b="1" i="1" dirty="0">
-                <a:solidFill>
-                  <a:srgbClr val="C00000"/>
-                </a:solidFill>
-              </a:rPr>
-              <a:t>(vicios)</a:t>
-            </a:r>
-          </a:p>
-        </p:txBody>
-      </p:sp>
-      <p:sp>
-        <p:nvSpPr>
-          <p:cNvPr id="20" name="CuadroTexto 19">
-            <a:extLst>
-              <a:ext uri="{FF2B5EF4-FFF2-40B4-BE49-F238E27FC236}">
-                <a16:creationId xmlns:a16="http://schemas.microsoft.com/office/drawing/2014/main" id="{374483BE-E5DF-870B-333B-AC0F473F6083}"/>
-              </a:ext>
-            </a:extLst>
-          </p:cNvPr>
-          <p:cNvSpPr txBox="1"/>
-          <p:nvPr/>
-        </p:nvSpPr>
-        <p:spPr>
-          <a:xfrm>
-            <a:off x="9741339" y="1144849"/>
-            <a:ext cx="1391918" cy="646331"/>
-          </a:xfrm>
-          <a:prstGeom prst="rect">
-            <a:avLst/>
-          </a:prstGeom>
-          <a:noFill/>
-        </p:spPr>
-        <p:txBody>
-          <a:bodyPr wrap="square" rtlCol="0">
-            <a:spAutoFit/>
-          </a:bodyPr>
-          <a:lstStyle/>
-          <a:p>
-            <a:r>
-              <a:rPr lang="es-CL" b="1" i="1" dirty="0" err="1">
-                <a:solidFill>
-                  <a:schemeClr val="accent6"/>
-                </a:solidFill>
-              </a:rPr>
-              <a:t>Wholesome</a:t>
-            </a:r>
-            <a:endParaRPr lang="es-CL" b="1" i="1" dirty="0">
-              <a:solidFill>
-                <a:schemeClr val="accent6"/>
-              </a:solidFill>
-            </a:endParaRPr>
-          </a:p>
-          <a:p>
-            <a:r>
-              <a:rPr lang="es-CL" b="1" i="1" dirty="0">
-                <a:solidFill>
-                  <a:schemeClr val="accent6"/>
-                </a:solidFill>
-              </a:rPr>
-              <a:t>(sano)</a:t>
-            </a:r>
-          </a:p>
-        </p:txBody>
-      </p:sp>
-      <p:sp>
-        <p:nvSpPr>
-          <p:cNvPr id="21" name="CuadroTexto 20">
-            <a:extLst>
-              <a:ext uri="{FF2B5EF4-FFF2-40B4-BE49-F238E27FC236}">
-                <a16:creationId xmlns:a16="http://schemas.microsoft.com/office/drawing/2014/main" id="{5E742445-4608-FFD7-0081-DF1CDD4A59B4}"/>
-              </a:ext>
-            </a:extLst>
-          </p:cNvPr>
-          <p:cNvSpPr txBox="1"/>
-          <p:nvPr/>
-        </p:nvSpPr>
-        <p:spPr>
-          <a:xfrm>
-            <a:off x="6231058" y="3187668"/>
-            <a:ext cx="1391918" cy="646331"/>
-          </a:xfrm>
-          <a:prstGeom prst="rect">
-            <a:avLst/>
-          </a:prstGeom>
-          <a:noFill/>
-        </p:spPr>
-        <p:txBody>
-          <a:bodyPr wrap="square" rtlCol="0">
-            <a:spAutoFit/>
-          </a:bodyPr>
-          <a:lstStyle/>
-          <a:p>
-            <a:r>
-              <a:rPr lang="es-CL" b="1" i="1" dirty="0" err="1">
-                <a:solidFill>
-                  <a:schemeClr val="accent1"/>
-                </a:solidFill>
-              </a:rPr>
-              <a:t>Toxic</a:t>
-            </a:r>
-            <a:endParaRPr lang="es-CL" b="1" i="1" dirty="0">
-              <a:solidFill>
-                <a:schemeClr val="accent1"/>
-              </a:solidFill>
-            </a:endParaRPr>
-          </a:p>
-          <a:p>
-            <a:r>
-              <a:rPr lang="es-CL" b="1" i="1" dirty="0">
-                <a:solidFill>
-                  <a:schemeClr val="accent1"/>
-                </a:solidFill>
-              </a:rPr>
-              <a:t>(toxico)</a:t>
-            </a:r>
-          </a:p>
-        </p:txBody>
-      </p:sp>
-      <p:sp>
-        <p:nvSpPr>
-          <p:cNvPr id="22" name="CuadroTexto 21">
-            <a:extLst>
-              <a:ext uri="{FF2B5EF4-FFF2-40B4-BE49-F238E27FC236}">
-                <a16:creationId xmlns:a16="http://schemas.microsoft.com/office/drawing/2014/main" id="{4E0FFF16-16C2-0C14-BB68-7D4B67D87B5B}"/>
-              </a:ext>
-            </a:extLst>
-          </p:cNvPr>
-          <p:cNvSpPr txBox="1"/>
-          <p:nvPr/>
-        </p:nvSpPr>
-        <p:spPr>
-          <a:xfrm>
-            <a:off x="9507103" y="3272519"/>
-            <a:ext cx="1971039" cy="646331"/>
-          </a:xfrm>
-          <a:prstGeom prst="rect">
-            <a:avLst/>
-          </a:prstGeom>
-          <a:noFill/>
-        </p:spPr>
-        <p:txBody>
-          <a:bodyPr wrap="square" rtlCol="0">
-            <a:spAutoFit/>
-          </a:bodyPr>
-          <a:lstStyle/>
-          <a:p>
-            <a:r>
-              <a:rPr lang="es-CL" b="1" i="1" dirty="0">
-                <a:solidFill>
-                  <a:srgbClr val="FFC000"/>
-                </a:solidFill>
-              </a:rPr>
-              <a:t>Chores</a:t>
-            </a:r>
-          </a:p>
-          <a:p>
-            <a:r>
-              <a:rPr lang="es-CL" b="1" i="1" dirty="0">
-                <a:solidFill>
-                  <a:srgbClr val="FFC000"/>
-                </a:solidFill>
-              </a:rPr>
-              <a:t>(tareas rutinarias)</a:t>
-            </a:r>
-          </a:p>
-        </p:txBody>
-      </p:sp>
-      <p:sp>
-        <p:nvSpPr>
-          <p:cNvPr id="23" name="CuadroTexto 22">
-            <a:extLst>
-              <a:ext uri="{FF2B5EF4-FFF2-40B4-BE49-F238E27FC236}">
-                <a16:creationId xmlns:a16="http://schemas.microsoft.com/office/drawing/2014/main" id="{A88E4CDB-450E-FAAF-83AA-5623C6824247}"/>
-              </a:ext>
-            </a:extLst>
-          </p:cNvPr>
-          <p:cNvSpPr txBox="1"/>
-          <p:nvPr/>
-        </p:nvSpPr>
-        <p:spPr>
-          <a:xfrm>
-            <a:off x="6098663" y="2639239"/>
-            <a:ext cx="3038048" cy="369332"/>
-          </a:xfrm>
-          <a:prstGeom prst="rect">
-            <a:avLst/>
-          </a:prstGeom>
-          <a:noFill/>
-        </p:spPr>
-        <p:txBody>
-          <a:bodyPr wrap="square" rtlCol="0">
-            <a:spAutoFit/>
-          </a:bodyPr>
-          <a:lstStyle/>
-          <a:p>
-            <a:r>
-              <a:rPr lang="es-CL" b="1" i="1" dirty="0" err="1"/>
-              <a:t>Bad</a:t>
-            </a:r>
-            <a:r>
-              <a:rPr lang="es-CL" b="1" i="1" dirty="0"/>
-              <a:t> </a:t>
-            </a:r>
-            <a:r>
-              <a:rPr lang="es-CL" b="1" i="1" dirty="0" err="1"/>
-              <a:t>for</a:t>
-            </a:r>
-            <a:r>
-              <a:rPr lang="es-CL" b="1" i="1" dirty="0"/>
-              <a:t> </a:t>
-            </a:r>
-            <a:r>
-              <a:rPr lang="es-CL" b="1" i="1" dirty="0" err="1"/>
-              <a:t>you</a:t>
-            </a:r>
-            <a:endParaRPr lang="es-CL" b="1" i="1" dirty="0"/>
-          </a:p>
-        </p:txBody>
-      </p:sp>
-      <p:sp>
-        <p:nvSpPr>
-          <p:cNvPr id="24" name="CuadroTexto 23">
-            <a:extLst>
-              <a:ext uri="{FF2B5EF4-FFF2-40B4-BE49-F238E27FC236}">
-                <a16:creationId xmlns:a16="http://schemas.microsoft.com/office/drawing/2014/main" id="{58044EA5-458E-AA93-FF59-5716A172B098}"/>
-              </a:ext>
-            </a:extLst>
-          </p:cNvPr>
-          <p:cNvSpPr txBox="1"/>
-          <p:nvPr/>
-        </p:nvSpPr>
-        <p:spPr>
-          <a:xfrm>
-            <a:off x="9136711" y="2615625"/>
-            <a:ext cx="3038048" cy="369332"/>
-          </a:xfrm>
-          <a:prstGeom prst="rect">
-            <a:avLst/>
-          </a:prstGeom>
-          <a:noFill/>
-        </p:spPr>
-        <p:txBody>
-          <a:bodyPr wrap="square" rtlCol="0">
-            <a:spAutoFit/>
-          </a:bodyPr>
-          <a:lstStyle/>
-          <a:p>
-            <a:r>
-              <a:rPr lang="es-CL" b="1" i="1" dirty="0"/>
-              <a:t>Good </a:t>
-            </a:r>
-            <a:r>
-              <a:rPr lang="es-CL" b="1" i="1" dirty="0" err="1"/>
-              <a:t>for</a:t>
-            </a:r>
-            <a:r>
-              <a:rPr lang="es-CL" b="1" i="1" dirty="0"/>
-              <a:t> </a:t>
-            </a:r>
-            <a:r>
-              <a:rPr lang="es-CL" b="1" i="1" dirty="0" err="1"/>
-              <a:t>you</a:t>
-            </a:r>
-            <a:endParaRPr lang="es-CL" b="1" i="1" dirty="0"/>
-          </a:p>
-        </p:txBody>
-      </p:sp>
-      <p:sp>
-        <p:nvSpPr>
-          <p:cNvPr id="25" name="CuadroTexto 24">
-            <a:extLst>
-              <a:ext uri="{FF2B5EF4-FFF2-40B4-BE49-F238E27FC236}">
-                <a16:creationId xmlns:a16="http://schemas.microsoft.com/office/drawing/2014/main" id="{826A6338-B070-4003-2A2F-3D1AC0484AF4}"/>
-              </a:ext>
-            </a:extLst>
-          </p:cNvPr>
-          <p:cNvSpPr txBox="1"/>
-          <p:nvPr/>
-        </p:nvSpPr>
-        <p:spPr>
-          <a:xfrm>
-            <a:off x="8298962" y="855882"/>
-            <a:ext cx="3038048" cy="369332"/>
-          </a:xfrm>
-          <a:prstGeom prst="rect">
-            <a:avLst/>
-          </a:prstGeom>
-          <a:noFill/>
-        </p:spPr>
-        <p:txBody>
-          <a:bodyPr wrap="square" rtlCol="0">
-            <a:spAutoFit/>
-          </a:bodyPr>
-          <a:lstStyle/>
-          <a:p>
-            <a:r>
-              <a:rPr lang="es-CL" b="1" i="1" dirty="0" err="1"/>
-              <a:t>Enjoyable</a:t>
-            </a:r>
-            <a:endParaRPr lang="es-CL" b="1" i="1" dirty="0"/>
-          </a:p>
-        </p:txBody>
-      </p:sp>
-      <p:sp>
-        <p:nvSpPr>
-          <p:cNvPr id="26" name="CuadroTexto 25">
-            <a:extLst>
-              <a:ext uri="{FF2B5EF4-FFF2-40B4-BE49-F238E27FC236}">
-                <a16:creationId xmlns:a16="http://schemas.microsoft.com/office/drawing/2014/main" id="{C2F801DD-765B-799B-8586-9CEF9F3C8DC6}"/>
-              </a:ext>
-            </a:extLst>
-          </p:cNvPr>
-          <p:cNvSpPr txBox="1"/>
-          <p:nvPr/>
-        </p:nvSpPr>
-        <p:spPr>
-          <a:xfrm>
-            <a:off x="8329097" y="4835848"/>
-            <a:ext cx="3038048" cy="369332"/>
-          </a:xfrm>
-          <a:prstGeom prst="rect">
-            <a:avLst/>
-          </a:prstGeom>
-          <a:noFill/>
-        </p:spPr>
-        <p:txBody>
-          <a:bodyPr wrap="square" rtlCol="0">
-            <a:spAutoFit/>
-          </a:bodyPr>
-          <a:lstStyle/>
-          <a:p>
-            <a:r>
-              <a:rPr lang="es-CL" b="1" i="1" dirty="0" err="1"/>
-              <a:t>Unpleasant</a:t>
-            </a:r>
-            <a:endParaRPr lang="es-CL" b="1" i="1" dirty="0"/>
-          </a:p>
-        </p:txBody>
-      </p:sp>
-      <p:sp>
-        <p:nvSpPr>
-          <p:cNvPr id="28" name="CuadroTexto 27">
-            <a:extLst>
-              <a:ext uri="{FF2B5EF4-FFF2-40B4-BE49-F238E27FC236}">
-                <a16:creationId xmlns:a16="http://schemas.microsoft.com/office/drawing/2014/main" id="{7A8DFF91-D8C2-82F0-001C-4D69462B9254}"/>
-              </a:ext>
-            </a:extLst>
-          </p:cNvPr>
-          <p:cNvSpPr txBox="1"/>
-          <p:nvPr/>
-        </p:nvSpPr>
-        <p:spPr>
-          <a:xfrm>
-            <a:off x="8547431" y="4133783"/>
-            <a:ext cx="3038048" cy="646331"/>
-          </a:xfrm>
-          <a:prstGeom prst="rect">
-            <a:avLst/>
-          </a:prstGeom>
-          <a:noFill/>
-        </p:spPr>
-        <p:txBody>
-          <a:bodyPr wrap="square" rtlCol="0">
-            <a:spAutoFit/>
-          </a:bodyPr>
-          <a:lstStyle/>
-          <a:p>
-            <a:r>
-              <a:rPr lang="es-CL" i="1" dirty="0"/>
-              <a:t>Cursos de entrenamiento (trabajo) </a:t>
-            </a:r>
-          </a:p>
-        </p:txBody>
-      </p:sp>
-      <p:sp>
-        <p:nvSpPr>
-          <p:cNvPr id="29" name="CuadroTexto 28">
-            <a:extLst>
-              <a:ext uri="{FF2B5EF4-FFF2-40B4-BE49-F238E27FC236}">
-                <a16:creationId xmlns:a16="http://schemas.microsoft.com/office/drawing/2014/main" id="{C8DEC8C6-AB86-9828-2388-1550872ED7DC}"/>
-              </a:ext>
-            </a:extLst>
-          </p:cNvPr>
-          <p:cNvSpPr txBox="1"/>
-          <p:nvPr/>
-        </p:nvSpPr>
-        <p:spPr>
-          <a:xfrm>
-            <a:off x="5819922" y="4339867"/>
-            <a:ext cx="3038048" cy="369332"/>
-          </a:xfrm>
-          <a:prstGeom prst="rect">
-            <a:avLst/>
-          </a:prstGeom>
-          <a:noFill/>
-        </p:spPr>
-        <p:txBody>
-          <a:bodyPr wrap="square" rtlCol="0">
-            <a:spAutoFit/>
-          </a:bodyPr>
-          <a:lstStyle/>
-          <a:p>
-            <a:r>
-              <a:rPr lang="es-CL" i="1" dirty="0"/>
-              <a:t>Control de gastos</a:t>
-            </a:r>
-          </a:p>
-        </p:txBody>
-      </p:sp>
-      <p:sp>
-        <p:nvSpPr>
-          <p:cNvPr id="30" name="CuadroTexto 29">
-            <a:extLst>
-              <a:ext uri="{FF2B5EF4-FFF2-40B4-BE49-F238E27FC236}">
-                <a16:creationId xmlns:a16="http://schemas.microsoft.com/office/drawing/2014/main" id="{5A2CE433-E5CE-EB1A-ED29-45F04281C369}"/>
-              </a:ext>
-            </a:extLst>
-          </p:cNvPr>
-          <p:cNvSpPr txBox="1"/>
-          <p:nvPr/>
-        </p:nvSpPr>
-        <p:spPr>
-          <a:xfrm>
-            <a:off x="8547431" y="1971292"/>
-            <a:ext cx="3038048" cy="369332"/>
-          </a:xfrm>
-          <a:prstGeom prst="rect">
-            <a:avLst/>
-          </a:prstGeom>
-          <a:noFill/>
-        </p:spPr>
-        <p:txBody>
-          <a:bodyPr wrap="square" rtlCol="0">
-            <a:spAutoFit/>
-          </a:bodyPr>
-          <a:lstStyle/>
-          <a:p>
-            <a:r>
-              <a:rPr lang="es-CL" i="1" dirty="0" err="1"/>
-              <a:t>playing</a:t>
-            </a:r>
-            <a:r>
-              <a:rPr lang="es-CL" i="1" dirty="0"/>
-              <a:t> </a:t>
-            </a:r>
-            <a:r>
-              <a:rPr lang="es-CL" i="1" dirty="0" err="1"/>
-              <a:t>games</a:t>
-            </a:r>
-            <a:endParaRPr lang="es-CL" i="1" dirty="0"/>
-          </a:p>
-        </p:txBody>
-      </p:sp>
-      <p:sp>
-        <p:nvSpPr>
-          <p:cNvPr id="31" name="CuadroTexto 30">
-            <a:extLst>
-              <a:ext uri="{FF2B5EF4-FFF2-40B4-BE49-F238E27FC236}">
-                <a16:creationId xmlns:a16="http://schemas.microsoft.com/office/drawing/2014/main" id="{9351118B-8416-99DC-95C1-7FCBA7C722B6}"/>
-              </a:ext>
-            </a:extLst>
-          </p:cNvPr>
-          <p:cNvSpPr txBox="1"/>
-          <p:nvPr/>
-        </p:nvSpPr>
-        <p:spPr>
-          <a:xfrm>
-            <a:off x="5350230" y="5383896"/>
-            <a:ext cx="7015480" cy="1384995"/>
-          </a:xfrm>
-          <a:prstGeom prst="rect">
-            <a:avLst/>
-          </a:prstGeom>
-          <a:noFill/>
-        </p:spPr>
-        <p:txBody>
-          <a:bodyPr wrap="square" rtlCol="0">
-            <a:spAutoFit/>
-          </a:bodyPr>
-          <a:lstStyle/>
-          <a:p>
-            <a:pPr marL="285750" indent="-285750">
-              <a:buFont typeface="Arial" panose="020B0604020202020204" pitchFamily="34" charset="0"/>
-              <a:buChar char="•"/>
-            </a:pPr>
-            <a:r>
-              <a:rPr lang="es-CL" sz="1400" b="1" dirty="0" err="1"/>
-              <a:t>Wholesome</a:t>
-            </a:r>
-            <a:r>
-              <a:rPr lang="es-CL" sz="1400" b="1" dirty="0"/>
-              <a:t> (actividades sanas):</a:t>
-            </a:r>
-            <a:r>
-              <a:rPr lang="es-CL" sz="1400" dirty="0"/>
-              <a:t> No uses IA. Disfrútalas.</a:t>
-            </a:r>
-            <a:br>
-              <a:rPr lang="es-CL" sz="1400" dirty="0"/>
-            </a:br>
-            <a:r>
-              <a:rPr lang="es-CL" sz="1400" b="1" dirty="0" err="1"/>
-              <a:t>Toxic</a:t>
-            </a:r>
-            <a:r>
-              <a:rPr lang="es-CL" sz="1400" b="1" dirty="0"/>
-              <a:t> (actividades tóxicas):</a:t>
-            </a:r>
-            <a:r>
-              <a:rPr lang="es-CL" sz="1400" dirty="0"/>
-              <a:t> Usa IA para automatizarlas o eliminarlas. No queremos lidiar con ellas.</a:t>
-            </a:r>
-            <a:br>
-              <a:rPr lang="es-CL" sz="1400" dirty="0"/>
-            </a:br>
-            <a:r>
-              <a:rPr lang="es-CL" sz="1400" b="1" dirty="0"/>
-              <a:t>Chores (tareas domésticas o rutinarias):</a:t>
-            </a:r>
-            <a:r>
-              <a:rPr lang="es-CL" sz="1400" dirty="0"/>
-              <a:t> Usa IA para hacerlas más placenteras. </a:t>
-            </a:r>
-            <a:r>
-              <a:rPr lang="es-CL" sz="1400" i="1" dirty="0"/>
-              <a:t>(Sigan pensando.)</a:t>
-            </a:r>
-            <a:br>
-              <a:rPr lang="es-CL" sz="1400" dirty="0"/>
-            </a:br>
-            <a:r>
-              <a:rPr lang="es-CL" sz="1400" b="1" dirty="0" err="1"/>
-              <a:t>Vices</a:t>
-            </a:r>
-            <a:r>
-              <a:rPr lang="es-CL" sz="1400" b="1" dirty="0"/>
-              <a:t> (vicios):</a:t>
-            </a:r>
-            <a:r>
-              <a:rPr lang="es-CL" sz="1400" dirty="0"/>
-              <a:t> Usa IA para evitar hacerlas.</a:t>
-            </a:r>
-            <a:endParaRPr lang="es-CL" sz="1600" i="1" dirty="0"/>
-          </a:p>
-        </p:txBody>
-      </p:sp>
-    </p:spTree>
-    <p:extLst>
-      <p:ext uri="{BB962C8B-B14F-4D97-AF65-F5344CB8AC3E}">
-        <p14:creationId xmlns:p14="http://schemas.microsoft.com/office/powerpoint/2010/main" val="3803486819"/>
       </p:ext>
     </p:extLst>
   </p:cSld>
@@ -9462,7 +8509,1564 @@
 </p:sld>
 </file>
 
+<file path=ppt/slides/slide20.xml><?xml version="1.0" encoding="utf-8"?>
+<p:sld xmlns:a="http://schemas.openxmlformats.org/drawingml/2006/main" xmlns:r="http://schemas.openxmlformats.org/officeDocument/2006/relationships" xmlns:p="http://schemas.openxmlformats.org/presentationml/2006/main">
+  <p:cSld>
+    <p:spTree>
+      <p:nvGrpSpPr>
+        <p:cNvPr id="1" name="">
+          <a:extLst>
+            <a:ext uri="{FF2B5EF4-FFF2-40B4-BE49-F238E27FC236}">
+              <a16:creationId xmlns:a16="http://schemas.microsoft.com/office/drawing/2014/main" id="{7FCF885F-3B86-7E96-3734-78B6DCEC4556}"/>
+            </a:ext>
+          </a:extLst>
+        </p:cNvPr>
+        <p:cNvGrpSpPr/>
+        <p:nvPr/>
+      </p:nvGrpSpPr>
+      <p:grpSpPr>
+        <a:xfrm>
+          <a:off x="0" y="0"/>
+          <a:ext cx="0" cy="0"/>
+          <a:chOff x="0" y="0"/>
+          <a:chExt cx="0" cy="0"/>
+        </a:xfrm>
+      </p:grpSpPr>
+      <p:sp>
+        <p:nvSpPr>
+          <p:cNvPr id="2" name="Título 1">
+            <a:extLst>
+              <a:ext uri="{FF2B5EF4-FFF2-40B4-BE49-F238E27FC236}">
+                <a16:creationId xmlns:a16="http://schemas.microsoft.com/office/drawing/2014/main" id="{6BC6D1FD-63B9-9F39-670F-837AF5AF2A41}"/>
+              </a:ext>
+            </a:extLst>
+          </p:cNvPr>
+          <p:cNvSpPr>
+            <a:spLocks noGrp="1"/>
+          </p:cNvSpPr>
+          <p:nvPr>
+            <p:ph type="title"/>
+          </p:nvPr>
+        </p:nvSpPr>
+        <p:spPr>
+          <a:xfrm>
+            <a:off x="620313" y="193100"/>
+            <a:ext cx="10515600" cy="1325563"/>
+          </a:xfrm>
+        </p:spPr>
+        <p:txBody>
+          <a:bodyPr>
+            <a:noAutofit/>
+          </a:bodyPr>
+          <a:lstStyle/>
+          <a:p>
+            <a:pPr algn="ctr"/>
+            <a:r>
+              <a:rPr lang="es-CL" b="1" i="1" dirty="0"/>
+              <a:t>¿Cómo luce un buen </a:t>
+            </a:r>
+            <a:r>
+              <a:rPr lang="es-CL" b="1" i="1" dirty="0" err="1"/>
+              <a:t>prompt</a:t>
+            </a:r>
+            <a:r>
+              <a:rPr lang="es-CL" b="1" i="1" dirty="0"/>
+              <a:t>?</a:t>
+            </a:r>
+          </a:p>
+        </p:txBody>
+      </p:sp>
+      <p:pic>
+        <p:nvPicPr>
+          <p:cNvPr id="4" name="Picture 2" descr="Duoc UC - Learn Chile">
+            <a:extLst>
+              <a:ext uri="{FF2B5EF4-FFF2-40B4-BE49-F238E27FC236}">
+                <a16:creationId xmlns:a16="http://schemas.microsoft.com/office/drawing/2014/main" id="{D60398F5-B95B-E516-3517-8197774530F2}"/>
+              </a:ext>
+            </a:extLst>
+          </p:cNvPr>
+          <p:cNvPicPr>
+            <a:picLocks noChangeAspect="1" noChangeArrowheads="1"/>
+          </p:cNvPicPr>
+          <p:nvPr/>
+        </p:nvPicPr>
+        <p:blipFill>
+          <a:blip r:embed="rId3">
+            <a:extLst>
+              <a:ext uri="{28A0092B-C50C-407E-A947-70E740481C1C}">
+                <a14:useLocalDpi xmlns:a14="http://schemas.microsoft.com/office/drawing/2010/main" val="0"/>
+              </a:ext>
+            </a:extLst>
+          </a:blip>
+          <a:srcRect/>
+          <a:stretch>
+            <a:fillRect/>
+          </a:stretch>
+        </p:blipFill>
+        <p:spPr bwMode="auto">
+          <a:xfrm>
+            <a:off x="11135913" y="30480"/>
+            <a:ext cx="974807" cy="825402"/>
+          </a:xfrm>
+          <a:prstGeom prst="rect">
+            <a:avLst/>
+          </a:prstGeom>
+          <a:noFill/>
+          <a:extLst>
+            <a:ext uri="{909E8E84-426E-40DD-AFC4-6F175D3DCCD1}">
+              <a14:hiddenFill xmlns:a14="http://schemas.microsoft.com/office/drawing/2010/main">
+                <a:solidFill>
+                  <a:srgbClr val="FFFFFF"/>
+                </a:solidFill>
+              </a14:hiddenFill>
+            </a:ext>
+          </a:extLst>
+        </p:spPr>
+      </p:pic>
+      <p:sp>
+        <p:nvSpPr>
+          <p:cNvPr id="3" name="CuadroTexto 2">
+            <a:extLst>
+              <a:ext uri="{FF2B5EF4-FFF2-40B4-BE49-F238E27FC236}">
+                <a16:creationId xmlns:a16="http://schemas.microsoft.com/office/drawing/2014/main" id="{68672C68-7888-4662-3474-90EA4809D5D4}"/>
+              </a:ext>
+            </a:extLst>
+          </p:cNvPr>
+          <p:cNvSpPr txBox="1"/>
+          <p:nvPr/>
+        </p:nvSpPr>
+        <p:spPr>
+          <a:xfrm>
+            <a:off x="3112452" y="6245277"/>
+            <a:ext cx="6410408" cy="369332"/>
+          </a:xfrm>
+          <a:prstGeom prst="rect">
+            <a:avLst/>
+          </a:prstGeom>
+          <a:noFill/>
+        </p:spPr>
+        <p:txBody>
+          <a:bodyPr wrap="square">
+            <a:spAutoFit/>
+          </a:bodyPr>
+          <a:lstStyle/>
+          <a:p>
+            <a:r>
+              <a:rPr lang="en-US" b="1" i="1" dirty="0"/>
+              <a:t>Simplicity is the ultimate sophistication. (Leonardo da Vinci)</a:t>
+            </a:r>
+            <a:endParaRPr lang="es-CL" b="1" i="1" dirty="0">
+              <a:latin typeface="+mj-lt"/>
+            </a:endParaRPr>
+          </a:p>
+        </p:txBody>
+      </p:sp>
+      <p:pic>
+        <p:nvPicPr>
+          <p:cNvPr id="6" name="Imagen 5">
+            <a:extLst>
+              <a:ext uri="{FF2B5EF4-FFF2-40B4-BE49-F238E27FC236}">
+                <a16:creationId xmlns:a16="http://schemas.microsoft.com/office/drawing/2014/main" id="{55668CB2-1C84-03F4-EBDD-FB5FF4C6AB20}"/>
+              </a:ext>
+            </a:extLst>
+          </p:cNvPr>
+          <p:cNvPicPr>
+            <a:picLocks noChangeAspect="1"/>
+          </p:cNvPicPr>
+          <p:nvPr/>
+        </p:nvPicPr>
+        <p:blipFill>
+          <a:blip r:embed="rId4"/>
+          <a:stretch>
+            <a:fillRect/>
+          </a:stretch>
+        </p:blipFill>
+        <p:spPr>
+          <a:xfrm>
+            <a:off x="2207173" y="1518663"/>
+            <a:ext cx="7966842" cy="4552480"/>
+          </a:xfrm>
+          <a:prstGeom prst="rect">
+            <a:avLst/>
+          </a:prstGeom>
+        </p:spPr>
+      </p:pic>
+    </p:spTree>
+    <p:extLst>
+      <p:ext uri="{BB962C8B-B14F-4D97-AF65-F5344CB8AC3E}">
+        <p14:creationId xmlns:p14="http://schemas.microsoft.com/office/powerpoint/2010/main" val="1511176028"/>
+      </p:ext>
+    </p:extLst>
+  </p:cSld>
+  <p:clrMapOvr>
+    <a:masterClrMapping/>
+  </p:clrMapOvr>
+</p:sld>
+</file>
+
+<file path=ppt/slides/slide21.xml><?xml version="1.0" encoding="utf-8"?>
+<p:sld xmlns:a="http://schemas.openxmlformats.org/drawingml/2006/main" xmlns:r="http://schemas.openxmlformats.org/officeDocument/2006/relationships" xmlns:p="http://schemas.openxmlformats.org/presentationml/2006/main">
+  <p:cSld>
+    <p:spTree>
+      <p:nvGrpSpPr>
+        <p:cNvPr id="1" name="">
+          <a:extLst>
+            <a:ext uri="{FF2B5EF4-FFF2-40B4-BE49-F238E27FC236}">
+              <a16:creationId xmlns:a16="http://schemas.microsoft.com/office/drawing/2014/main" id="{C061A072-4FB4-1AEA-6405-AD28382B2A46}"/>
+            </a:ext>
+          </a:extLst>
+        </p:cNvPr>
+        <p:cNvGrpSpPr/>
+        <p:nvPr/>
+      </p:nvGrpSpPr>
+      <p:grpSpPr>
+        <a:xfrm>
+          <a:off x="0" y="0"/>
+          <a:ext cx="0" cy="0"/>
+          <a:chOff x="0" y="0"/>
+          <a:chExt cx="0" cy="0"/>
+        </a:xfrm>
+      </p:grpSpPr>
+      <p:sp>
+        <p:nvSpPr>
+          <p:cNvPr id="2" name="Título 1">
+            <a:extLst>
+              <a:ext uri="{FF2B5EF4-FFF2-40B4-BE49-F238E27FC236}">
+                <a16:creationId xmlns:a16="http://schemas.microsoft.com/office/drawing/2014/main" id="{B5EF6A2F-BEA6-1803-B104-1569CD39E8BF}"/>
+              </a:ext>
+            </a:extLst>
+          </p:cNvPr>
+          <p:cNvSpPr>
+            <a:spLocks noGrp="1"/>
+          </p:cNvSpPr>
+          <p:nvPr>
+            <p:ph type="title"/>
+          </p:nvPr>
+        </p:nvSpPr>
+        <p:spPr>
+          <a:xfrm>
+            <a:off x="-1799214" y="0"/>
+            <a:ext cx="10515600" cy="1325563"/>
+          </a:xfrm>
+        </p:spPr>
+        <p:txBody>
+          <a:bodyPr>
+            <a:noAutofit/>
+          </a:bodyPr>
+          <a:lstStyle/>
+          <a:p>
+            <a:pPr algn="ctr"/>
+            <a:r>
+              <a:rPr lang="es-CL" b="1" i="1" dirty="0"/>
+              <a:t>Idea: </a:t>
+            </a:r>
+            <a:r>
+              <a:rPr lang="es-CL" i="1" dirty="0"/>
+              <a:t>¿Qué construir?</a:t>
+            </a:r>
+          </a:p>
+        </p:txBody>
+      </p:sp>
+      <p:pic>
+        <p:nvPicPr>
+          <p:cNvPr id="4" name="Picture 2" descr="Duoc UC - Learn Chile">
+            <a:extLst>
+              <a:ext uri="{FF2B5EF4-FFF2-40B4-BE49-F238E27FC236}">
+                <a16:creationId xmlns:a16="http://schemas.microsoft.com/office/drawing/2014/main" id="{07FA739C-FD19-C7A3-92E5-12E2677E3E95}"/>
+              </a:ext>
+            </a:extLst>
+          </p:cNvPr>
+          <p:cNvPicPr>
+            <a:picLocks noChangeAspect="1" noChangeArrowheads="1"/>
+          </p:cNvPicPr>
+          <p:nvPr/>
+        </p:nvPicPr>
+        <p:blipFill>
+          <a:blip r:embed="rId3">
+            <a:extLst>
+              <a:ext uri="{28A0092B-C50C-407E-A947-70E740481C1C}">
+                <a14:useLocalDpi xmlns:a14="http://schemas.microsoft.com/office/drawing/2010/main" val="0"/>
+              </a:ext>
+            </a:extLst>
+          </a:blip>
+          <a:srcRect/>
+          <a:stretch>
+            <a:fillRect/>
+          </a:stretch>
+        </p:blipFill>
+        <p:spPr bwMode="auto">
+          <a:xfrm>
+            <a:off x="11135913" y="30480"/>
+            <a:ext cx="974807" cy="825402"/>
+          </a:xfrm>
+          <a:prstGeom prst="rect">
+            <a:avLst/>
+          </a:prstGeom>
+          <a:noFill/>
+          <a:extLst>
+            <a:ext uri="{909E8E84-426E-40DD-AFC4-6F175D3DCCD1}">
+              <a14:hiddenFill xmlns:a14="http://schemas.microsoft.com/office/drawing/2010/main">
+                <a:solidFill>
+                  <a:srgbClr val="FFFFFF"/>
+                </a:solidFill>
+              </a14:hiddenFill>
+            </a:ext>
+          </a:extLst>
+        </p:spPr>
+      </p:pic>
+      <p:pic>
+        <p:nvPicPr>
+          <p:cNvPr id="6" name="Imagen 5">
+            <a:extLst>
+              <a:ext uri="{FF2B5EF4-FFF2-40B4-BE49-F238E27FC236}">
+                <a16:creationId xmlns:a16="http://schemas.microsoft.com/office/drawing/2014/main" id="{A504857C-8158-13E6-E65D-FF5D0A702F46}"/>
+              </a:ext>
+            </a:extLst>
+          </p:cNvPr>
+          <p:cNvPicPr>
+            <a:picLocks noChangeAspect="1"/>
+          </p:cNvPicPr>
+          <p:nvPr/>
+        </p:nvPicPr>
+        <p:blipFill>
+          <a:blip r:embed="rId4"/>
+          <a:stretch>
+            <a:fillRect/>
+          </a:stretch>
+        </p:blipFill>
+        <p:spPr>
+          <a:xfrm>
+            <a:off x="1056087" y="1246386"/>
+            <a:ext cx="3486329" cy="4629388"/>
+          </a:xfrm>
+          <a:prstGeom prst="rect">
+            <a:avLst/>
+          </a:prstGeom>
+        </p:spPr>
+      </p:pic>
+      <p:cxnSp>
+        <p:nvCxnSpPr>
+          <p:cNvPr id="10" name="Conector recto de flecha 9">
+            <a:extLst>
+              <a:ext uri="{FF2B5EF4-FFF2-40B4-BE49-F238E27FC236}">
+                <a16:creationId xmlns:a16="http://schemas.microsoft.com/office/drawing/2014/main" id="{BF506C4D-D57F-2B42-AAAA-4288500E34C7}"/>
+              </a:ext>
+            </a:extLst>
+          </p:cNvPr>
+          <p:cNvCxnSpPr>
+            <a:cxnSpLocks/>
+          </p:cNvCxnSpPr>
+          <p:nvPr/>
+        </p:nvCxnSpPr>
+        <p:spPr>
+          <a:xfrm>
+            <a:off x="8329097" y="532825"/>
+            <a:ext cx="0" cy="4820707"/>
+          </a:xfrm>
+          <a:prstGeom prst="straightConnector1">
+            <a:avLst/>
+          </a:prstGeom>
+          <a:ln w="57150">
+            <a:solidFill>
+              <a:schemeClr val="tx1"/>
+            </a:solidFill>
+            <a:headEnd type="triangle"/>
+            <a:tailEnd type="triangle"/>
+          </a:ln>
+        </p:spPr>
+        <p:style>
+          <a:lnRef idx="1">
+            <a:schemeClr val="accent1"/>
+          </a:lnRef>
+          <a:fillRef idx="0">
+            <a:schemeClr val="accent1"/>
+          </a:fillRef>
+          <a:effectRef idx="0">
+            <a:schemeClr val="accent1"/>
+          </a:effectRef>
+          <a:fontRef idx="minor">
+            <a:schemeClr val="tx1"/>
+          </a:fontRef>
+        </p:style>
+      </p:cxnSp>
+      <p:cxnSp>
+        <p:nvCxnSpPr>
+          <p:cNvPr id="11" name="Conector recto de flecha 10">
+            <a:extLst>
+              <a:ext uri="{FF2B5EF4-FFF2-40B4-BE49-F238E27FC236}">
+                <a16:creationId xmlns:a16="http://schemas.microsoft.com/office/drawing/2014/main" id="{50CF6536-C762-6FF0-C45A-ECE5BD764B4C}"/>
+              </a:ext>
+            </a:extLst>
+          </p:cNvPr>
+          <p:cNvCxnSpPr>
+            <a:cxnSpLocks/>
+          </p:cNvCxnSpPr>
+          <p:nvPr/>
+        </p:nvCxnSpPr>
+        <p:spPr>
+          <a:xfrm>
+            <a:off x="5524937" y="3057585"/>
+            <a:ext cx="5608320" cy="0"/>
+          </a:xfrm>
+          <a:prstGeom prst="straightConnector1">
+            <a:avLst/>
+          </a:prstGeom>
+          <a:ln w="57150">
+            <a:solidFill>
+              <a:schemeClr val="tx1"/>
+            </a:solidFill>
+            <a:headEnd type="triangle"/>
+            <a:tailEnd type="triangle"/>
+          </a:ln>
+        </p:spPr>
+        <p:style>
+          <a:lnRef idx="1">
+            <a:schemeClr val="accent1"/>
+          </a:lnRef>
+          <a:fillRef idx="0">
+            <a:schemeClr val="accent1"/>
+          </a:fillRef>
+          <a:effectRef idx="0">
+            <a:schemeClr val="accent1"/>
+          </a:effectRef>
+          <a:fontRef idx="minor">
+            <a:schemeClr val="tx1"/>
+          </a:fontRef>
+        </p:style>
+      </p:cxnSp>
+      <p:sp>
+        <p:nvSpPr>
+          <p:cNvPr id="15" name="CuadroTexto 14">
+            <a:extLst>
+              <a:ext uri="{FF2B5EF4-FFF2-40B4-BE49-F238E27FC236}">
+                <a16:creationId xmlns:a16="http://schemas.microsoft.com/office/drawing/2014/main" id="{C855A544-5DD8-BE4C-D828-A49F7C67C2B2}"/>
+              </a:ext>
+            </a:extLst>
+          </p:cNvPr>
+          <p:cNvSpPr txBox="1"/>
+          <p:nvPr/>
+        </p:nvSpPr>
+        <p:spPr>
+          <a:xfrm>
+            <a:off x="602207" y="6062606"/>
+            <a:ext cx="7015480" cy="369332"/>
+          </a:xfrm>
+          <a:prstGeom prst="rect">
+            <a:avLst/>
+          </a:prstGeom>
+          <a:noFill/>
+        </p:spPr>
+        <p:txBody>
+          <a:bodyPr wrap="square">
+            <a:spAutoFit/>
+          </a:bodyPr>
+          <a:lstStyle/>
+          <a:p>
+            <a:r>
+              <a:rPr lang="es-CL" b="1" i="1" dirty="0"/>
+              <a:t>Cementerios de Startup: </a:t>
+            </a:r>
+            <a:r>
+              <a:rPr lang="es-CL" i="1" dirty="0"/>
+              <a:t>https://startups.rip/</a:t>
+            </a:r>
+          </a:p>
+        </p:txBody>
+      </p:sp>
+      <p:sp>
+        <p:nvSpPr>
+          <p:cNvPr id="16" name="CuadroTexto 15">
+            <a:extLst>
+              <a:ext uri="{FF2B5EF4-FFF2-40B4-BE49-F238E27FC236}">
+                <a16:creationId xmlns:a16="http://schemas.microsoft.com/office/drawing/2014/main" id="{D1349F77-222A-C1F1-5E97-659F1818C3FA}"/>
+              </a:ext>
+            </a:extLst>
+          </p:cNvPr>
+          <p:cNvSpPr txBox="1"/>
+          <p:nvPr/>
+        </p:nvSpPr>
+        <p:spPr>
+          <a:xfrm>
+            <a:off x="6257668" y="1089010"/>
+            <a:ext cx="1391918" cy="646331"/>
+          </a:xfrm>
+          <a:prstGeom prst="rect">
+            <a:avLst/>
+          </a:prstGeom>
+          <a:noFill/>
+        </p:spPr>
+        <p:txBody>
+          <a:bodyPr wrap="square" rtlCol="0">
+            <a:spAutoFit/>
+          </a:bodyPr>
+          <a:lstStyle/>
+          <a:p>
+            <a:r>
+              <a:rPr lang="es-CL" b="1" i="1" dirty="0" err="1">
+                <a:solidFill>
+                  <a:srgbClr val="C00000"/>
+                </a:solidFill>
+              </a:rPr>
+              <a:t>Vices</a:t>
+            </a:r>
+            <a:endParaRPr lang="es-CL" b="1" i="1" dirty="0">
+              <a:solidFill>
+                <a:srgbClr val="C00000"/>
+              </a:solidFill>
+            </a:endParaRPr>
+          </a:p>
+          <a:p>
+            <a:r>
+              <a:rPr lang="es-CL" b="1" i="1" dirty="0">
+                <a:solidFill>
+                  <a:srgbClr val="C00000"/>
+                </a:solidFill>
+              </a:rPr>
+              <a:t>(vicios)</a:t>
+            </a:r>
+          </a:p>
+        </p:txBody>
+      </p:sp>
+      <p:sp>
+        <p:nvSpPr>
+          <p:cNvPr id="20" name="CuadroTexto 19">
+            <a:extLst>
+              <a:ext uri="{FF2B5EF4-FFF2-40B4-BE49-F238E27FC236}">
+                <a16:creationId xmlns:a16="http://schemas.microsoft.com/office/drawing/2014/main" id="{374483BE-E5DF-870B-333B-AC0F473F6083}"/>
+              </a:ext>
+            </a:extLst>
+          </p:cNvPr>
+          <p:cNvSpPr txBox="1"/>
+          <p:nvPr/>
+        </p:nvSpPr>
+        <p:spPr>
+          <a:xfrm>
+            <a:off x="9741339" y="1144849"/>
+            <a:ext cx="1391918" cy="646331"/>
+          </a:xfrm>
+          <a:prstGeom prst="rect">
+            <a:avLst/>
+          </a:prstGeom>
+          <a:noFill/>
+        </p:spPr>
+        <p:txBody>
+          <a:bodyPr wrap="square" rtlCol="0">
+            <a:spAutoFit/>
+          </a:bodyPr>
+          <a:lstStyle/>
+          <a:p>
+            <a:r>
+              <a:rPr lang="es-CL" b="1" i="1" dirty="0" err="1">
+                <a:solidFill>
+                  <a:schemeClr val="accent6"/>
+                </a:solidFill>
+              </a:rPr>
+              <a:t>Wholesome</a:t>
+            </a:r>
+            <a:endParaRPr lang="es-CL" b="1" i="1" dirty="0">
+              <a:solidFill>
+                <a:schemeClr val="accent6"/>
+              </a:solidFill>
+            </a:endParaRPr>
+          </a:p>
+          <a:p>
+            <a:r>
+              <a:rPr lang="es-CL" b="1" i="1" dirty="0">
+                <a:solidFill>
+                  <a:schemeClr val="accent6"/>
+                </a:solidFill>
+              </a:rPr>
+              <a:t>(sano)</a:t>
+            </a:r>
+          </a:p>
+        </p:txBody>
+      </p:sp>
+      <p:sp>
+        <p:nvSpPr>
+          <p:cNvPr id="21" name="CuadroTexto 20">
+            <a:extLst>
+              <a:ext uri="{FF2B5EF4-FFF2-40B4-BE49-F238E27FC236}">
+                <a16:creationId xmlns:a16="http://schemas.microsoft.com/office/drawing/2014/main" id="{5E742445-4608-FFD7-0081-DF1CDD4A59B4}"/>
+              </a:ext>
+            </a:extLst>
+          </p:cNvPr>
+          <p:cNvSpPr txBox="1"/>
+          <p:nvPr/>
+        </p:nvSpPr>
+        <p:spPr>
+          <a:xfrm>
+            <a:off x="6231058" y="3187668"/>
+            <a:ext cx="1391918" cy="646331"/>
+          </a:xfrm>
+          <a:prstGeom prst="rect">
+            <a:avLst/>
+          </a:prstGeom>
+          <a:noFill/>
+        </p:spPr>
+        <p:txBody>
+          <a:bodyPr wrap="square" rtlCol="0">
+            <a:spAutoFit/>
+          </a:bodyPr>
+          <a:lstStyle/>
+          <a:p>
+            <a:r>
+              <a:rPr lang="es-CL" b="1" i="1" dirty="0" err="1">
+                <a:solidFill>
+                  <a:schemeClr val="accent1"/>
+                </a:solidFill>
+              </a:rPr>
+              <a:t>Toxic</a:t>
+            </a:r>
+            <a:endParaRPr lang="es-CL" b="1" i="1" dirty="0">
+              <a:solidFill>
+                <a:schemeClr val="accent1"/>
+              </a:solidFill>
+            </a:endParaRPr>
+          </a:p>
+          <a:p>
+            <a:r>
+              <a:rPr lang="es-CL" b="1" i="1" dirty="0">
+                <a:solidFill>
+                  <a:schemeClr val="accent1"/>
+                </a:solidFill>
+              </a:rPr>
+              <a:t>(toxico)</a:t>
+            </a:r>
+          </a:p>
+        </p:txBody>
+      </p:sp>
+      <p:sp>
+        <p:nvSpPr>
+          <p:cNvPr id="22" name="CuadroTexto 21">
+            <a:extLst>
+              <a:ext uri="{FF2B5EF4-FFF2-40B4-BE49-F238E27FC236}">
+                <a16:creationId xmlns:a16="http://schemas.microsoft.com/office/drawing/2014/main" id="{4E0FFF16-16C2-0C14-BB68-7D4B67D87B5B}"/>
+              </a:ext>
+            </a:extLst>
+          </p:cNvPr>
+          <p:cNvSpPr txBox="1"/>
+          <p:nvPr/>
+        </p:nvSpPr>
+        <p:spPr>
+          <a:xfrm>
+            <a:off x="9507103" y="3272519"/>
+            <a:ext cx="1971039" cy="646331"/>
+          </a:xfrm>
+          <a:prstGeom prst="rect">
+            <a:avLst/>
+          </a:prstGeom>
+          <a:noFill/>
+        </p:spPr>
+        <p:txBody>
+          <a:bodyPr wrap="square" rtlCol="0">
+            <a:spAutoFit/>
+          </a:bodyPr>
+          <a:lstStyle/>
+          <a:p>
+            <a:r>
+              <a:rPr lang="es-CL" b="1" i="1" dirty="0">
+                <a:solidFill>
+                  <a:srgbClr val="FFC000"/>
+                </a:solidFill>
+              </a:rPr>
+              <a:t>Chores</a:t>
+            </a:r>
+          </a:p>
+          <a:p>
+            <a:r>
+              <a:rPr lang="es-CL" b="1" i="1" dirty="0">
+                <a:solidFill>
+                  <a:srgbClr val="FFC000"/>
+                </a:solidFill>
+              </a:rPr>
+              <a:t>(tareas rutinarias)</a:t>
+            </a:r>
+          </a:p>
+        </p:txBody>
+      </p:sp>
+      <p:sp>
+        <p:nvSpPr>
+          <p:cNvPr id="23" name="CuadroTexto 22">
+            <a:extLst>
+              <a:ext uri="{FF2B5EF4-FFF2-40B4-BE49-F238E27FC236}">
+                <a16:creationId xmlns:a16="http://schemas.microsoft.com/office/drawing/2014/main" id="{A88E4CDB-450E-FAAF-83AA-5623C6824247}"/>
+              </a:ext>
+            </a:extLst>
+          </p:cNvPr>
+          <p:cNvSpPr txBox="1"/>
+          <p:nvPr/>
+        </p:nvSpPr>
+        <p:spPr>
+          <a:xfrm>
+            <a:off x="6098663" y="2639239"/>
+            <a:ext cx="3038048" cy="369332"/>
+          </a:xfrm>
+          <a:prstGeom prst="rect">
+            <a:avLst/>
+          </a:prstGeom>
+          <a:noFill/>
+        </p:spPr>
+        <p:txBody>
+          <a:bodyPr wrap="square" rtlCol="0">
+            <a:spAutoFit/>
+          </a:bodyPr>
+          <a:lstStyle/>
+          <a:p>
+            <a:r>
+              <a:rPr lang="es-CL" b="1" i="1" dirty="0" err="1"/>
+              <a:t>Bad</a:t>
+            </a:r>
+            <a:r>
+              <a:rPr lang="es-CL" b="1" i="1" dirty="0"/>
+              <a:t> </a:t>
+            </a:r>
+            <a:r>
+              <a:rPr lang="es-CL" b="1" i="1" dirty="0" err="1"/>
+              <a:t>for</a:t>
+            </a:r>
+            <a:r>
+              <a:rPr lang="es-CL" b="1" i="1" dirty="0"/>
+              <a:t> </a:t>
+            </a:r>
+            <a:r>
+              <a:rPr lang="es-CL" b="1" i="1" dirty="0" err="1"/>
+              <a:t>you</a:t>
+            </a:r>
+            <a:endParaRPr lang="es-CL" b="1" i="1" dirty="0"/>
+          </a:p>
+        </p:txBody>
+      </p:sp>
+      <p:sp>
+        <p:nvSpPr>
+          <p:cNvPr id="24" name="CuadroTexto 23">
+            <a:extLst>
+              <a:ext uri="{FF2B5EF4-FFF2-40B4-BE49-F238E27FC236}">
+                <a16:creationId xmlns:a16="http://schemas.microsoft.com/office/drawing/2014/main" id="{58044EA5-458E-AA93-FF59-5716A172B098}"/>
+              </a:ext>
+            </a:extLst>
+          </p:cNvPr>
+          <p:cNvSpPr txBox="1"/>
+          <p:nvPr/>
+        </p:nvSpPr>
+        <p:spPr>
+          <a:xfrm>
+            <a:off x="9136711" y="2615625"/>
+            <a:ext cx="3038048" cy="369332"/>
+          </a:xfrm>
+          <a:prstGeom prst="rect">
+            <a:avLst/>
+          </a:prstGeom>
+          <a:noFill/>
+        </p:spPr>
+        <p:txBody>
+          <a:bodyPr wrap="square" rtlCol="0">
+            <a:spAutoFit/>
+          </a:bodyPr>
+          <a:lstStyle/>
+          <a:p>
+            <a:r>
+              <a:rPr lang="es-CL" b="1" i="1" dirty="0"/>
+              <a:t>Good </a:t>
+            </a:r>
+            <a:r>
+              <a:rPr lang="es-CL" b="1" i="1" dirty="0" err="1"/>
+              <a:t>for</a:t>
+            </a:r>
+            <a:r>
+              <a:rPr lang="es-CL" b="1" i="1" dirty="0"/>
+              <a:t> </a:t>
+            </a:r>
+            <a:r>
+              <a:rPr lang="es-CL" b="1" i="1" dirty="0" err="1"/>
+              <a:t>you</a:t>
+            </a:r>
+            <a:endParaRPr lang="es-CL" b="1" i="1" dirty="0"/>
+          </a:p>
+        </p:txBody>
+      </p:sp>
+      <p:sp>
+        <p:nvSpPr>
+          <p:cNvPr id="25" name="CuadroTexto 24">
+            <a:extLst>
+              <a:ext uri="{FF2B5EF4-FFF2-40B4-BE49-F238E27FC236}">
+                <a16:creationId xmlns:a16="http://schemas.microsoft.com/office/drawing/2014/main" id="{826A6338-B070-4003-2A2F-3D1AC0484AF4}"/>
+              </a:ext>
+            </a:extLst>
+          </p:cNvPr>
+          <p:cNvSpPr txBox="1"/>
+          <p:nvPr/>
+        </p:nvSpPr>
+        <p:spPr>
+          <a:xfrm>
+            <a:off x="8298962" y="855882"/>
+            <a:ext cx="3038048" cy="369332"/>
+          </a:xfrm>
+          <a:prstGeom prst="rect">
+            <a:avLst/>
+          </a:prstGeom>
+          <a:noFill/>
+        </p:spPr>
+        <p:txBody>
+          <a:bodyPr wrap="square" rtlCol="0">
+            <a:spAutoFit/>
+          </a:bodyPr>
+          <a:lstStyle/>
+          <a:p>
+            <a:r>
+              <a:rPr lang="es-CL" b="1" i="1" dirty="0" err="1"/>
+              <a:t>Enjoyable</a:t>
+            </a:r>
+            <a:endParaRPr lang="es-CL" b="1" i="1" dirty="0"/>
+          </a:p>
+        </p:txBody>
+      </p:sp>
+      <p:sp>
+        <p:nvSpPr>
+          <p:cNvPr id="26" name="CuadroTexto 25">
+            <a:extLst>
+              <a:ext uri="{FF2B5EF4-FFF2-40B4-BE49-F238E27FC236}">
+                <a16:creationId xmlns:a16="http://schemas.microsoft.com/office/drawing/2014/main" id="{C2F801DD-765B-799B-8586-9CEF9F3C8DC6}"/>
+              </a:ext>
+            </a:extLst>
+          </p:cNvPr>
+          <p:cNvSpPr txBox="1"/>
+          <p:nvPr/>
+        </p:nvSpPr>
+        <p:spPr>
+          <a:xfrm>
+            <a:off x="8329097" y="4835848"/>
+            <a:ext cx="3038048" cy="369332"/>
+          </a:xfrm>
+          <a:prstGeom prst="rect">
+            <a:avLst/>
+          </a:prstGeom>
+          <a:noFill/>
+        </p:spPr>
+        <p:txBody>
+          <a:bodyPr wrap="square" rtlCol="0">
+            <a:spAutoFit/>
+          </a:bodyPr>
+          <a:lstStyle/>
+          <a:p>
+            <a:r>
+              <a:rPr lang="es-CL" b="1" i="1" dirty="0" err="1"/>
+              <a:t>Unpleasant</a:t>
+            </a:r>
+            <a:endParaRPr lang="es-CL" b="1" i="1" dirty="0"/>
+          </a:p>
+        </p:txBody>
+      </p:sp>
+      <p:sp>
+        <p:nvSpPr>
+          <p:cNvPr id="28" name="CuadroTexto 27">
+            <a:extLst>
+              <a:ext uri="{FF2B5EF4-FFF2-40B4-BE49-F238E27FC236}">
+                <a16:creationId xmlns:a16="http://schemas.microsoft.com/office/drawing/2014/main" id="{7A8DFF91-D8C2-82F0-001C-4D69462B9254}"/>
+              </a:ext>
+            </a:extLst>
+          </p:cNvPr>
+          <p:cNvSpPr txBox="1"/>
+          <p:nvPr/>
+        </p:nvSpPr>
+        <p:spPr>
+          <a:xfrm>
+            <a:off x="8547431" y="4133783"/>
+            <a:ext cx="3038048" cy="646331"/>
+          </a:xfrm>
+          <a:prstGeom prst="rect">
+            <a:avLst/>
+          </a:prstGeom>
+          <a:noFill/>
+        </p:spPr>
+        <p:txBody>
+          <a:bodyPr wrap="square" rtlCol="0">
+            <a:spAutoFit/>
+          </a:bodyPr>
+          <a:lstStyle/>
+          <a:p>
+            <a:r>
+              <a:rPr lang="es-CL" i="1" dirty="0"/>
+              <a:t>Cursos de entrenamiento (trabajo) </a:t>
+            </a:r>
+          </a:p>
+        </p:txBody>
+      </p:sp>
+      <p:sp>
+        <p:nvSpPr>
+          <p:cNvPr id="29" name="CuadroTexto 28">
+            <a:extLst>
+              <a:ext uri="{FF2B5EF4-FFF2-40B4-BE49-F238E27FC236}">
+                <a16:creationId xmlns:a16="http://schemas.microsoft.com/office/drawing/2014/main" id="{C8DEC8C6-AB86-9828-2388-1550872ED7DC}"/>
+              </a:ext>
+            </a:extLst>
+          </p:cNvPr>
+          <p:cNvSpPr txBox="1"/>
+          <p:nvPr/>
+        </p:nvSpPr>
+        <p:spPr>
+          <a:xfrm>
+            <a:off x="5819922" y="4339867"/>
+            <a:ext cx="3038048" cy="369332"/>
+          </a:xfrm>
+          <a:prstGeom prst="rect">
+            <a:avLst/>
+          </a:prstGeom>
+          <a:noFill/>
+        </p:spPr>
+        <p:txBody>
+          <a:bodyPr wrap="square" rtlCol="0">
+            <a:spAutoFit/>
+          </a:bodyPr>
+          <a:lstStyle/>
+          <a:p>
+            <a:r>
+              <a:rPr lang="es-CL" i="1" dirty="0"/>
+              <a:t>Control de gastos</a:t>
+            </a:r>
+          </a:p>
+        </p:txBody>
+      </p:sp>
+      <p:sp>
+        <p:nvSpPr>
+          <p:cNvPr id="30" name="CuadroTexto 29">
+            <a:extLst>
+              <a:ext uri="{FF2B5EF4-FFF2-40B4-BE49-F238E27FC236}">
+                <a16:creationId xmlns:a16="http://schemas.microsoft.com/office/drawing/2014/main" id="{5A2CE433-E5CE-EB1A-ED29-45F04281C369}"/>
+              </a:ext>
+            </a:extLst>
+          </p:cNvPr>
+          <p:cNvSpPr txBox="1"/>
+          <p:nvPr/>
+        </p:nvSpPr>
+        <p:spPr>
+          <a:xfrm>
+            <a:off x="8547431" y="1971292"/>
+            <a:ext cx="3038048" cy="369332"/>
+          </a:xfrm>
+          <a:prstGeom prst="rect">
+            <a:avLst/>
+          </a:prstGeom>
+          <a:noFill/>
+        </p:spPr>
+        <p:txBody>
+          <a:bodyPr wrap="square" rtlCol="0">
+            <a:spAutoFit/>
+          </a:bodyPr>
+          <a:lstStyle/>
+          <a:p>
+            <a:r>
+              <a:rPr lang="es-CL" i="1" dirty="0" err="1"/>
+              <a:t>playing</a:t>
+            </a:r>
+            <a:r>
+              <a:rPr lang="es-CL" i="1" dirty="0"/>
+              <a:t> </a:t>
+            </a:r>
+            <a:r>
+              <a:rPr lang="es-CL" i="1" dirty="0" err="1"/>
+              <a:t>games</a:t>
+            </a:r>
+            <a:endParaRPr lang="es-CL" i="1" dirty="0"/>
+          </a:p>
+        </p:txBody>
+      </p:sp>
+      <p:sp>
+        <p:nvSpPr>
+          <p:cNvPr id="31" name="CuadroTexto 30">
+            <a:extLst>
+              <a:ext uri="{FF2B5EF4-FFF2-40B4-BE49-F238E27FC236}">
+                <a16:creationId xmlns:a16="http://schemas.microsoft.com/office/drawing/2014/main" id="{9351118B-8416-99DC-95C1-7FCBA7C722B6}"/>
+              </a:ext>
+            </a:extLst>
+          </p:cNvPr>
+          <p:cNvSpPr txBox="1"/>
+          <p:nvPr/>
+        </p:nvSpPr>
+        <p:spPr>
+          <a:xfrm>
+            <a:off x="5350230" y="5383896"/>
+            <a:ext cx="7015480" cy="1384995"/>
+          </a:xfrm>
+          <a:prstGeom prst="rect">
+            <a:avLst/>
+          </a:prstGeom>
+          <a:noFill/>
+        </p:spPr>
+        <p:txBody>
+          <a:bodyPr wrap="square" rtlCol="0">
+            <a:spAutoFit/>
+          </a:bodyPr>
+          <a:lstStyle/>
+          <a:p>
+            <a:pPr marL="285750" indent="-285750">
+              <a:buFont typeface="Arial" panose="020B0604020202020204" pitchFamily="34" charset="0"/>
+              <a:buChar char="•"/>
+            </a:pPr>
+            <a:r>
+              <a:rPr lang="es-CL" sz="1400" b="1" dirty="0" err="1"/>
+              <a:t>Wholesome</a:t>
+            </a:r>
+            <a:r>
+              <a:rPr lang="es-CL" sz="1400" b="1" dirty="0"/>
+              <a:t> (actividades sanas):</a:t>
+            </a:r>
+            <a:r>
+              <a:rPr lang="es-CL" sz="1400" dirty="0"/>
+              <a:t> No uses IA. Disfrútalas.</a:t>
+            </a:r>
+            <a:br>
+              <a:rPr lang="es-CL" sz="1400" dirty="0"/>
+            </a:br>
+            <a:r>
+              <a:rPr lang="es-CL" sz="1400" b="1" dirty="0" err="1"/>
+              <a:t>Toxic</a:t>
+            </a:r>
+            <a:r>
+              <a:rPr lang="es-CL" sz="1400" b="1" dirty="0"/>
+              <a:t> (actividades tóxicas):</a:t>
+            </a:r>
+            <a:r>
+              <a:rPr lang="es-CL" sz="1400" dirty="0"/>
+              <a:t> Usa IA para automatizarlas o eliminarlas. No queremos lidiar con ellas.</a:t>
+            </a:r>
+            <a:br>
+              <a:rPr lang="es-CL" sz="1400" dirty="0"/>
+            </a:br>
+            <a:r>
+              <a:rPr lang="es-CL" sz="1400" b="1" dirty="0"/>
+              <a:t>Chores (tareas domésticas o rutinarias):</a:t>
+            </a:r>
+            <a:r>
+              <a:rPr lang="es-CL" sz="1400" dirty="0"/>
+              <a:t> Usa IA para hacerlas más placenteras. </a:t>
+            </a:r>
+            <a:r>
+              <a:rPr lang="es-CL" sz="1400" i="1" dirty="0"/>
+              <a:t>(Sigan pensando.)</a:t>
+            </a:r>
+            <a:br>
+              <a:rPr lang="es-CL" sz="1400" dirty="0"/>
+            </a:br>
+            <a:r>
+              <a:rPr lang="es-CL" sz="1400" b="1" dirty="0" err="1"/>
+              <a:t>Vices</a:t>
+            </a:r>
+            <a:r>
+              <a:rPr lang="es-CL" sz="1400" b="1" dirty="0"/>
+              <a:t> (vicios):</a:t>
+            </a:r>
+            <a:r>
+              <a:rPr lang="es-CL" sz="1400" dirty="0"/>
+              <a:t> Usa IA para evitar hacerlas.</a:t>
+            </a:r>
+            <a:endParaRPr lang="es-CL" sz="1600" i="1" dirty="0"/>
+          </a:p>
+        </p:txBody>
+      </p:sp>
+    </p:spTree>
+    <p:extLst>
+      <p:ext uri="{BB962C8B-B14F-4D97-AF65-F5344CB8AC3E}">
+        <p14:creationId xmlns:p14="http://schemas.microsoft.com/office/powerpoint/2010/main" val="3803486819"/>
+      </p:ext>
+    </p:extLst>
+  </p:cSld>
+  <p:clrMapOvr>
+    <a:masterClrMapping/>
+  </p:clrMapOvr>
+</p:sld>
+</file>
+
 <file path=ppt/slides/slide3.xml><?xml version="1.0" encoding="utf-8"?>
+<p:sld xmlns:a="http://schemas.openxmlformats.org/drawingml/2006/main" xmlns:r="http://schemas.openxmlformats.org/officeDocument/2006/relationships" xmlns:p="http://schemas.openxmlformats.org/presentationml/2006/main">
+  <p:cSld>
+    <p:spTree>
+      <p:nvGrpSpPr>
+        <p:cNvPr id="1" name="">
+          <a:extLst>
+            <a:ext uri="{FF2B5EF4-FFF2-40B4-BE49-F238E27FC236}">
+              <a16:creationId xmlns:a16="http://schemas.microsoft.com/office/drawing/2014/main" id="{2B21AEF2-75E6-0366-DD3E-FED8A360FBE8}"/>
+            </a:ext>
+          </a:extLst>
+        </p:cNvPr>
+        <p:cNvGrpSpPr/>
+        <p:nvPr/>
+      </p:nvGrpSpPr>
+      <p:grpSpPr>
+        <a:xfrm>
+          <a:off x="0" y="0"/>
+          <a:ext cx="0" cy="0"/>
+          <a:chOff x="0" y="0"/>
+          <a:chExt cx="0" cy="0"/>
+        </a:xfrm>
+      </p:grpSpPr>
+      <p:sp>
+        <p:nvSpPr>
+          <p:cNvPr id="2" name="Título 1">
+            <a:extLst>
+              <a:ext uri="{FF2B5EF4-FFF2-40B4-BE49-F238E27FC236}">
+                <a16:creationId xmlns:a16="http://schemas.microsoft.com/office/drawing/2014/main" id="{ABB0FE27-C5C0-C624-770E-B35F1E4EB893}"/>
+              </a:ext>
+            </a:extLst>
+          </p:cNvPr>
+          <p:cNvSpPr>
+            <a:spLocks noGrp="1"/>
+          </p:cNvSpPr>
+          <p:nvPr>
+            <p:ph type="title"/>
+          </p:nvPr>
+        </p:nvSpPr>
+        <p:spPr>
+          <a:xfrm>
+            <a:off x="620313" y="193100"/>
+            <a:ext cx="10515600" cy="1325563"/>
+          </a:xfrm>
+        </p:spPr>
+        <p:txBody>
+          <a:bodyPr>
+            <a:noAutofit/>
+          </a:bodyPr>
+          <a:lstStyle/>
+          <a:p>
+            <a:r>
+              <a:rPr lang="es-MX" sz="3600" b="1" i="1" dirty="0"/>
+              <a:t>Noticias: </a:t>
+            </a:r>
+            <a:r>
+              <a:rPr lang="es-MX" sz="3600" i="1" dirty="0" err="1"/>
+              <a:t>World</a:t>
+            </a:r>
+            <a:r>
+              <a:rPr lang="es-MX" sz="3600" i="1" dirty="0"/>
+              <a:t> </a:t>
+            </a:r>
+            <a:r>
+              <a:rPr lang="es-MX" sz="3600" i="1" dirty="0" err="1"/>
+              <a:t>Models</a:t>
+            </a:r>
+            <a:r>
+              <a:rPr lang="es-MX" sz="3600" i="1" dirty="0"/>
+              <a:t>, la forma para entender el mundo.</a:t>
+            </a:r>
+            <a:endParaRPr lang="es-CL" sz="3600" i="1" dirty="0"/>
+          </a:p>
+        </p:txBody>
+      </p:sp>
+      <p:pic>
+        <p:nvPicPr>
+          <p:cNvPr id="4" name="Picture 2" descr="Duoc UC - Learn Chile">
+            <a:extLst>
+              <a:ext uri="{FF2B5EF4-FFF2-40B4-BE49-F238E27FC236}">
+                <a16:creationId xmlns:a16="http://schemas.microsoft.com/office/drawing/2014/main" id="{87E7D134-7ECB-4142-AB8B-F154A2BE056C}"/>
+              </a:ext>
+            </a:extLst>
+          </p:cNvPr>
+          <p:cNvPicPr>
+            <a:picLocks noChangeAspect="1" noChangeArrowheads="1"/>
+          </p:cNvPicPr>
+          <p:nvPr/>
+        </p:nvPicPr>
+        <p:blipFill>
+          <a:blip r:embed="rId2">
+            <a:extLst>
+              <a:ext uri="{28A0092B-C50C-407E-A947-70E740481C1C}">
+                <a14:useLocalDpi xmlns:a14="http://schemas.microsoft.com/office/drawing/2010/main" val="0"/>
+              </a:ext>
+            </a:extLst>
+          </a:blip>
+          <a:srcRect/>
+          <a:stretch>
+            <a:fillRect/>
+          </a:stretch>
+        </p:blipFill>
+        <p:spPr bwMode="auto">
+          <a:xfrm>
+            <a:off x="11135913" y="30480"/>
+            <a:ext cx="974807" cy="825402"/>
+          </a:xfrm>
+          <a:prstGeom prst="rect">
+            <a:avLst/>
+          </a:prstGeom>
+          <a:noFill/>
+          <a:extLst>
+            <a:ext uri="{909E8E84-426E-40DD-AFC4-6F175D3DCCD1}">
+              <a14:hiddenFill xmlns:a14="http://schemas.microsoft.com/office/drawing/2010/main">
+                <a:solidFill>
+                  <a:srgbClr val="FFFFFF"/>
+                </a:solidFill>
+              </a14:hiddenFill>
+            </a:ext>
+          </a:extLst>
+        </p:spPr>
+      </p:pic>
+      <p:sp>
+        <p:nvSpPr>
+          <p:cNvPr id="6" name="CuadroTexto 5">
+            <a:extLst>
+              <a:ext uri="{FF2B5EF4-FFF2-40B4-BE49-F238E27FC236}">
+                <a16:creationId xmlns:a16="http://schemas.microsoft.com/office/drawing/2014/main" id="{222AE019-7322-B94C-9C02-8C85BA93E042}"/>
+              </a:ext>
+            </a:extLst>
+          </p:cNvPr>
+          <p:cNvSpPr txBox="1"/>
+          <p:nvPr/>
+        </p:nvSpPr>
+        <p:spPr>
+          <a:xfrm>
+            <a:off x="503358" y="6291699"/>
+            <a:ext cx="7604321" cy="276999"/>
+          </a:xfrm>
+          <a:prstGeom prst="rect">
+            <a:avLst/>
+          </a:prstGeom>
+          <a:noFill/>
+        </p:spPr>
+        <p:txBody>
+          <a:bodyPr wrap="square">
+            <a:spAutoFit/>
+          </a:bodyPr>
+          <a:lstStyle/>
+          <a:p>
+            <a:r>
+              <a:rPr lang="es-CL" sz="1200" b="1" i="1" dirty="0"/>
+              <a:t>Nota:</a:t>
+            </a:r>
+            <a:r>
+              <a:rPr lang="es-CL" sz="1200" dirty="0"/>
+              <a:t> https://openreview.net/forum?id=klU4737opt</a:t>
+            </a:r>
+          </a:p>
+        </p:txBody>
+      </p:sp>
+      <p:pic>
+        <p:nvPicPr>
+          <p:cNvPr id="5" name="Imagen 4">
+            <a:extLst>
+              <a:ext uri="{FF2B5EF4-FFF2-40B4-BE49-F238E27FC236}">
+                <a16:creationId xmlns:a16="http://schemas.microsoft.com/office/drawing/2014/main" id="{CBD955AE-141E-A901-2608-F605953A410D}"/>
+              </a:ext>
+            </a:extLst>
+          </p:cNvPr>
+          <p:cNvPicPr>
+            <a:picLocks noChangeAspect="1"/>
+          </p:cNvPicPr>
+          <p:nvPr/>
+        </p:nvPicPr>
+        <p:blipFill>
+          <a:blip r:embed="rId3"/>
+          <a:stretch>
+            <a:fillRect/>
+          </a:stretch>
+        </p:blipFill>
+        <p:spPr>
+          <a:xfrm>
+            <a:off x="620313" y="1582914"/>
+            <a:ext cx="6669888" cy="4097017"/>
+          </a:xfrm>
+          <a:prstGeom prst="rect">
+            <a:avLst/>
+          </a:prstGeom>
+        </p:spPr>
+      </p:pic>
+      <p:pic>
+        <p:nvPicPr>
+          <p:cNvPr id="9" name="Imagen 8">
+            <a:extLst>
+              <a:ext uri="{FF2B5EF4-FFF2-40B4-BE49-F238E27FC236}">
+                <a16:creationId xmlns:a16="http://schemas.microsoft.com/office/drawing/2014/main" id="{4D5FB72A-0A51-B398-6D35-080610EDC33B}"/>
+              </a:ext>
+            </a:extLst>
+          </p:cNvPr>
+          <p:cNvPicPr>
+            <a:picLocks noChangeAspect="1"/>
+          </p:cNvPicPr>
+          <p:nvPr/>
+        </p:nvPicPr>
+        <p:blipFill>
+          <a:blip r:embed="rId4"/>
+          <a:stretch>
+            <a:fillRect/>
+          </a:stretch>
+        </p:blipFill>
+        <p:spPr>
+          <a:xfrm>
+            <a:off x="7225129" y="1381153"/>
+            <a:ext cx="4615148" cy="2047847"/>
+          </a:xfrm>
+          <a:prstGeom prst="rect">
+            <a:avLst/>
+          </a:prstGeom>
+        </p:spPr>
+      </p:pic>
+      <p:pic>
+        <p:nvPicPr>
+          <p:cNvPr id="11" name="Imagen 10">
+            <a:extLst>
+              <a:ext uri="{FF2B5EF4-FFF2-40B4-BE49-F238E27FC236}">
+                <a16:creationId xmlns:a16="http://schemas.microsoft.com/office/drawing/2014/main" id="{B2A5D2FA-89B6-0EC0-9FB3-A560E1DD7335}"/>
+              </a:ext>
+            </a:extLst>
+          </p:cNvPr>
+          <p:cNvPicPr>
+            <a:picLocks noChangeAspect="1"/>
+          </p:cNvPicPr>
+          <p:nvPr/>
+        </p:nvPicPr>
+        <p:blipFill>
+          <a:blip r:embed="rId5"/>
+          <a:stretch>
+            <a:fillRect/>
+          </a:stretch>
+        </p:blipFill>
+        <p:spPr>
+          <a:xfrm>
+            <a:off x="7445528" y="3631423"/>
+            <a:ext cx="4424101" cy="2309497"/>
+          </a:xfrm>
+          <a:prstGeom prst="rect">
+            <a:avLst/>
+          </a:prstGeom>
+        </p:spPr>
+      </p:pic>
+    </p:spTree>
+    <p:extLst>
+      <p:ext uri="{BB962C8B-B14F-4D97-AF65-F5344CB8AC3E}">
+        <p14:creationId xmlns:p14="http://schemas.microsoft.com/office/powerpoint/2010/main" val="3312062099"/>
+      </p:ext>
+    </p:extLst>
+  </p:cSld>
+  <p:clrMapOvr>
+    <a:masterClrMapping/>
+  </p:clrMapOvr>
+</p:sld>
+</file>
+
+<file path=ppt/slides/slide4.xml><?xml version="1.0" encoding="utf-8"?>
+<p:sld xmlns:a="http://schemas.openxmlformats.org/drawingml/2006/main" xmlns:r="http://schemas.openxmlformats.org/officeDocument/2006/relationships" xmlns:p="http://schemas.openxmlformats.org/presentationml/2006/main">
+  <p:cSld>
+    <p:spTree>
+      <p:nvGrpSpPr>
+        <p:cNvPr id="1" name="">
+          <a:extLst>
+            <a:ext uri="{FF2B5EF4-FFF2-40B4-BE49-F238E27FC236}">
+              <a16:creationId xmlns:a16="http://schemas.microsoft.com/office/drawing/2014/main" id="{090C54F8-E719-FE80-7B27-BE9C8FD2C0C3}"/>
+            </a:ext>
+          </a:extLst>
+        </p:cNvPr>
+        <p:cNvGrpSpPr/>
+        <p:nvPr/>
+      </p:nvGrpSpPr>
+      <p:grpSpPr>
+        <a:xfrm>
+          <a:off x="0" y="0"/>
+          <a:ext cx="0" cy="0"/>
+          <a:chOff x="0" y="0"/>
+          <a:chExt cx="0" cy="0"/>
+        </a:xfrm>
+      </p:grpSpPr>
+      <p:sp>
+        <p:nvSpPr>
+          <p:cNvPr id="2" name="Título 1">
+            <a:extLst>
+              <a:ext uri="{FF2B5EF4-FFF2-40B4-BE49-F238E27FC236}">
+                <a16:creationId xmlns:a16="http://schemas.microsoft.com/office/drawing/2014/main" id="{B97D7A6A-A5AC-35F8-BAE5-0247D8740509}"/>
+              </a:ext>
+            </a:extLst>
+          </p:cNvPr>
+          <p:cNvSpPr>
+            <a:spLocks noGrp="1"/>
+          </p:cNvSpPr>
+          <p:nvPr>
+            <p:ph type="title"/>
+          </p:nvPr>
+        </p:nvSpPr>
+        <p:spPr>
+          <a:xfrm>
+            <a:off x="620313" y="193100"/>
+            <a:ext cx="10515600" cy="1325563"/>
+          </a:xfrm>
+        </p:spPr>
+        <p:txBody>
+          <a:bodyPr>
+            <a:noAutofit/>
+          </a:bodyPr>
+          <a:lstStyle/>
+          <a:p>
+            <a:r>
+              <a:rPr lang="es-MX" sz="3600" b="1" i="1" dirty="0"/>
+              <a:t>Noticias: </a:t>
+            </a:r>
+            <a:r>
+              <a:rPr lang="es-MX" sz="3600" i="1" dirty="0" err="1"/>
+              <a:t>DashAI</a:t>
+            </a:r>
+            <a:r>
+              <a:rPr lang="es-MX" sz="3600" i="1" dirty="0"/>
+              <a:t>, la plataforma chilena de AI.</a:t>
+            </a:r>
+            <a:endParaRPr lang="es-CL" sz="3600" i="1" dirty="0"/>
+          </a:p>
+        </p:txBody>
+      </p:sp>
+      <p:pic>
+        <p:nvPicPr>
+          <p:cNvPr id="4" name="Picture 2" descr="Duoc UC - Learn Chile">
+            <a:extLst>
+              <a:ext uri="{FF2B5EF4-FFF2-40B4-BE49-F238E27FC236}">
+                <a16:creationId xmlns:a16="http://schemas.microsoft.com/office/drawing/2014/main" id="{7AC54625-B6F6-7A5C-8747-F8B7487B10BB}"/>
+              </a:ext>
+            </a:extLst>
+          </p:cNvPr>
+          <p:cNvPicPr>
+            <a:picLocks noChangeAspect="1" noChangeArrowheads="1"/>
+          </p:cNvPicPr>
+          <p:nvPr/>
+        </p:nvPicPr>
+        <p:blipFill>
+          <a:blip r:embed="rId2">
+            <a:extLst>
+              <a:ext uri="{28A0092B-C50C-407E-A947-70E740481C1C}">
+                <a14:useLocalDpi xmlns:a14="http://schemas.microsoft.com/office/drawing/2010/main" val="0"/>
+              </a:ext>
+            </a:extLst>
+          </a:blip>
+          <a:srcRect/>
+          <a:stretch>
+            <a:fillRect/>
+          </a:stretch>
+        </p:blipFill>
+        <p:spPr bwMode="auto">
+          <a:xfrm>
+            <a:off x="11135913" y="30480"/>
+            <a:ext cx="974807" cy="825402"/>
+          </a:xfrm>
+          <a:prstGeom prst="rect">
+            <a:avLst/>
+          </a:prstGeom>
+          <a:noFill/>
+          <a:extLst>
+            <a:ext uri="{909E8E84-426E-40DD-AFC4-6F175D3DCCD1}">
+              <a14:hiddenFill xmlns:a14="http://schemas.microsoft.com/office/drawing/2010/main">
+                <a:solidFill>
+                  <a:srgbClr val="FFFFFF"/>
+                </a:solidFill>
+              </a14:hiddenFill>
+            </a:ext>
+          </a:extLst>
+        </p:spPr>
+      </p:pic>
+      <p:sp>
+        <p:nvSpPr>
+          <p:cNvPr id="6" name="CuadroTexto 5">
+            <a:extLst>
+              <a:ext uri="{FF2B5EF4-FFF2-40B4-BE49-F238E27FC236}">
+                <a16:creationId xmlns:a16="http://schemas.microsoft.com/office/drawing/2014/main" id="{E3BD4A9E-8F69-7130-E3B0-4F88154BF59A}"/>
+              </a:ext>
+            </a:extLst>
+          </p:cNvPr>
+          <p:cNvSpPr txBox="1"/>
+          <p:nvPr/>
+        </p:nvSpPr>
+        <p:spPr>
+          <a:xfrm>
+            <a:off x="503358" y="6291699"/>
+            <a:ext cx="7604321" cy="276999"/>
+          </a:xfrm>
+          <a:prstGeom prst="rect">
+            <a:avLst/>
+          </a:prstGeom>
+          <a:noFill/>
+        </p:spPr>
+        <p:txBody>
+          <a:bodyPr wrap="square">
+            <a:spAutoFit/>
+          </a:bodyPr>
+          <a:lstStyle/>
+          <a:p>
+            <a:r>
+              <a:rPr lang="es-CL" sz="1200" b="1" i="1" dirty="0"/>
+              <a:t>Nota:</a:t>
+            </a:r>
+            <a:r>
+              <a:rPr lang="es-CL" sz="1200" dirty="0"/>
+              <a:t> https://www.youtube.com/watch?v=guFF97F0Ctc&amp;t=2639s</a:t>
+            </a:r>
+          </a:p>
+        </p:txBody>
+      </p:sp>
+      <p:pic>
+        <p:nvPicPr>
+          <p:cNvPr id="7" name="Imagen 6">
+            <a:extLst>
+              <a:ext uri="{FF2B5EF4-FFF2-40B4-BE49-F238E27FC236}">
+                <a16:creationId xmlns:a16="http://schemas.microsoft.com/office/drawing/2014/main" id="{44BEF8F5-5DAD-8285-04DA-E6068731125C}"/>
+              </a:ext>
+            </a:extLst>
+          </p:cNvPr>
+          <p:cNvPicPr>
+            <a:picLocks noChangeAspect="1"/>
+          </p:cNvPicPr>
+          <p:nvPr/>
+        </p:nvPicPr>
+        <p:blipFill>
+          <a:blip r:embed="rId3"/>
+          <a:stretch>
+            <a:fillRect/>
+          </a:stretch>
+        </p:blipFill>
+        <p:spPr>
+          <a:xfrm>
+            <a:off x="503358" y="1521291"/>
+            <a:ext cx="5413966" cy="3968989"/>
+          </a:xfrm>
+          <a:prstGeom prst="rect">
+            <a:avLst/>
+          </a:prstGeom>
+        </p:spPr>
+      </p:pic>
+      <p:pic>
+        <p:nvPicPr>
+          <p:cNvPr id="10" name="Imagen 9">
+            <a:extLst>
+              <a:ext uri="{FF2B5EF4-FFF2-40B4-BE49-F238E27FC236}">
+                <a16:creationId xmlns:a16="http://schemas.microsoft.com/office/drawing/2014/main" id="{ED3EB2AD-9D43-893E-4860-A58DDFFDECE3}"/>
+              </a:ext>
+            </a:extLst>
+          </p:cNvPr>
+          <p:cNvPicPr>
+            <a:picLocks noChangeAspect="1"/>
+          </p:cNvPicPr>
+          <p:nvPr/>
+        </p:nvPicPr>
+        <p:blipFill>
+          <a:blip r:embed="rId4"/>
+          <a:stretch>
+            <a:fillRect/>
+          </a:stretch>
+        </p:blipFill>
+        <p:spPr>
+          <a:xfrm>
+            <a:off x="6072170" y="1350507"/>
+            <a:ext cx="5616471" cy="4278412"/>
+          </a:xfrm>
+          <a:prstGeom prst="rect">
+            <a:avLst/>
+          </a:prstGeom>
+        </p:spPr>
+      </p:pic>
+    </p:spTree>
+    <p:extLst>
+      <p:ext uri="{BB962C8B-B14F-4D97-AF65-F5344CB8AC3E}">
+        <p14:creationId xmlns:p14="http://schemas.microsoft.com/office/powerpoint/2010/main" val="3036911838"/>
+      </p:ext>
+    </p:extLst>
+  </p:cSld>
+  <p:clrMapOvr>
+    <a:masterClrMapping/>
+  </p:clrMapOvr>
+</p:sld>
+</file>
+
+<file path=ppt/slides/slide5.xml><?xml version="1.0" encoding="utf-8"?>
 <p:sld xmlns:a="http://schemas.openxmlformats.org/drawingml/2006/main" xmlns:r="http://schemas.openxmlformats.org/officeDocument/2006/relationships" xmlns:p="http://schemas.openxmlformats.org/presentationml/2006/main">
   <p:cSld>
     <p:spTree>
@@ -9771,7 +10375,7 @@
 </p:sld>
 </file>
 
-<file path=ppt/slides/slide4.xml><?xml version="1.0" encoding="utf-8"?>
+<file path=ppt/slides/slide6.xml><?xml version="1.0" encoding="utf-8"?>
 <p:sld xmlns:a="http://schemas.openxmlformats.org/drawingml/2006/main" xmlns:r="http://schemas.openxmlformats.org/officeDocument/2006/relationships" xmlns:p="http://schemas.openxmlformats.org/presentationml/2006/main">
   <p:cSld>
     <p:spTree>
@@ -10400,7 +11004,7 @@
 </p:sld>
 </file>
 
-<file path=ppt/slides/slide5.xml><?xml version="1.0" encoding="utf-8"?>
+<file path=ppt/slides/slide7.xml><?xml version="1.0" encoding="utf-8"?>
 <p:sld xmlns:a="http://schemas.openxmlformats.org/drawingml/2006/main" xmlns:r="http://schemas.openxmlformats.org/officeDocument/2006/relationships" xmlns:p="http://schemas.openxmlformats.org/presentationml/2006/main">
   <p:cSld>
     <p:spTree>
@@ -11221,7 +11825,7 @@
 </p:sld>
 </file>
 
-<file path=ppt/slides/slide6.xml><?xml version="1.0" encoding="utf-8"?>
+<file path=ppt/slides/slide8.xml><?xml version="1.0" encoding="utf-8"?>
 <p:sld xmlns:a="http://schemas.openxmlformats.org/drawingml/2006/main" xmlns:r="http://schemas.openxmlformats.org/officeDocument/2006/relationships" xmlns:p="http://schemas.openxmlformats.org/presentationml/2006/main">
   <p:cSld>
     <p:spTree>
@@ -11505,7 +12109,7 @@
 </p:sld>
 </file>
 
-<file path=ppt/slides/slide7.xml><?xml version="1.0" encoding="utf-8"?>
+<file path=ppt/slides/slide9.xml><?xml version="1.0" encoding="utf-8"?>
 <p:sld xmlns:a="http://schemas.openxmlformats.org/drawingml/2006/main" xmlns:r="http://schemas.openxmlformats.org/officeDocument/2006/relationships" xmlns:p="http://schemas.openxmlformats.org/presentationml/2006/main">
   <p:cSld>
     <p:spTree>
@@ -11644,7 +12248,7 @@
         </p:blipFill>
         <p:spPr>
           <a:xfrm>
-            <a:off x="2600960" y="1127759"/>
+            <a:off x="546335" y="1439259"/>
             <a:ext cx="7361114" cy="4301391"/>
           </a:xfrm>
           <a:prstGeom prst="rect">
@@ -11666,7 +12270,7 @@
         </p:nvSpPr>
         <p:spPr>
           <a:xfrm>
-            <a:off x="620313" y="6357123"/>
+            <a:off x="467913" y="6262530"/>
             <a:ext cx="6096000" cy="307777"/>
           </a:xfrm>
           <a:prstGeom prst="rect">
@@ -11691,353 +12295,93 @@
           </a:p>
         </p:txBody>
       </p:sp>
+      <p:sp>
+        <p:nvSpPr>
+          <p:cNvPr id="3" name="CuadroTexto 2">
+            <a:extLst>
+              <a:ext uri="{FF2B5EF4-FFF2-40B4-BE49-F238E27FC236}">
+                <a16:creationId xmlns:a16="http://schemas.microsoft.com/office/drawing/2014/main" id="{79C20964-55CA-8499-9EB0-C6921877DE24}"/>
+              </a:ext>
+            </a:extLst>
+          </p:cNvPr>
+          <p:cNvSpPr txBox="1"/>
+          <p:nvPr/>
+        </p:nvSpPr>
+        <p:spPr>
+          <a:xfrm>
+            <a:off x="7548213" y="1865735"/>
+            <a:ext cx="3794537" cy="3970318"/>
+          </a:xfrm>
+          <a:prstGeom prst="rect">
+            <a:avLst/>
+          </a:prstGeom>
+          <a:noFill/>
+        </p:spPr>
+        <p:txBody>
+          <a:bodyPr wrap="square" rtlCol="0">
+            <a:spAutoFit/>
+          </a:bodyPr>
+          <a:lstStyle/>
+          <a:p>
+            <a:r>
+              <a:rPr lang="es-MX" dirty="0">
+                <a:latin typeface="+mj-lt"/>
+              </a:rPr>
+              <a:t>Las alucinaciones son originadas como errores en la clasificación binaria durante el entrenamiento de los modelos. Si las declaraciones incorrectas no son distinguidas de los hechos, entonces las alucinaciones de los modelos son perpetuadas a través del proceso de entrenamiento. </a:t>
+            </a:r>
+          </a:p>
+          <a:p>
+            <a:endParaRPr lang="es-MX" dirty="0">
+              <a:latin typeface="+mj-lt"/>
+            </a:endParaRPr>
+          </a:p>
+          <a:p>
+            <a:endParaRPr lang="es-MX" dirty="0">
+              <a:latin typeface="+mj-lt"/>
+            </a:endParaRPr>
+          </a:p>
+          <a:p>
+            <a:r>
+              <a:rPr lang="es-MX" dirty="0">
+                <a:latin typeface="+mj-lt"/>
+              </a:rPr>
+              <a:t>Mucho </a:t>
+            </a:r>
+            <a:r>
+              <a:rPr lang="es-MX" dirty="0" err="1">
+                <a:latin typeface="+mj-lt"/>
+              </a:rPr>
+              <a:t>LLMs</a:t>
+            </a:r>
+            <a:r>
+              <a:rPr lang="es-MX" dirty="0">
+                <a:latin typeface="+mj-lt"/>
+              </a:rPr>
+              <a:t> son optimizados para ser buenos </a:t>
+            </a:r>
+            <a:r>
+              <a:rPr lang="es-MX" dirty="0" err="1">
+                <a:latin typeface="+mj-lt"/>
+              </a:rPr>
+              <a:t>testeadores</a:t>
+            </a:r>
+            <a:r>
+              <a:rPr lang="es-MX" dirty="0">
+                <a:latin typeface="+mj-lt"/>
+              </a:rPr>
+              <a:t>, y adivinar, lo que mejora el rendimiento de las métricas de testeos.  </a:t>
+            </a:r>
+            <a:r>
+              <a:rPr lang="es-MX" dirty="0"/>
+              <a:t> </a:t>
+            </a:r>
+          </a:p>
+        </p:txBody>
+      </p:sp>
     </p:spTree>
     <p:extLst>
       <p:ext uri="{BB962C8B-B14F-4D97-AF65-F5344CB8AC3E}">
         <p14:creationId xmlns:p14="http://schemas.microsoft.com/office/powerpoint/2010/main" val="2649512100"/>
-      </p:ext>
-    </p:extLst>
-  </p:cSld>
-  <p:clrMapOvr>
-    <a:masterClrMapping/>
-  </p:clrMapOvr>
-</p:sld>
-</file>
-
-<file path=ppt/slides/slide8.xml><?xml version="1.0" encoding="utf-8"?>
-<p:sld xmlns:a="http://schemas.openxmlformats.org/drawingml/2006/main" xmlns:r="http://schemas.openxmlformats.org/officeDocument/2006/relationships" xmlns:p="http://schemas.openxmlformats.org/presentationml/2006/main">
-  <p:cSld>
-    <p:spTree>
-      <p:nvGrpSpPr>
-        <p:cNvPr id="1" name="">
-          <a:extLst>
-            <a:ext uri="{FF2B5EF4-FFF2-40B4-BE49-F238E27FC236}">
-              <a16:creationId xmlns:a16="http://schemas.microsoft.com/office/drawing/2014/main" id="{EFA6E331-2129-3033-4809-19C077828FE1}"/>
-            </a:ext>
-          </a:extLst>
-        </p:cNvPr>
-        <p:cNvGrpSpPr/>
-        <p:nvPr/>
-      </p:nvGrpSpPr>
-      <p:grpSpPr>
-        <a:xfrm>
-          <a:off x="0" y="0"/>
-          <a:ext cx="0" cy="0"/>
-          <a:chOff x="0" y="0"/>
-          <a:chExt cx="0" cy="0"/>
-        </a:xfrm>
-      </p:grpSpPr>
-      <p:sp>
-        <p:nvSpPr>
-          <p:cNvPr id="2" name="Título 1">
-            <a:extLst>
-              <a:ext uri="{FF2B5EF4-FFF2-40B4-BE49-F238E27FC236}">
-                <a16:creationId xmlns:a16="http://schemas.microsoft.com/office/drawing/2014/main" id="{BFEF6433-4A5C-19A2-13DC-0115A5AFF347}"/>
-              </a:ext>
-            </a:extLst>
-          </p:cNvPr>
-          <p:cNvSpPr>
-            <a:spLocks noGrp="1"/>
-          </p:cNvSpPr>
-          <p:nvPr>
-            <p:ph type="title"/>
-          </p:nvPr>
-        </p:nvSpPr>
-        <p:spPr>
-          <a:xfrm>
-            <a:off x="267879" y="-20891"/>
-            <a:ext cx="10515600" cy="1325563"/>
-          </a:xfrm>
-        </p:spPr>
-        <p:txBody>
-          <a:bodyPr>
-            <a:noAutofit/>
-          </a:bodyPr>
-          <a:lstStyle/>
-          <a:p>
-            <a:r>
-              <a:rPr lang="es-CL" sz="3600" b="1" i="1" dirty="0"/>
-              <a:t>0’REILLY</a:t>
-            </a:r>
-            <a:r>
-              <a:rPr lang="es-CL" sz="3600" i="1" dirty="0"/>
-              <a:t>: AI </a:t>
-            </a:r>
-            <a:r>
-              <a:rPr lang="es-CL" sz="3600" i="1" dirty="0" err="1"/>
-              <a:t>Engineering</a:t>
-            </a:r>
-            <a:endParaRPr lang="es-CL" sz="3600" i="1" dirty="0"/>
-          </a:p>
-        </p:txBody>
-      </p:sp>
-      <p:pic>
-        <p:nvPicPr>
-          <p:cNvPr id="4" name="Picture 2" descr="Duoc UC - Learn Chile">
-            <a:extLst>
-              <a:ext uri="{FF2B5EF4-FFF2-40B4-BE49-F238E27FC236}">
-                <a16:creationId xmlns:a16="http://schemas.microsoft.com/office/drawing/2014/main" id="{FF21B870-861B-6C99-D69A-DBBFDF2E8719}"/>
-              </a:ext>
-            </a:extLst>
-          </p:cNvPr>
-          <p:cNvPicPr>
-            <a:picLocks noChangeAspect="1" noChangeArrowheads="1"/>
-          </p:cNvPicPr>
-          <p:nvPr/>
-        </p:nvPicPr>
-        <p:blipFill>
-          <a:blip r:embed="rId2">
-            <a:extLst>
-              <a:ext uri="{28A0092B-C50C-407E-A947-70E740481C1C}">
-                <a14:useLocalDpi xmlns:a14="http://schemas.microsoft.com/office/drawing/2010/main" val="0"/>
-              </a:ext>
-            </a:extLst>
-          </a:blip>
-          <a:srcRect/>
-          <a:stretch>
-            <a:fillRect/>
-          </a:stretch>
-        </p:blipFill>
-        <p:spPr bwMode="auto">
-          <a:xfrm>
-            <a:off x="11135913" y="30480"/>
-            <a:ext cx="974807" cy="825402"/>
-          </a:xfrm>
-          <a:prstGeom prst="rect">
-            <a:avLst/>
-          </a:prstGeom>
-          <a:noFill/>
-          <a:extLst>
-            <a:ext uri="{909E8E84-426E-40DD-AFC4-6F175D3DCCD1}">
-              <a14:hiddenFill xmlns:a14="http://schemas.microsoft.com/office/drawing/2010/main">
-                <a:solidFill>
-                  <a:srgbClr val="FFFFFF"/>
-                </a:solidFill>
-              </a14:hiddenFill>
-            </a:ext>
-          </a:extLst>
-        </p:spPr>
-      </p:pic>
-      <p:pic>
-        <p:nvPicPr>
-          <p:cNvPr id="13" name="Imagen 12">
-            <a:extLst>
-              <a:ext uri="{FF2B5EF4-FFF2-40B4-BE49-F238E27FC236}">
-                <a16:creationId xmlns:a16="http://schemas.microsoft.com/office/drawing/2014/main" id="{C7DC5221-9EB1-43DE-6A27-44C2C30319D1}"/>
-              </a:ext>
-            </a:extLst>
-          </p:cNvPr>
-          <p:cNvPicPr>
-            <a:picLocks noChangeAspect="1"/>
-          </p:cNvPicPr>
-          <p:nvPr/>
-        </p:nvPicPr>
-        <p:blipFill>
-          <a:blip r:embed="rId3"/>
-          <a:stretch>
-            <a:fillRect/>
-          </a:stretch>
-        </p:blipFill>
-        <p:spPr>
-          <a:xfrm>
-            <a:off x="3928639" y="855882"/>
-            <a:ext cx="4334721" cy="5304773"/>
-          </a:xfrm>
-          <a:prstGeom prst="rect">
-            <a:avLst/>
-          </a:prstGeom>
-        </p:spPr>
-      </p:pic>
-      <p:sp>
-        <p:nvSpPr>
-          <p:cNvPr id="15" name="CuadroTexto 14">
-            <a:extLst>
-              <a:ext uri="{FF2B5EF4-FFF2-40B4-BE49-F238E27FC236}">
-                <a16:creationId xmlns:a16="http://schemas.microsoft.com/office/drawing/2014/main" id="{908D9413-0AB0-5D14-6E8B-7F130DC2AC00}"/>
-              </a:ext>
-            </a:extLst>
-          </p:cNvPr>
-          <p:cNvSpPr txBox="1"/>
-          <p:nvPr/>
-        </p:nvSpPr>
-        <p:spPr>
-          <a:xfrm>
-            <a:off x="2409266" y="6250820"/>
-            <a:ext cx="7801283" cy="369332"/>
-          </a:xfrm>
-          <a:prstGeom prst="rect">
-            <a:avLst/>
-          </a:prstGeom>
-          <a:noFill/>
-        </p:spPr>
-        <p:txBody>
-          <a:bodyPr wrap="square">
-            <a:spAutoFit/>
-          </a:bodyPr>
-          <a:lstStyle/>
-          <a:p>
-            <a:r>
-              <a:rPr lang="en-US" dirty="0"/>
-              <a:t>“</a:t>
-            </a:r>
-            <a:r>
-              <a:rPr lang="en-US" i="1" dirty="0"/>
-              <a:t>Anyone can communicate, but not everyone can communicate effectively</a:t>
-            </a:r>
-            <a:r>
-              <a:rPr lang="en-US" dirty="0"/>
-              <a:t>”.</a:t>
-            </a:r>
-            <a:endParaRPr lang="es-CL" sz="1800" b="1" i="1" dirty="0"/>
-          </a:p>
-        </p:txBody>
-      </p:sp>
-    </p:spTree>
-    <p:extLst>
-      <p:ext uri="{BB962C8B-B14F-4D97-AF65-F5344CB8AC3E}">
-        <p14:creationId xmlns:p14="http://schemas.microsoft.com/office/powerpoint/2010/main" val="2803331793"/>
-      </p:ext>
-    </p:extLst>
-  </p:cSld>
-  <p:clrMapOvr>
-    <a:masterClrMapping/>
-  </p:clrMapOvr>
-</p:sld>
-</file>
-
-<file path=ppt/slides/slide9.xml><?xml version="1.0" encoding="utf-8"?>
-<p:sld xmlns:a="http://schemas.openxmlformats.org/drawingml/2006/main" xmlns:r="http://schemas.openxmlformats.org/officeDocument/2006/relationships" xmlns:p="http://schemas.openxmlformats.org/presentationml/2006/main">
-  <p:cSld>
-    <p:spTree>
-      <p:nvGrpSpPr>
-        <p:cNvPr id="1" name="">
-          <a:extLst>
-            <a:ext uri="{FF2B5EF4-FFF2-40B4-BE49-F238E27FC236}">
-              <a16:creationId xmlns:a16="http://schemas.microsoft.com/office/drawing/2014/main" id="{C6B257B2-31A0-85D8-4B12-CD0BE347BA6B}"/>
-            </a:ext>
-          </a:extLst>
-        </p:cNvPr>
-        <p:cNvGrpSpPr/>
-        <p:nvPr/>
-      </p:nvGrpSpPr>
-      <p:grpSpPr>
-        <a:xfrm>
-          <a:off x="0" y="0"/>
-          <a:ext cx="0" cy="0"/>
-          <a:chOff x="0" y="0"/>
-          <a:chExt cx="0" cy="0"/>
-        </a:xfrm>
-      </p:grpSpPr>
-      <p:sp>
-        <p:nvSpPr>
-          <p:cNvPr id="2" name="Título 1">
-            <a:extLst>
-              <a:ext uri="{FF2B5EF4-FFF2-40B4-BE49-F238E27FC236}">
-                <a16:creationId xmlns:a16="http://schemas.microsoft.com/office/drawing/2014/main" id="{0969BC08-3932-D5B2-1A43-AF96CCAE675B}"/>
-              </a:ext>
-            </a:extLst>
-          </p:cNvPr>
-          <p:cNvSpPr>
-            <a:spLocks noGrp="1"/>
-          </p:cNvSpPr>
-          <p:nvPr>
-            <p:ph type="title"/>
-          </p:nvPr>
-        </p:nvSpPr>
-        <p:spPr>
-          <a:xfrm>
-            <a:off x="691433" y="1912016"/>
-            <a:ext cx="10515600" cy="1325563"/>
-          </a:xfrm>
-        </p:spPr>
-        <p:txBody>
-          <a:bodyPr>
-            <a:noAutofit/>
-          </a:bodyPr>
-          <a:lstStyle/>
-          <a:p>
-            <a:r>
-              <a:rPr lang="es-CL" sz="4000" b="1" i="1" dirty="0" err="1"/>
-              <a:t>Prompt</a:t>
-            </a:r>
-            <a:r>
-              <a:rPr lang="es-CL" sz="4000" b="1" i="1" dirty="0"/>
-              <a:t> </a:t>
-            </a:r>
-            <a:r>
-              <a:rPr lang="es-CL" sz="4000" b="1" i="1" dirty="0" err="1"/>
-              <a:t>Engineering</a:t>
-            </a:r>
-            <a:r>
-              <a:rPr lang="es-CL" sz="4000" b="1" i="1" dirty="0"/>
-              <a:t> </a:t>
-            </a:r>
-            <a:r>
-              <a:rPr lang="es-CL" sz="3600" i="1" dirty="0"/>
-              <a:t>es una técnica para mejorar las respuestas de los modelos, buscando consistencia, reducción de alucinaciones y personalización de los </a:t>
-            </a:r>
-            <a:r>
-              <a:rPr lang="es-CL" sz="3600" i="1" dirty="0" err="1"/>
-              <a:t>LLMs</a:t>
-            </a:r>
-            <a:r>
-              <a:rPr lang="es-CL" sz="3600" i="1" dirty="0"/>
-              <a:t>.</a:t>
-            </a:r>
-          </a:p>
-        </p:txBody>
-      </p:sp>
-      <p:pic>
-        <p:nvPicPr>
-          <p:cNvPr id="4" name="Picture 2" descr="Duoc UC - Learn Chile">
-            <a:extLst>
-              <a:ext uri="{FF2B5EF4-FFF2-40B4-BE49-F238E27FC236}">
-                <a16:creationId xmlns:a16="http://schemas.microsoft.com/office/drawing/2014/main" id="{B2A28363-6D93-DE8C-F932-8DCEC843DDF7}"/>
-              </a:ext>
-            </a:extLst>
-          </p:cNvPr>
-          <p:cNvPicPr>
-            <a:picLocks noChangeAspect="1" noChangeArrowheads="1"/>
-          </p:cNvPicPr>
-          <p:nvPr/>
-        </p:nvPicPr>
-        <p:blipFill>
-          <a:blip r:embed="rId3">
-            <a:extLst>
-              <a:ext uri="{28A0092B-C50C-407E-A947-70E740481C1C}">
-                <a14:useLocalDpi xmlns:a14="http://schemas.microsoft.com/office/drawing/2010/main" val="0"/>
-              </a:ext>
-            </a:extLst>
-          </a:blip>
-          <a:srcRect/>
-          <a:stretch>
-            <a:fillRect/>
-          </a:stretch>
-        </p:blipFill>
-        <p:spPr bwMode="auto">
-          <a:xfrm>
-            <a:off x="11135913" y="30480"/>
-            <a:ext cx="974807" cy="825402"/>
-          </a:xfrm>
-          <a:prstGeom prst="rect">
-            <a:avLst/>
-          </a:prstGeom>
-          <a:noFill/>
-          <a:extLst>
-            <a:ext uri="{909E8E84-426E-40DD-AFC4-6F175D3DCCD1}">
-              <a14:hiddenFill xmlns:a14="http://schemas.microsoft.com/office/drawing/2010/main">
-                <a:solidFill>
-                  <a:srgbClr val="FFFFFF"/>
-                </a:solidFill>
-              </a14:hiddenFill>
-            </a:ext>
-          </a:extLst>
-        </p:spPr>
-      </p:pic>
-    </p:spTree>
-    <p:extLst>
-      <p:ext uri="{BB962C8B-B14F-4D97-AF65-F5344CB8AC3E}">
-        <p14:creationId xmlns:p14="http://schemas.microsoft.com/office/powerpoint/2010/main" val="1195678763"/>
       </p:ext>
     </p:extLst>
   </p:cSld>
